--- a/docs/Lectures/Week12/Lecture12_GEOG2475_Geocoding.pptx
+++ b/docs/Lectures/Week12/Lecture12_GEOG2475_Geocoding.pptx
@@ -13,7 +13,7 @@
     <p:sldMasterId id="2147483759" r:id="rId9"/>
   </p:sldMasterIdLst>
   <p:notesMasterIdLst>
-    <p:notesMasterId r:id="rId37"/>
+    <p:notesMasterId r:id="rId38"/>
   </p:notesMasterIdLst>
   <p:sldIdLst>
     <p:sldId id="914" r:id="rId10"/>
@@ -42,7 +42,8 @@
     <p:sldId id="685" r:id="rId33"/>
     <p:sldId id="686" r:id="rId34"/>
     <p:sldId id="1648" r:id="rId35"/>
-    <p:sldId id="270" r:id="rId36"/>
+    <p:sldId id="1658" r:id="rId36"/>
+    <p:sldId id="1659" r:id="rId37"/>
   </p:sldIdLst>
   <p:sldSz cx="8229600" cy="5143500"/>
   <p:notesSz cx="7010400" cy="9296400"/>
@@ -160,6 +161,2782 @@
 </p:presentation>
 </file>
 
+<file path=ppt/diagrams/colors1.xml><?xml version="1.0" encoding="utf-8"?>
+<dgm:colorsDef xmlns:dgm="http://schemas.openxmlformats.org/drawingml/2006/diagram" xmlns:a="http://schemas.openxmlformats.org/drawingml/2006/main" uniqueId="urn:microsoft.com/office/officeart/2018/5/colors/Iconchunking_neutralicon_colorful1">
+  <dgm:title val=""/>
+  <dgm:desc val=""/>
+  <dgm:catLst>
+    <dgm:cat type="colorful" pri="10100"/>
+  </dgm:catLst>
+  <dgm:styleLbl name="node0">
+    <dgm:fillClrLst meth="repeat">
+      <a:schemeClr val="accent1"/>
+    </dgm:fillClrLst>
+    <dgm:linClrLst meth="repeat">
+      <a:schemeClr val="lt1"/>
+    </dgm:linClrLst>
+    <dgm:effectClrLst/>
+    <dgm:txLinClrLst/>
+    <dgm:txFillClrLst/>
+    <dgm:txEffectClrLst/>
+  </dgm:styleLbl>
+  <dgm:styleLbl name="node1">
+    <dgm:fillClrLst meth="repeat">
+      <a:schemeClr val="bg1"/>
+    </dgm:fillClrLst>
+    <dgm:linClrLst meth="repeat">
+      <a:schemeClr val="lt1">
+        <a:alpha val="0"/>
+      </a:schemeClr>
+    </dgm:linClrLst>
+    <dgm:effectClrLst/>
+    <dgm:txLinClrLst/>
+    <dgm:txFillClrLst meth="repeat">
+      <a:schemeClr val="dk1"/>
+    </dgm:txFillClrLst>
+    <dgm:txEffectClrLst/>
+  </dgm:styleLbl>
+  <dgm:styleLbl name="alignNode1">
+    <dgm:fillClrLst meth="repeat">
+      <a:schemeClr val="accent2"/>
+      <a:schemeClr val="accent3"/>
+      <a:schemeClr val="accent4"/>
+      <a:schemeClr val="accent5"/>
+      <a:schemeClr val="accent6"/>
+    </dgm:fillClrLst>
+    <dgm:linClrLst meth="repeat">
+      <a:schemeClr val="accent2"/>
+      <a:schemeClr val="accent3"/>
+      <a:schemeClr val="accent4"/>
+      <a:schemeClr val="accent5"/>
+      <a:schemeClr val="accent6"/>
+    </dgm:linClrLst>
+    <dgm:effectClrLst/>
+    <dgm:txLinClrLst/>
+    <dgm:txFillClrLst/>
+    <dgm:txEffectClrLst/>
+  </dgm:styleLbl>
+  <dgm:styleLbl name="lnNode1">
+    <dgm:fillClrLst meth="repeat">
+      <a:schemeClr val="accent2"/>
+      <a:schemeClr val="accent3"/>
+      <a:schemeClr val="accent4"/>
+      <a:schemeClr val="accent5"/>
+      <a:schemeClr val="accent6"/>
+    </dgm:fillClrLst>
+    <dgm:linClrLst meth="repeat">
+      <a:schemeClr val="lt1"/>
+    </dgm:linClrLst>
+    <dgm:effectClrLst/>
+    <dgm:txLinClrLst/>
+    <dgm:txFillClrLst/>
+    <dgm:txEffectClrLst/>
+  </dgm:styleLbl>
+  <dgm:styleLbl name="vennNode1">
+    <dgm:fillClrLst meth="repeat">
+      <a:schemeClr val="accent2">
+        <a:alpha val="50000"/>
+      </a:schemeClr>
+      <a:schemeClr val="accent3">
+        <a:alpha val="50000"/>
+      </a:schemeClr>
+      <a:schemeClr val="accent4">
+        <a:alpha val="50000"/>
+      </a:schemeClr>
+      <a:schemeClr val="accent5">
+        <a:alpha val="50000"/>
+      </a:schemeClr>
+      <a:schemeClr val="accent6">
+        <a:alpha val="50000"/>
+      </a:schemeClr>
+    </dgm:fillClrLst>
+    <dgm:linClrLst meth="repeat">
+      <a:schemeClr val="lt1"/>
+    </dgm:linClrLst>
+    <dgm:effectClrLst/>
+    <dgm:txLinClrLst/>
+    <dgm:txFillClrLst/>
+    <dgm:txEffectClrLst/>
+  </dgm:styleLbl>
+  <dgm:styleLbl name="node2">
+    <dgm:fillClrLst>
+      <a:schemeClr val="accent2"/>
+    </dgm:fillClrLst>
+    <dgm:linClrLst meth="repeat">
+      <a:schemeClr val="lt1"/>
+    </dgm:linClrLst>
+    <dgm:effectClrLst/>
+    <dgm:txLinClrLst/>
+    <dgm:txFillClrLst/>
+    <dgm:txEffectClrLst/>
+  </dgm:styleLbl>
+  <dgm:styleLbl name="node3">
+    <dgm:fillClrLst>
+      <a:schemeClr val="accent3"/>
+    </dgm:fillClrLst>
+    <dgm:linClrLst meth="repeat">
+      <a:schemeClr val="lt1"/>
+    </dgm:linClrLst>
+    <dgm:effectClrLst/>
+    <dgm:txLinClrLst/>
+    <dgm:txFillClrLst/>
+    <dgm:txEffectClrLst/>
+  </dgm:styleLbl>
+  <dgm:styleLbl name="node4">
+    <dgm:fillClrLst>
+      <a:schemeClr val="accent4"/>
+    </dgm:fillClrLst>
+    <dgm:linClrLst meth="repeat">
+      <a:schemeClr val="lt1"/>
+    </dgm:linClrLst>
+    <dgm:effectClrLst/>
+    <dgm:txLinClrLst/>
+    <dgm:txFillClrLst/>
+    <dgm:txEffectClrLst/>
+  </dgm:styleLbl>
+  <dgm:styleLbl name="fgImgPlace1">
+    <dgm:fillClrLst meth="repeat">
+      <a:schemeClr val="accent2">
+        <a:tint val="50000"/>
+      </a:schemeClr>
+      <a:schemeClr val="accent3">
+        <a:tint val="50000"/>
+      </a:schemeClr>
+      <a:schemeClr val="accent4">
+        <a:tint val="50000"/>
+      </a:schemeClr>
+      <a:schemeClr val="accent5">
+        <a:tint val="50000"/>
+      </a:schemeClr>
+      <a:schemeClr val="accent6">
+        <a:tint val="50000"/>
+      </a:schemeClr>
+    </dgm:fillClrLst>
+    <dgm:linClrLst meth="repeat">
+      <a:schemeClr val="lt1"/>
+    </dgm:linClrLst>
+    <dgm:effectClrLst/>
+    <dgm:txLinClrLst/>
+    <dgm:txFillClrLst meth="repeat">
+      <a:schemeClr val="lt1"/>
+    </dgm:txFillClrLst>
+    <dgm:txEffectClrLst/>
+  </dgm:styleLbl>
+  <dgm:styleLbl name="alignImgPlace1">
+    <dgm:fillClrLst>
+      <a:schemeClr val="accent1">
+        <a:tint val="50000"/>
+      </a:schemeClr>
+      <a:schemeClr val="accent2">
+        <a:tint val="20000"/>
+      </a:schemeClr>
+    </dgm:fillClrLst>
+    <dgm:linClrLst meth="repeat">
+      <a:schemeClr val="lt1"/>
+    </dgm:linClrLst>
+    <dgm:effectClrLst/>
+    <dgm:txLinClrLst/>
+    <dgm:txFillClrLst meth="repeat">
+      <a:schemeClr val="lt1"/>
+    </dgm:txFillClrLst>
+    <dgm:txEffectClrLst/>
+  </dgm:styleLbl>
+  <dgm:styleLbl name="bgImgPlace1">
+    <dgm:fillClrLst>
+      <a:schemeClr val="accent1">
+        <a:tint val="50000"/>
+      </a:schemeClr>
+      <a:schemeClr val="accent2">
+        <a:tint val="20000"/>
+      </a:schemeClr>
+    </dgm:fillClrLst>
+    <dgm:linClrLst meth="repeat">
+      <a:schemeClr val="lt1"/>
+    </dgm:linClrLst>
+    <dgm:effectClrLst/>
+    <dgm:txLinClrLst/>
+    <dgm:txFillClrLst meth="repeat">
+      <a:schemeClr val="lt1"/>
+    </dgm:txFillClrLst>
+    <dgm:txEffectClrLst/>
+  </dgm:styleLbl>
+  <dgm:styleLbl name="sibTrans2D1">
+    <dgm:fillClrLst meth="repeat">
+      <a:schemeClr val="accent2"/>
+      <a:schemeClr val="accent3"/>
+      <a:schemeClr val="accent4"/>
+      <a:schemeClr val="accent5"/>
+      <a:schemeClr val="accent6"/>
+    </dgm:fillClrLst>
+    <dgm:linClrLst meth="cycle">
+      <a:schemeClr val="lt1"/>
+    </dgm:linClrLst>
+    <dgm:effectClrLst/>
+    <dgm:txLinClrLst/>
+    <dgm:txFillClrLst/>
+    <dgm:txEffectClrLst/>
+  </dgm:styleLbl>
+  <dgm:styleLbl name="fgSibTrans2D1">
+    <dgm:fillClrLst meth="repeat">
+      <a:schemeClr val="accent2"/>
+      <a:schemeClr val="accent3"/>
+      <a:schemeClr val="accent4"/>
+      <a:schemeClr val="accent5"/>
+      <a:schemeClr val="accent6"/>
+    </dgm:fillClrLst>
+    <dgm:linClrLst meth="cycle">
+      <a:schemeClr val="lt1"/>
+    </dgm:linClrLst>
+    <dgm:effectClrLst/>
+    <dgm:txLinClrLst/>
+    <dgm:txFillClrLst meth="repeat">
+      <a:schemeClr val="lt1"/>
+    </dgm:txFillClrLst>
+    <dgm:txEffectClrLst/>
+  </dgm:styleLbl>
+  <dgm:styleLbl name="bgSibTrans2D1">
+    <dgm:fillClrLst meth="repeat">
+      <a:schemeClr val="accent2"/>
+      <a:schemeClr val="accent3"/>
+      <a:schemeClr val="accent4"/>
+      <a:schemeClr val="accent5"/>
+      <a:schemeClr val="accent6"/>
+    </dgm:fillClrLst>
+    <dgm:linClrLst meth="cycle">
+      <a:schemeClr val="lt1"/>
+    </dgm:linClrLst>
+    <dgm:effectClrLst/>
+    <dgm:txLinClrLst/>
+    <dgm:txFillClrLst meth="repeat">
+      <a:schemeClr val="lt1"/>
+    </dgm:txFillClrLst>
+    <dgm:txEffectClrLst/>
+  </dgm:styleLbl>
+  <dgm:styleLbl name="sibTrans1D1">
+    <dgm:fillClrLst meth="repeat">
+      <a:schemeClr val="accent2"/>
+      <a:schemeClr val="accent3"/>
+      <a:schemeClr val="accent4"/>
+      <a:schemeClr val="accent5"/>
+      <a:schemeClr val="accent6"/>
+    </dgm:fillClrLst>
+    <dgm:linClrLst meth="repeat">
+      <a:schemeClr val="accent2"/>
+      <a:schemeClr val="accent3"/>
+      <a:schemeClr val="accent4"/>
+      <a:schemeClr val="accent5"/>
+      <a:schemeClr val="accent6"/>
+    </dgm:linClrLst>
+    <dgm:effectClrLst/>
+    <dgm:txLinClrLst/>
+    <dgm:txFillClrLst meth="repeat">
+      <a:schemeClr val="tx1"/>
+    </dgm:txFillClrLst>
+    <dgm:txEffectClrLst/>
+  </dgm:styleLbl>
+  <dgm:styleLbl name="callout">
+    <dgm:fillClrLst meth="repeat">
+      <a:schemeClr val="accent2"/>
+    </dgm:fillClrLst>
+    <dgm:linClrLst meth="repeat">
+      <a:schemeClr val="accent2">
+        <a:tint val="50000"/>
+      </a:schemeClr>
+    </dgm:linClrLst>
+    <dgm:effectClrLst/>
+    <dgm:txLinClrLst/>
+    <dgm:txFillClrLst meth="repeat">
+      <a:schemeClr val="tx1"/>
+    </dgm:txFillClrLst>
+    <dgm:txEffectClrLst/>
+  </dgm:styleLbl>
+  <dgm:styleLbl name="asst0">
+    <dgm:fillClrLst meth="repeat">
+      <a:schemeClr val="accent1"/>
+    </dgm:fillClrLst>
+    <dgm:linClrLst meth="repeat">
+      <a:schemeClr val="lt1"/>
+    </dgm:linClrLst>
+    <dgm:effectClrLst/>
+    <dgm:txLinClrLst/>
+    <dgm:txFillClrLst/>
+    <dgm:txEffectClrLst/>
+  </dgm:styleLbl>
+  <dgm:styleLbl name="asst1">
+    <dgm:fillClrLst meth="repeat">
+      <a:schemeClr val="accent2"/>
+    </dgm:fillClrLst>
+    <dgm:linClrLst meth="repeat">
+      <a:schemeClr val="lt1"/>
+    </dgm:linClrLst>
+    <dgm:effectClrLst/>
+    <dgm:txLinClrLst/>
+    <dgm:txFillClrLst/>
+    <dgm:txEffectClrLst/>
+  </dgm:styleLbl>
+  <dgm:styleLbl name="asst2">
+    <dgm:fillClrLst>
+      <a:schemeClr val="accent3"/>
+    </dgm:fillClrLst>
+    <dgm:linClrLst meth="repeat">
+      <a:schemeClr val="lt1"/>
+    </dgm:linClrLst>
+    <dgm:effectClrLst/>
+    <dgm:txLinClrLst/>
+    <dgm:txFillClrLst/>
+    <dgm:txEffectClrLst/>
+  </dgm:styleLbl>
+  <dgm:styleLbl name="asst3">
+    <dgm:fillClrLst>
+      <a:schemeClr val="accent4"/>
+    </dgm:fillClrLst>
+    <dgm:linClrLst meth="repeat">
+      <a:schemeClr val="lt1"/>
+    </dgm:linClrLst>
+    <dgm:effectClrLst/>
+    <dgm:txLinClrLst/>
+    <dgm:txFillClrLst/>
+    <dgm:txEffectClrLst/>
+  </dgm:styleLbl>
+  <dgm:styleLbl name="asst4">
+    <dgm:fillClrLst>
+      <a:schemeClr val="accent5"/>
+    </dgm:fillClrLst>
+    <dgm:linClrLst meth="repeat">
+      <a:schemeClr val="lt1"/>
+    </dgm:linClrLst>
+    <dgm:effectClrLst/>
+    <dgm:txLinClrLst/>
+    <dgm:txFillClrLst/>
+    <dgm:txEffectClrLst/>
+  </dgm:styleLbl>
+  <dgm:styleLbl name="parChTrans2D1">
+    <dgm:fillClrLst meth="repeat">
+      <a:schemeClr val="accent2"/>
+    </dgm:fillClrLst>
+    <dgm:linClrLst meth="repeat">
+      <a:schemeClr val="lt1"/>
+    </dgm:linClrLst>
+    <dgm:effectClrLst/>
+    <dgm:txLinClrLst/>
+    <dgm:txFillClrLst meth="repeat">
+      <a:schemeClr val="lt1"/>
+    </dgm:txFillClrLst>
+    <dgm:txEffectClrLst/>
+  </dgm:styleLbl>
+  <dgm:styleLbl name="parChTrans2D2">
+    <dgm:fillClrLst meth="repeat">
+      <a:schemeClr val="accent3"/>
+    </dgm:fillClrLst>
+    <dgm:linClrLst meth="repeat">
+      <a:schemeClr val="lt1"/>
+    </dgm:linClrLst>
+    <dgm:effectClrLst/>
+    <dgm:txLinClrLst/>
+    <dgm:txFillClrLst/>
+    <dgm:txEffectClrLst/>
+  </dgm:styleLbl>
+  <dgm:styleLbl name="parChTrans2D3">
+    <dgm:fillClrLst meth="repeat">
+      <a:schemeClr val="accent4"/>
+    </dgm:fillClrLst>
+    <dgm:linClrLst meth="repeat">
+      <a:schemeClr val="lt1"/>
+    </dgm:linClrLst>
+    <dgm:effectClrLst/>
+    <dgm:txLinClrLst/>
+    <dgm:txFillClrLst/>
+    <dgm:txEffectClrLst/>
+  </dgm:styleLbl>
+  <dgm:styleLbl name="parChTrans2D4">
+    <dgm:fillClrLst meth="repeat">
+      <a:schemeClr val="accent5"/>
+    </dgm:fillClrLst>
+    <dgm:linClrLst meth="repeat">
+      <a:schemeClr val="lt1"/>
+    </dgm:linClrLst>
+    <dgm:effectClrLst/>
+    <dgm:txLinClrLst/>
+    <dgm:txFillClrLst meth="repeat">
+      <a:schemeClr val="lt1"/>
+    </dgm:txFillClrLst>
+    <dgm:txEffectClrLst/>
+  </dgm:styleLbl>
+  <dgm:styleLbl name="parChTrans1D1">
+    <dgm:fillClrLst meth="repeat">
+      <a:schemeClr val="accent2"/>
+    </dgm:fillClrLst>
+    <dgm:linClrLst meth="repeat">
+      <a:schemeClr val="accent1"/>
+    </dgm:linClrLst>
+    <dgm:effectClrLst/>
+    <dgm:txLinClrLst/>
+    <dgm:txFillClrLst meth="repeat">
+      <a:schemeClr val="tx1"/>
+    </dgm:txFillClrLst>
+    <dgm:txEffectClrLst/>
+  </dgm:styleLbl>
+  <dgm:styleLbl name="parChTrans1D2">
+    <dgm:fillClrLst meth="repeat">
+      <a:schemeClr val="accent3">
+        <a:tint val="90000"/>
+      </a:schemeClr>
+    </dgm:fillClrLst>
+    <dgm:linClrLst meth="repeat">
+      <a:schemeClr val="accent2"/>
+    </dgm:linClrLst>
+    <dgm:effectClrLst/>
+    <dgm:txLinClrLst/>
+    <dgm:txFillClrLst meth="repeat">
+      <a:schemeClr val="tx1"/>
+    </dgm:txFillClrLst>
+    <dgm:txEffectClrLst/>
+  </dgm:styleLbl>
+  <dgm:styleLbl name="parChTrans1D3">
+    <dgm:fillClrLst meth="repeat">
+      <a:schemeClr val="accent4">
+        <a:tint val="70000"/>
+      </a:schemeClr>
+    </dgm:fillClrLst>
+    <dgm:linClrLst meth="repeat">
+      <a:schemeClr val="accent3"/>
+    </dgm:linClrLst>
+    <dgm:effectClrLst/>
+    <dgm:txLinClrLst/>
+    <dgm:txFillClrLst meth="repeat">
+      <a:schemeClr val="tx1"/>
+    </dgm:txFillClrLst>
+    <dgm:txEffectClrLst/>
+  </dgm:styleLbl>
+  <dgm:styleLbl name="parChTrans1D4">
+    <dgm:fillClrLst meth="repeat">
+      <a:schemeClr val="accent5">
+        <a:tint val="50000"/>
+      </a:schemeClr>
+    </dgm:fillClrLst>
+    <dgm:linClrLst meth="repeat">
+      <a:schemeClr val="accent4"/>
+    </dgm:linClrLst>
+    <dgm:effectClrLst/>
+    <dgm:txLinClrLst/>
+    <dgm:txFillClrLst meth="repeat">
+      <a:schemeClr val="tx1"/>
+    </dgm:txFillClrLst>
+    <dgm:txEffectClrLst/>
+  </dgm:styleLbl>
+  <dgm:styleLbl name="fgAcc1">
+    <dgm:fillClrLst meth="repeat">
+      <a:schemeClr val="lt1">
+        <a:alpha val="90000"/>
+      </a:schemeClr>
+    </dgm:fillClrLst>
+    <dgm:linClrLst meth="repeat">
+      <a:schemeClr val="accent2"/>
+      <a:schemeClr val="accent3"/>
+      <a:schemeClr val="accent4"/>
+      <a:schemeClr val="accent5"/>
+      <a:schemeClr val="accent6"/>
+    </dgm:linClrLst>
+    <dgm:effectClrLst/>
+    <dgm:txLinClrLst/>
+    <dgm:txFillClrLst meth="repeat">
+      <a:schemeClr val="dk1"/>
+    </dgm:txFillClrLst>
+    <dgm:txEffectClrLst/>
+  </dgm:styleLbl>
+  <dgm:styleLbl name="conFgAcc1">
+    <dgm:fillClrLst meth="repeat">
+      <a:schemeClr val="lt1">
+        <a:alpha val="90000"/>
+      </a:schemeClr>
+    </dgm:fillClrLst>
+    <dgm:linClrLst meth="repeat">
+      <a:schemeClr val="accent2"/>
+      <a:schemeClr val="accent3"/>
+      <a:schemeClr val="accent4"/>
+      <a:schemeClr val="accent5"/>
+      <a:schemeClr val="accent6"/>
+    </dgm:linClrLst>
+    <dgm:effectClrLst/>
+    <dgm:txLinClrLst/>
+    <dgm:txFillClrLst meth="repeat">
+      <a:schemeClr val="dk1"/>
+    </dgm:txFillClrLst>
+    <dgm:txEffectClrLst/>
+  </dgm:styleLbl>
+  <dgm:styleLbl name="alignAcc1">
+    <dgm:fillClrLst meth="repeat">
+      <a:schemeClr val="lt1">
+        <a:alpha val="90000"/>
+      </a:schemeClr>
+    </dgm:fillClrLst>
+    <dgm:linClrLst meth="repeat">
+      <a:schemeClr val="accent2"/>
+      <a:schemeClr val="accent3"/>
+      <a:schemeClr val="accent4"/>
+      <a:schemeClr val="accent5"/>
+      <a:schemeClr val="accent6"/>
+    </dgm:linClrLst>
+    <dgm:effectClrLst/>
+    <dgm:txLinClrLst/>
+    <dgm:txFillClrLst meth="repeat">
+      <a:schemeClr val="dk1"/>
+    </dgm:txFillClrLst>
+    <dgm:txEffectClrLst/>
+  </dgm:styleLbl>
+  <dgm:styleLbl name="trAlignAcc1">
+    <dgm:fillClrLst meth="repeat">
+      <a:schemeClr val="lt1">
+        <a:alpha val="40000"/>
+      </a:schemeClr>
+    </dgm:fillClrLst>
+    <dgm:linClrLst meth="repeat">
+      <a:schemeClr val="accent1"/>
+    </dgm:linClrLst>
+    <dgm:effectClrLst/>
+    <dgm:txLinClrLst/>
+    <dgm:txFillClrLst meth="repeat">
+      <a:schemeClr val="dk1"/>
+    </dgm:txFillClrLst>
+    <dgm:txEffectClrLst/>
+  </dgm:styleLbl>
+  <dgm:styleLbl name="bgAcc1">
+    <dgm:fillClrLst meth="repeat">
+      <a:schemeClr val="lt1">
+        <a:alpha val="90000"/>
+      </a:schemeClr>
+    </dgm:fillClrLst>
+    <dgm:linClrLst meth="repeat">
+      <a:schemeClr val="accent2"/>
+      <a:schemeClr val="accent3"/>
+      <a:schemeClr val="accent4"/>
+      <a:schemeClr val="accent5"/>
+      <a:schemeClr val="accent6"/>
+    </dgm:linClrLst>
+    <dgm:effectClrLst/>
+    <dgm:txLinClrLst/>
+    <dgm:txFillClrLst meth="repeat">
+      <a:schemeClr val="dk1"/>
+    </dgm:txFillClrLst>
+    <dgm:txEffectClrLst/>
+  </dgm:styleLbl>
+  <dgm:styleLbl name="solidFgAcc1">
+    <dgm:fillClrLst meth="repeat">
+      <a:schemeClr val="lt1"/>
+    </dgm:fillClrLst>
+    <dgm:linClrLst meth="repeat">
+      <a:schemeClr val="accent2"/>
+      <a:schemeClr val="accent3"/>
+      <a:schemeClr val="accent4"/>
+      <a:schemeClr val="accent5"/>
+      <a:schemeClr val="accent6"/>
+    </dgm:linClrLst>
+    <dgm:effectClrLst/>
+    <dgm:txLinClrLst/>
+    <dgm:txFillClrLst meth="repeat">
+      <a:schemeClr val="dk1"/>
+    </dgm:txFillClrLst>
+    <dgm:txEffectClrLst/>
+  </dgm:styleLbl>
+  <dgm:styleLbl name="solidAlignAcc1">
+    <dgm:fillClrLst meth="repeat">
+      <a:schemeClr val="lt1"/>
+    </dgm:fillClrLst>
+    <dgm:linClrLst meth="repeat">
+      <a:schemeClr val="accent2"/>
+      <a:schemeClr val="accent3"/>
+      <a:schemeClr val="accent4"/>
+      <a:schemeClr val="accent5"/>
+      <a:schemeClr val="accent6"/>
+    </dgm:linClrLst>
+    <dgm:effectClrLst/>
+    <dgm:txLinClrLst/>
+    <dgm:txFillClrLst meth="repeat">
+      <a:schemeClr val="dk1"/>
+    </dgm:txFillClrLst>
+    <dgm:txEffectClrLst/>
+  </dgm:styleLbl>
+  <dgm:styleLbl name="solidBgAcc1">
+    <dgm:fillClrLst meth="repeat">
+      <a:schemeClr val="lt1"/>
+    </dgm:fillClrLst>
+    <dgm:linClrLst meth="repeat">
+      <a:schemeClr val="accent2"/>
+      <a:schemeClr val="accent3"/>
+      <a:schemeClr val="accent4"/>
+      <a:schemeClr val="accent5"/>
+      <a:schemeClr val="accent6"/>
+    </dgm:linClrLst>
+    <dgm:effectClrLst/>
+    <dgm:txLinClrLst/>
+    <dgm:txFillClrLst meth="repeat">
+      <a:schemeClr val="dk1"/>
+    </dgm:txFillClrLst>
+    <dgm:txEffectClrLst/>
+  </dgm:styleLbl>
+  <dgm:styleLbl name="fgAccFollowNode1">
+    <dgm:fillClrLst meth="repeat">
+      <a:schemeClr val="accent2">
+        <a:tint val="40000"/>
+        <a:alpha val="90000"/>
+      </a:schemeClr>
+      <a:schemeClr val="accent3">
+        <a:tint val="40000"/>
+        <a:alpha val="90000"/>
+      </a:schemeClr>
+      <a:schemeClr val="accent4">
+        <a:tint val="40000"/>
+        <a:alpha val="90000"/>
+      </a:schemeClr>
+      <a:schemeClr val="accent5">
+        <a:tint val="40000"/>
+        <a:alpha val="90000"/>
+      </a:schemeClr>
+      <a:schemeClr val="accent6">
+        <a:tint val="40000"/>
+        <a:alpha val="90000"/>
+      </a:schemeClr>
+    </dgm:fillClrLst>
+    <dgm:linClrLst meth="repeat">
+      <a:schemeClr val="accent2">
+        <a:tint val="40000"/>
+        <a:alpha val="90000"/>
+      </a:schemeClr>
+      <a:schemeClr val="accent3">
+        <a:tint val="40000"/>
+        <a:alpha val="90000"/>
+      </a:schemeClr>
+      <a:schemeClr val="accent4">
+        <a:tint val="40000"/>
+        <a:alpha val="90000"/>
+      </a:schemeClr>
+      <a:schemeClr val="accent5">
+        <a:tint val="40000"/>
+        <a:alpha val="90000"/>
+      </a:schemeClr>
+      <a:schemeClr val="accent6">
+        <a:tint val="40000"/>
+        <a:alpha val="90000"/>
+      </a:schemeClr>
+    </dgm:linClrLst>
+    <dgm:effectClrLst/>
+    <dgm:txLinClrLst/>
+    <dgm:txFillClrLst meth="repeat">
+      <a:schemeClr val="dk1"/>
+    </dgm:txFillClrLst>
+    <dgm:txEffectClrLst/>
+  </dgm:styleLbl>
+  <dgm:styleLbl name="alignAccFollowNode1">
+    <dgm:fillClrLst meth="repeat">
+      <a:schemeClr val="accent2">
+        <a:tint val="40000"/>
+        <a:alpha val="90000"/>
+      </a:schemeClr>
+      <a:schemeClr val="accent3">
+        <a:tint val="40000"/>
+        <a:alpha val="90000"/>
+      </a:schemeClr>
+      <a:schemeClr val="accent4">
+        <a:tint val="40000"/>
+        <a:alpha val="90000"/>
+      </a:schemeClr>
+      <a:schemeClr val="accent5">
+        <a:tint val="40000"/>
+        <a:alpha val="90000"/>
+      </a:schemeClr>
+      <a:schemeClr val="accent6">
+        <a:tint val="40000"/>
+        <a:alpha val="90000"/>
+      </a:schemeClr>
+    </dgm:fillClrLst>
+    <dgm:linClrLst meth="repeat">
+      <a:schemeClr val="accent2">
+        <a:tint val="40000"/>
+        <a:alpha val="90000"/>
+      </a:schemeClr>
+      <a:schemeClr val="accent3">
+        <a:tint val="40000"/>
+        <a:alpha val="90000"/>
+      </a:schemeClr>
+      <a:schemeClr val="accent4">
+        <a:tint val="40000"/>
+        <a:alpha val="90000"/>
+      </a:schemeClr>
+      <a:schemeClr val="accent5">
+        <a:tint val="40000"/>
+        <a:alpha val="90000"/>
+      </a:schemeClr>
+      <a:schemeClr val="accent6">
+        <a:tint val="40000"/>
+        <a:alpha val="90000"/>
+      </a:schemeClr>
+    </dgm:linClrLst>
+    <dgm:effectClrLst/>
+    <dgm:txLinClrLst/>
+    <dgm:txFillClrLst meth="repeat">
+      <a:schemeClr val="dk1"/>
+    </dgm:txFillClrLst>
+    <dgm:txEffectClrLst/>
+  </dgm:styleLbl>
+  <dgm:styleLbl name="bgAccFollowNode1">
+    <dgm:fillClrLst meth="repeat">
+      <a:schemeClr val="accent2">
+        <a:tint val="40000"/>
+        <a:alpha val="90000"/>
+      </a:schemeClr>
+      <a:schemeClr val="accent3">
+        <a:tint val="40000"/>
+        <a:alpha val="90000"/>
+      </a:schemeClr>
+      <a:schemeClr val="accent4">
+        <a:tint val="40000"/>
+        <a:alpha val="90000"/>
+      </a:schemeClr>
+      <a:schemeClr val="accent5">
+        <a:tint val="40000"/>
+        <a:alpha val="90000"/>
+      </a:schemeClr>
+      <a:schemeClr val="accent6">
+        <a:tint val="40000"/>
+        <a:alpha val="90000"/>
+      </a:schemeClr>
+    </dgm:fillClrLst>
+    <dgm:linClrLst meth="repeat">
+      <a:schemeClr val="accent2">
+        <a:tint val="40000"/>
+        <a:alpha val="90000"/>
+      </a:schemeClr>
+      <a:schemeClr val="accent3">
+        <a:tint val="40000"/>
+        <a:alpha val="90000"/>
+      </a:schemeClr>
+      <a:schemeClr val="accent4">
+        <a:tint val="40000"/>
+        <a:alpha val="90000"/>
+      </a:schemeClr>
+      <a:schemeClr val="accent5">
+        <a:tint val="40000"/>
+        <a:alpha val="90000"/>
+      </a:schemeClr>
+      <a:schemeClr val="accent6">
+        <a:tint val="40000"/>
+        <a:alpha val="90000"/>
+      </a:schemeClr>
+    </dgm:linClrLst>
+    <dgm:effectClrLst/>
+    <dgm:txLinClrLst/>
+    <dgm:txFillClrLst meth="repeat">
+      <a:schemeClr val="dk1"/>
+    </dgm:txFillClrLst>
+    <dgm:txEffectClrLst/>
+  </dgm:styleLbl>
+  <dgm:styleLbl name="fgAcc0">
+    <dgm:fillClrLst meth="repeat">
+      <a:schemeClr val="lt1">
+        <a:alpha val="90000"/>
+      </a:schemeClr>
+    </dgm:fillClrLst>
+    <dgm:linClrLst>
+      <a:schemeClr val="accent1"/>
+    </dgm:linClrLst>
+    <dgm:effectClrLst/>
+    <dgm:txLinClrLst/>
+    <dgm:txFillClrLst meth="repeat">
+      <a:schemeClr val="dk1"/>
+    </dgm:txFillClrLst>
+    <dgm:txEffectClrLst/>
+  </dgm:styleLbl>
+  <dgm:styleLbl name="fgAcc2">
+    <dgm:fillClrLst meth="repeat">
+      <a:schemeClr val="lt1">
+        <a:alpha val="90000"/>
+      </a:schemeClr>
+    </dgm:fillClrLst>
+    <dgm:linClrLst>
+      <a:schemeClr val="accent2"/>
+    </dgm:linClrLst>
+    <dgm:effectClrLst/>
+    <dgm:txLinClrLst/>
+    <dgm:txFillClrLst meth="repeat">
+      <a:schemeClr val="dk1"/>
+    </dgm:txFillClrLst>
+    <dgm:txEffectClrLst/>
+  </dgm:styleLbl>
+  <dgm:styleLbl name="fgAcc3">
+    <dgm:fillClrLst meth="repeat">
+      <a:schemeClr val="lt1">
+        <a:alpha val="90000"/>
+      </a:schemeClr>
+    </dgm:fillClrLst>
+    <dgm:linClrLst>
+      <a:schemeClr val="accent3"/>
+    </dgm:linClrLst>
+    <dgm:effectClrLst/>
+    <dgm:txLinClrLst/>
+    <dgm:txFillClrLst meth="repeat">
+      <a:schemeClr val="dk1"/>
+    </dgm:txFillClrLst>
+    <dgm:txEffectClrLst/>
+  </dgm:styleLbl>
+  <dgm:styleLbl name="fgAcc4">
+    <dgm:fillClrLst meth="repeat">
+      <a:schemeClr val="lt1">
+        <a:alpha val="90000"/>
+      </a:schemeClr>
+    </dgm:fillClrLst>
+    <dgm:linClrLst>
+      <a:schemeClr val="accent4"/>
+    </dgm:linClrLst>
+    <dgm:effectClrLst/>
+    <dgm:txLinClrLst/>
+    <dgm:txFillClrLst meth="repeat">
+      <a:schemeClr val="dk1"/>
+    </dgm:txFillClrLst>
+    <dgm:txEffectClrLst/>
+  </dgm:styleLbl>
+  <dgm:styleLbl name="bgShp">
+    <dgm:fillClrLst meth="repeat">
+      <a:schemeClr val="accent2"/>
+      <a:schemeClr val="accent3"/>
+      <a:schemeClr val="accent4"/>
+      <a:schemeClr val="accent5"/>
+      <a:schemeClr val="accent6"/>
+    </dgm:fillClrLst>
+    <dgm:linClrLst meth="repeat">
+      <a:schemeClr val="lt1">
+        <a:alpha val="0"/>
+      </a:schemeClr>
+    </dgm:linClrLst>
+    <dgm:effectClrLst/>
+    <dgm:txLinClrLst/>
+    <dgm:txFillClrLst/>
+    <dgm:txEffectClrLst/>
+  </dgm:styleLbl>
+  <dgm:styleLbl name="dkBgShp">
+    <dgm:fillClrLst meth="repeat">
+      <a:schemeClr val="accent2">
+        <a:shade val="90000"/>
+      </a:schemeClr>
+    </dgm:fillClrLst>
+    <dgm:linClrLst meth="repeat">
+      <a:schemeClr val="dk1"/>
+    </dgm:linClrLst>
+    <dgm:effectClrLst/>
+    <dgm:txLinClrLst/>
+    <dgm:txFillClrLst meth="repeat">
+      <a:schemeClr val="lt1"/>
+    </dgm:txFillClrLst>
+    <dgm:txEffectClrLst/>
+  </dgm:styleLbl>
+  <dgm:styleLbl name="trBgShp">
+    <dgm:fillClrLst meth="repeat">
+      <a:schemeClr val="accent1">
+        <a:tint val="50000"/>
+        <a:alpha val="40000"/>
+      </a:schemeClr>
+    </dgm:fillClrLst>
+    <dgm:linClrLst meth="repeat">
+      <a:schemeClr val="accent2"/>
+    </dgm:linClrLst>
+    <dgm:effectClrLst/>
+    <dgm:txLinClrLst/>
+    <dgm:txFillClrLst meth="repeat">
+      <a:schemeClr val="lt1"/>
+    </dgm:txFillClrLst>
+    <dgm:txEffectClrLst/>
+  </dgm:styleLbl>
+  <dgm:styleLbl name="fgShp">
+    <dgm:fillClrLst meth="repeat">
+      <a:schemeClr val="accent2">
+        <a:tint val="40000"/>
+      </a:schemeClr>
+    </dgm:fillClrLst>
+    <dgm:linClrLst meth="repeat">
+      <a:schemeClr val="lt1"/>
+    </dgm:linClrLst>
+    <dgm:effectClrLst/>
+    <dgm:txLinClrLst/>
+    <dgm:txFillClrLst meth="repeat">
+      <a:schemeClr val="dk1"/>
+    </dgm:txFillClrLst>
+    <dgm:txEffectClrLst/>
+  </dgm:styleLbl>
+  <dgm:styleLbl name="revTx">
+    <dgm:fillClrLst meth="repeat">
+      <a:schemeClr val="lt1">
+        <a:alpha val="0"/>
+      </a:schemeClr>
+    </dgm:fillClrLst>
+    <dgm:linClrLst meth="repeat">
+      <a:schemeClr val="dk1">
+        <a:alpha val="0"/>
+      </a:schemeClr>
+    </dgm:linClrLst>
+    <dgm:effectClrLst/>
+    <dgm:txLinClrLst/>
+    <dgm:txFillClrLst meth="repeat">
+      <a:schemeClr val="tx1"/>
+    </dgm:txFillClrLst>
+    <dgm:txEffectClrLst/>
+  </dgm:styleLbl>
+</dgm:colorsDef>
+</file>
+
+<file path=ppt/diagrams/data1.xml><?xml version="1.0" encoding="utf-8"?>
+<dgm:dataModel xmlns:dgm="http://schemas.openxmlformats.org/drawingml/2006/diagram" xmlns:a="http://schemas.openxmlformats.org/drawingml/2006/main">
+  <dgm:ptLst>
+    <dgm:pt modelId="{545DC5F4-D431-4A87-93B0-BBE05B35CCB1}" type="doc">
+      <dgm:prSet loTypeId="urn:microsoft.com/office/officeart/2018/5/layout/IconLeafLabelList" loCatId="icon" qsTypeId="urn:microsoft.com/office/officeart/2005/8/quickstyle/simple1" qsCatId="simple" csTypeId="urn:microsoft.com/office/officeart/2018/5/colors/Iconchunking_neutralicon_colorful1" csCatId="colorful" phldr="1"/>
+      <dgm:spPr/>
+      <dgm:t>
+        <a:bodyPr/>
+        <a:lstStyle/>
+        <a:p>
+          <a:endParaRPr lang="en-US"/>
+        </a:p>
+      </dgm:t>
+    </dgm:pt>
+    <dgm:pt modelId="{54983E92-0B7C-43A8-8C1F-984B0DFA982E}">
+      <dgm:prSet custT="1"/>
+      <dgm:spPr/>
+      <dgm:t>
+        <a:bodyPr/>
+        <a:lstStyle/>
+        <a:p>
+          <a:pPr>
+            <a:defRPr cap="all"/>
+          </a:pPr>
+          <a:r>
+            <a:rPr lang="en-US" sz="1800" dirty="0"/>
+            <a:t>Due by Midnight </a:t>
+          </a:r>
+          <a:r>
+            <a:rPr lang="en-US" sz="1800" dirty="0">
+              <a:solidFill>
+                <a:srgbClr val="C00000"/>
+              </a:solidFill>
+            </a:rPr>
+            <a:t>(11:59 pm) on Monday, Nov 10, 2025</a:t>
+          </a:r>
+        </a:p>
+      </dgm:t>
+    </dgm:pt>
+    <dgm:pt modelId="{47D3E5B5-E005-481D-9366-7FFA245A3F46}" type="parTrans" cxnId="{7E7C886D-A667-496F-8DDE-1B718561DB03}">
+      <dgm:prSet/>
+      <dgm:spPr/>
+      <dgm:t>
+        <a:bodyPr/>
+        <a:lstStyle/>
+        <a:p>
+          <a:endParaRPr lang="en-US"/>
+        </a:p>
+      </dgm:t>
+    </dgm:pt>
+    <dgm:pt modelId="{9E0C94DC-193A-41FC-B82A-2A43E45C8107}" type="sibTrans" cxnId="{7E7C886D-A667-496F-8DDE-1B718561DB03}">
+      <dgm:prSet/>
+      <dgm:spPr/>
+      <dgm:t>
+        <a:bodyPr/>
+        <a:lstStyle/>
+        <a:p>
+          <a:endParaRPr lang="en-US"/>
+        </a:p>
+      </dgm:t>
+    </dgm:pt>
+    <dgm:pt modelId="{A6242D37-AF81-4A91-9692-C3B78C4C080A}">
+      <dgm:prSet custT="1"/>
+      <dgm:spPr/>
+      <dgm:t>
+        <a:bodyPr/>
+        <a:lstStyle/>
+        <a:p>
+          <a:pPr>
+            <a:defRPr cap="all"/>
+          </a:pPr>
+          <a:r>
+            <a:rPr lang="en-US" sz="1800" dirty="0"/>
+            <a:t>Submit a word document only include </a:t>
+          </a:r>
+          <a:r>
+            <a:rPr lang="en-US" sz="1800" dirty="0">
+              <a:solidFill>
+                <a:srgbClr val="C00000"/>
+              </a:solidFill>
+            </a:rPr>
+            <a:t>question and answer</a:t>
+          </a:r>
+        </a:p>
+      </dgm:t>
+    </dgm:pt>
+    <dgm:pt modelId="{A1582085-1655-4316-B7FE-C167B01E3451}" type="parTrans" cxnId="{0F5369C5-3BD8-41EC-82BC-B46BD7C285F5}">
+      <dgm:prSet/>
+      <dgm:spPr/>
+      <dgm:t>
+        <a:bodyPr/>
+        <a:lstStyle/>
+        <a:p>
+          <a:endParaRPr lang="en-US"/>
+        </a:p>
+      </dgm:t>
+    </dgm:pt>
+    <dgm:pt modelId="{487527DA-4CA7-40A4-8E27-547430E84424}" type="sibTrans" cxnId="{0F5369C5-3BD8-41EC-82BC-B46BD7C285F5}">
+      <dgm:prSet/>
+      <dgm:spPr/>
+      <dgm:t>
+        <a:bodyPr/>
+        <a:lstStyle/>
+        <a:p>
+          <a:endParaRPr lang="en-US"/>
+        </a:p>
+      </dgm:t>
+    </dgm:pt>
+    <dgm:pt modelId="{1CF3E5B1-FB46-4446-95BF-0E7408D9C151}" type="pres">
+      <dgm:prSet presAssocID="{545DC5F4-D431-4A87-93B0-BBE05B35CCB1}" presName="root" presStyleCnt="0">
+        <dgm:presLayoutVars>
+          <dgm:dir/>
+          <dgm:resizeHandles val="exact"/>
+        </dgm:presLayoutVars>
+      </dgm:prSet>
+      <dgm:spPr/>
+    </dgm:pt>
+    <dgm:pt modelId="{BE3E81CB-7E93-484B-AE32-12C58B09BCE0}" type="pres">
+      <dgm:prSet presAssocID="{54983E92-0B7C-43A8-8C1F-984B0DFA982E}" presName="compNode" presStyleCnt="0"/>
+      <dgm:spPr/>
+    </dgm:pt>
+    <dgm:pt modelId="{D2D6216C-9B23-402E-A942-468E0F624F5B}" type="pres">
+      <dgm:prSet presAssocID="{54983E92-0B7C-43A8-8C1F-984B0DFA982E}" presName="iconBgRect" presStyleLbl="bgShp" presStyleIdx="0" presStyleCnt="2"/>
+      <dgm:spPr>
+        <a:prstGeom prst="round2DiagRect">
+          <a:avLst>
+            <a:gd name="adj1" fmla="val 29727"/>
+            <a:gd name="adj2" fmla="val 0"/>
+          </a:avLst>
+        </a:prstGeom>
+      </dgm:spPr>
+    </dgm:pt>
+    <dgm:pt modelId="{F943F739-4EBC-47A7-A14C-25327E72C0F2}" type="pres">
+      <dgm:prSet presAssocID="{54983E92-0B7C-43A8-8C1F-984B0DFA982E}" presName="iconRect" presStyleLbl="node1" presStyleIdx="0" presStyleCnt="2"/>
+      <dgm:spPr>
+        <a:blipFill>
+          <a:blip xmlns:r="http://schemas.openxmlformats.org/officeDocument/2006/relationships" r:embed="rId1">
+            <a:extLst>
+              <a:ext uri="{28A0092B-C50C-407E-A947-70E740481C1C}">
+                <a14:useLocalDpi xmlns:a14="http://schemas.microsoft.com/office/drawing/2010/main" val="0"/>
+              </a:ext>
+              <a:ext uri="{96DAC541-7B7A-43D3-8B79-37D633B846F1}">
+                <asvg:svgBlip xmlns:asvg="http://schemas.microsoft.com/office/drawing/2016/SVG/main" r:embed="rId2"/>
+              </a:ext>
+            </a:extLst>
+          </a:blip>
+          <a:stretch>
+            <a:fillRect/>
+          </a:stretch>
+        </a:blipFill>
+        <a:ln>
+          <a:noFill/>
+        </a:ln>
+      </dgm:spPr>
+      <dgm:extLst>
+        <a:ext uri="{E40237B7-FDA0-4F09-8148-C483321AD2D9}">
+          <dgm14:cNvPr xmlns:dgm14="http://schemas.microsoft.com/office/drawing/2010/diagram" id="0" name="" descr="Alarm Clock"/>
+        </a:ext>
+      </dgm:extLst>
+    </dgm:pt>
+    <dgm:pt modelId="{3085FCD0-B526-4BA1-831E-148271EBCA71}" type="pres">
+      <dgm:prSet presAssocID="{54983E92-0B7C-43A8-8C1F-984B0DFA982E}" presName="spaceRect" presStyleCnt="0"/>
+      <dgm:spPr/>
+    </dgm:pt>
+    <dgm:pt modelId="{4E513C3D-9C85-4581-9570-C87158EE7A8E}" type="pres">
+      <dgm:prSet presAssocID="{54983E92-0B7C-43A8-8C1F-984B0DFA982E}" presName="textRect" presStyleLbl="revTx" presStyleIdx="0" presStyleCnt="2" custScaleX="140708">
+        <dgm:presLayoutVars>
+          <dgm:chMax val="1"/>
+          <dgm:chPref val="1"/>
+        </dgm:presLayoutVars>
+      </dgm:prSet>
+      <dgm:spPr/>
+    </dgm:pt>
+    <dgm:pt modelId="{00D865C2-7AA1-4413-870A-557561F6A99D}" type="pres">
+      <dgm:prSet presAssocID="{9E0C94DC-193A-41FC-B82A-2A43E45C8107}" presName="sibTrans" presStyleCnt="0"/>
+      <dgm:spPr/>
+    </dgm:pt>
+    <dgm:pt modelId="{0444C821-AE95-419C-A2C2-10FD435B3E72}" type="pres">
+      <dgm:prSet presAssocID="{A6242D37-AF81-4A91-9692-C3B78C4C080A}" presName="compNode" presStyleCnt="0"/>
+      <dgm:spPr/>
+    </dgm:pt>
+    <dgm:pt modelId="{C1C41DF5-156F-4AFD-8177-5E65296E36DA}" type="pres">
+      <dgm:prSet presAssocID="{A6242D37-AF81-4A91-9692-C3B78C4C080A}" presName="iconBgRect" presStyleLbl="bgShp" presStyleIdx="1" presStyleCnt="2"/>
+      <dgm:spPr>
+        <a:prstGeom prst="round2DiagRect">
+          <a:avLst>
+            <a:gd name="adj1" fmla="val 29727"/>
+            <a:gd name="adj2" fmla="val 0"/>
+          </a:avLst>
+        </a:prstGeom>
+      </dgm:spPr>
+    </dgm:pt>
+    <dgm:pt modelId="{BCD05D74-D5AE-459F-A6DF-06E0D3F03A72}" type="pres">
+      <dgm:prSet presAssocID="{A6242D37-AF81-4A91-9692-C3B78C4C080A}" presName="iconRect" presStyleLbl="node1" presStyleIdx="1" presStyleCnt="2"/>
+      <dgm:spPr>
+        <a:blipFill>
+          <a:blip xmlns:r="http://schemas.openxmlformats.org/officeDocument/2006/relationships" r:embed="rId3">
+            <a:extLst>
+              <a:ext uri="{28A0092B-C50C-407E-A947-70E740481C1C}">
+                <a14:useLocalDpi xmlns:a14="http://schemas.microsoft.com/office/drawing/2010/main" val="0"/>
+              </a:ext>
+              <a:ext uri="{96DAC541-7B7A-43D3-8B79-37D633B846F1}">
+                <asvg:svgBlip xmlns:asvg="http://schemas.microsoft.com/office/drawing/2016/SVG/main" r:embed="rId4"/>
+              </a:ext>
+            </a:extLst>
+          </a:blip>
+          <a:stretch>
+            <a:fillRect/>
+          </a:stretch>
+        </a:blipFill>
+        <a:ln>
+          <a:noFill/>
+        </a:ln>
+      </dgm:spPr>
+      <dgm:extLst>
+        <a:ext uri="{E40237B7-FDA0-4F09-8148-C483321AD2D9}">
+          <dgm14:cNvPr xmlns:dgm14="http://schemas.microsoft.com/office/drawing/2010/diagram" id="0" name="" descr="Checkmark"/>
+        </a:ext>
+      </dgm:extLst>
+    </dgm:pt>
+    <dgm:pt modelId="{2AB5314E-660E-4ED1-846B-8434948EF46B}" type="pres">
+      <dgm:prSet presAssocID="{A6242D37-AF81-4A91-9692-C3B78C4C080A}" presName="spaceRect" presStyleCnt="0"/>
+      <dgm:spPr/>
+    </dgm:pt>
+    <dgm:pt modelId="{A3838D15-85D1-4048-B20D-9009920800B0}" type="pres">
+      <dgm:prSet presAssocID="{A6242D37-AF81-4A91-9692-C3B78C4C080A}" presName="textRect" presStyleLbl="revTx" presStyleIdx="1" presStyleCnt="2" custScaleX="147657">
+        <dgm:presLayoutVars>
+          <dgm:chMax val="1"/>
+          <dgm:chPref val="1"/>
+        </dgm:presLayoutVars>
+      </dgm:prSet>
+      <dgm:spPr/>
+    </dgm:pt>
+  </dgm:ptLst>
+  <dgm:cxnLst>
+    <dgm:cxn modelId="{34AD3E24-5AE2-4091-998E-71D41F9CDB89}" type="presOf" srcId="{A6242D37-AF81-4A91-9692-C3B78C4C080A}" destId="{A3838D15-85D1-4048-B20D-9009920800B0}" srcOrd="0" destOrd="0" presId="urn:microsoft.com/office/officeart/2018/5/layout/IconLeafLabelList"/>
+    <dgm:cxn modelId="{7E7C886D-A667-496F-8DDE-1B718561DB03}" srcId="{545DC5F4-D431-4A87-93B0-BBE05B35CCB1}" destId="{54983E92-0B7C-43A8-8C1F-984B0DFA982E}" srcOrd="0" destOrd="0" parTransId="{47D3E5B5-E005-481D-9366-7FFA245A3F46}" sibTransId="{9E0C94DC-193A-41FC-B82A-2A43E45C8107}"/>
+    <dgm:cxn modelId="{B47C2F55-9A4B-4FFB-AA38-9C2574693CD4}" type="presOf" srcId="{54983E92-0B7C-43A8-8C1F-984B0DFA982E}" destId="{4E513C3D-9C85-4581-9570-C87158EE7A8E}" srcOrd="0" destOrd="0" presId="urn:microsoft.com/office/officeart/2018/5/layout/IconLeafLabelList"/>
+    <dgm:cxn modelId="{53CEBE9C-EA76-48A8-8DF7-6953575A9C37}" type="presOf" srcId="{545DC5F4-D431-4A87-93B0-BBE05B35CCB1}" destId="{1CF3E5B1-FB46-4446-95BF-0E7408D9C151}" srcOrd="0" destOrd="0" presId="urn:microsoft.com/office/officeart/2018/5/layout/IconLeafLabelList"/>
+    <dgm:cxn modelId="{0F5369C5-3BD8-41EC-82BC-B46BD7C285F5}" srcId="{545DC5F4-D431-4A87-93B0-BBE05B35CCB1}" destId="{A6242D37-AF81-4A91-9692-C3B78C4C080A}" srcOrd="1" destOrd="0" parTransId="{A1582085-1655-4316-B7FE-C167B01E3451}" sibTransId="{487527DA-4CA7-40A4-8E27-547430E84424}"/>
+    <dgm:cxn modelId="{5C6FCB9C-3574-4EF1-979B-C82FE21FC231}" type="presParOf" srcId="{1CF3E5B1-FB46-4446-95BF-0E7408D9C151}" destId="{BE3E81CB-7E93-484B-AE32-12C58B09BCE0}" srcOrd="0" destOrd="0" presId="urn:microsoft.com/office/officeart/2018/5/layout/IconLeafLabelList"/>
+    <dgm:cxn modelId="{3BEBC4B0-3768-4D30-9883-ED03B1BB2AA3}" type="presParOf" srcId="{BE3E81CB-7E93-484B-AE32-12C58B09BCE0}" destId="{D2D6216C-9B23-402E-A942-468E0F624F5B}" srcOrd="0" destOrd="0" presId="urn:microsoft.com/office/officeart/2018/5/layout/IconLeafLabelList"/>
+    <dgm:cxn modelId="{9334B4F2-C5A7-478D-8C83-6B6B78937527}" type="presParOf" srcId="{BE3E81CB-7E93-484B-AE32-12C58B09BCE0}" destId="{F943F739-4EBC-47A7-A14C-25327E72C0F2}" srcOrd="1" destOrd="0" presId="urn:microsoft.com/office/officeart/2018/5/layout/IconLeafLabelList"/>
+    <dgm:cxn modelId="{722E4463-BB96-47A5-B05B-8394250686DE}" type="presParOf" srcId="{BE3E81CB-7E93-484B-AE32-12C58B09BCE0}" destId="{3085FCD0-B526-4BA1-831E-148271EBCA71}" srcOrd="2" destOrd="0" presId="urn:microsoft.com/office/officeart/2018/5/layout/IconLeafLabelList"/>
+    <dgm:cxn modelId="{4DDDB5E8-1F23-4A78-9605-45AAF5833E68}" type="presParOf" srcId="{BE3E81CB-7E93-484B-AE32-12C58B09BCE0}" destId="{4E513C3D-9C85-4581-9570-C87158EE7A8E}" srcOrd="3" destOrd="0" presId="urn:microsoft.com/office/officeart/2018/5/layout/IconLeafLabelList"/>
+    <dgm:cxn modelId="{123D8173-4B78-41DB-B068-2BA15E016A23}" type="presParOf" srcId="{1CF3E5B1-FB46-4446-95BF-0E7408D9C151}" destId="{00D865C2-7AA1-4413-870A-557561F6A99D}" srcOrd="1" destOrd="0" presId="urn:microsoft.com/office/officeart/2018/5/layout/IconLeafLabelList"/>
+    <dgm:cxn modelId="{E92967F1-54D1-402B-9BE3-03FB7BECA8E6}" type="presParOf" srcId="{1CF3E5B1-FB46-4446-95BF-0E7408D9C151}" destId="{0444C821-AE95-419C-A2C2-10FD435B3E72}" srcOrd="2" destOrd="0" presId="urn:microsoft.com/office/officeart/2018/5/layout/IconLeafLabelList"/>
+    <dgm:cxn modelId="{6A34589F-98DC-49A5-B284-AB8B04E10F1B}" type="presParOf" srcId="{0444C821-AE95-419C-A2C2-10FD435B3E72}" destId="{C1C41DF5-156F-4AFD-8177-5E65296E36DA}" srcOrd="0" destOrd="0" presId="urn:microsoft.com/office/officeart/2018/5/layout/IconLeafLabelList"/>
+    <dgm:cxn modelId="{E4BDC4E7-B33D-408F-A28A-9E646BDBCB86}" type="presParOf" srcId="{0444C821-AE95-419C-A2C2-10FD435B3E72}" destId="{BCD05D74-D5AE-459F-A6DF-06E0D3F03A72}" srcOrd="1" destOrd="0" presId="urn:microsoft.com/office/officeart/2018/5/layout/IconLeafLabelList"/>
+    <dgm:cxn modelId="{3D1E9DB2-C5D6-4774-8110-C1F4D3951E71}" type="presParOf" srcId="{0444C821-AE95-419C-A2C2-10FD435B3E72}" destId="{2AB5314E-660E-4ED1-846B-8434948EF46B}" srcOrd="2" destOrd="0" presId="urn:microsoft.com/office/officeart/2018/5/layout/IconLeafLabelList"/>
+    <dgm:cxn modelId="{2B9C7FC2-A255-4335-A004-2546E39B1238}" type="presParOf" srcId="{0444C821-AE95-419C-A2C2-10FD435B3E72}" destId="{A3838D15-85D1-4048-B20D-9009920800B0}" srcOrd="3" destOrd="0" presId="urn:microsoft.com/office/officeart/2018/5/layout/IconLeafLabelList"/>
+  </dgm:cxnLst>
+  <dgm:bg/>
+  <dgm:whole/>
+  <dgm:extLst>
+    <a:ext uri="http://schemas.microsoft.com/office/drawing/2008/diagram">
+      <dsp:dataModelExt xmlns:dsp="http://schemas.microsoft.com/office/drawing/2008/diagram" relId="rId7" minVer="http://schemas.openxmlformats.org/drawingml/2006/diagram"/>
+    </a:ext>
+  </dgm:extLst>
+</dgm:dataModel>
+</file>
+
+<file path=ppt/diagrams/drawing1.xml><?xml version="1.0" encoding="utf-8"?>
+<dsp:drawing xmlns:dgm="http://schemas.openxmlformats.org/drawingml/2006/diagram" xmlns:dsp="http://schemas.microsoft.com/office/drawing/2008/diagram" xmlns:a="http://schemas.openxmlformats.org/drawingml/2006/main">
+  <dsp:spTree>
+    <dsp:nvGrpSpPr>
+      <dsp:cNvPr id="0" name=""/>
+      <dsp:cNvGrpSpPr/>
+    </dsp:nvGrpSpPr>
+    <dsp:grpSpPr/>
+    <dsp:sp modelId="{D2D6216C-9B23-402E-A942-468E0F624F5B}">
+      <dsp:nvSpPr>
+        <dsp:cNvPr id="0" name=""/>
+        <dsp:cNvSpPr/>
+      </dsp:nvSpPr>
+      <dsp:spPr>
+        <a:xfrm>
+          <a:off x="1178341" y="15356"/>
+          <a:ext cx="1372500" cy="1372500"/>
+        </a:xfrm>
+        <a:prstGeom prst="round2DiagRect">
+          <a:avLst>
+            <a:gd name="adj1" fmla="val 29727"/>
+            <a:gd name="adj2" fmla="val 0"/>
+          </a:avLst>
+        </a:prstGeom>
+        <a:solidFill>
+          <a:schemeClr val="accent2">
+            <a:hueOff val="0"/>
+            <a:satOff val="0"/>
+            <a:lumOff val="0"/>
+            <a:alphaOff val="0"/>
+          </a:schemeClr>
+        </a:solidFill>
+        <a:ln>
+          <a:noFill/>
+        </a:ln>
+        <a:effectLst/>
+      </dsp:spPr>
+      <dsp:style>
+        <a:lnRef idx="0">
+          <a:scrgbClr r="0" g="0" b="0"/>
+        </a:lnRef>
+        <a:fillRef idx="1">
+          <a:scrgbClr r="0" g="0" b="0"/>
+        </a:fillRef>
+        <a:effectRef idx="0">
+          <a:scrgbClr r="0" g="0" b="0"/>
+        </a:effectRef>
+        <a:fontRef idx="minor"/>
+      </dsp:style>
+    </dsp:sp>
+    <dsp:sp modelId="{F943F739-4EBC-47A7-A14C-25327E72C0F2}">
+      <dsp:nvSpPr>
+        <dsp:cNvPr id="0" name=""/>
+        <dsp:cNvSpPr/>
+      </dsp:nvSpPr>
+      <dsp:spPr>
+        <a:xfrm>
+          <a:off x="1470841" y="307856"/>
+          <a:ext cx="787500" cy="787500"/>
+        </a:xfrm>
+        <a:prstGeom prst="rect">
+          <a:avLst/>
+        </a:prstGeom>
+        <a:blipFill>
+          <a:blip xmlns:r="http://schemas.openxmlformats.org/officeDocument/2006/relationships" r:embed="rId1">
+            <a:extLst>
+              <a:ext uri="{28A0092B-C50C-407E-A947-70E740481C1C}">
+                <a14:useLocalDpi xmlns:a14="http://schemas.microsoft.com/office/drawing/2010/main" val="0"/>
+              </a:ext>
+              <a:ext uri="{96DAC541-7B7A-43D3-8B79-37D633B846F1}">
+                <asvg:svgBlip xmlns:asvg="http://schemas.microsoft.com/office/drawing/2016/SVG/main" r:embed="rId2"/>
+              </a:ext>
+            </a:extLst>
+          </a:blip>
+          <a:stretch>
+            <a:fillRect/>
+          </a:stretch>
+        </a:blipFill>
+        <a:ln w="22225" cap="rnd" cmpd="sng" algn="ctr">
+          <a:noFill/>
+          <a:prstDash val="solid"/>
+        </a:ln>
+        <a:effectLst/>
+      </dsp:spPr>
+      <dsp:style>
+        <a:lnRef idx="2">
+          <a:scrgbClr r="0" g="0" b="0"/>
+        </a:lnRef>
+        <a:fillRef idx="1">
+          <a:scrgbClr r="0" g="0" b="0"/>
+        </a:fillRef>
+        <a:effectRef idx="0">
+          <a:scrgbClr r="0" g="0" b="0"/>
+        </a:effectRef>
+        <a:fontRef idx="minor">
+          <a:schemeClr val="lt1"/>
+        </a:fontRef>
+      </dsp:style>
+    </dsp:sp>
+    <dsp:sp modelId="{4E513C3D-9C85-4581-9570-C87158EE7A8E}">
+      <dsp:nvSpPr>
+        <dsp:cNvPr id="0" name=""/>
+        <dsp:cNvSpPr/>
+      </dsp:nvSpPr>
+      <dsp:spPr>
+        <a:xfrm>
+          <a:off x="281626" y="1815356"/>
+          <a:ext cx="3165930" cy="743927"/>
+        </a:xfrm>
+        <a:prstGeom prst="rect">
+          <a:avLst/>
+        </a:prstGeom>
+        <a:noFill/>
+        <a:ln>
+          <a:noFill/>
+        </a:ln>
+        <a:effectLst/>
+      </dsp:spPr>
+      <dsp:style>
+        <a:lnRef idx="0">
+          <a:scrgbClr r="0" g="0" b="0"/>
+        </a:lnRef>
+        <a:fillRef idx="0">
+          <a:scrgbClr r="0" g="0" b="0"/>
+        </a:fillRef>
+        <a:effectRef idx="0">
+          <a:scrgbClr r="0" g="0" b="0"/>
+        </a:effectRef>
+        <a:fontRef idx="minor"/>
+      </dsp:style>
+      <dsp:txBody>
+        <a:bodyPr spcFirstLastPara="0" vert="horz" wrap="square" lIns="0" tIns="0" rIns="0" bIns="0" numCol="1" spcCol="1270" anchor="t" anchorCtr="0">
+          <a:noAutofit/>
+        </a:bodyPr>
+        <a:lstStyle/>
+        <a:p>
+          <a:pPr marL="0" lvl="0" indent="0" algn="ctr" defTabSz="800100">
+            <a:lnSpc>
+              <a:spcPct val="90000"/>
+            </a:lnSpc>
+            <a:spcBef>
+              <a:spcPct val="0"/>
+            </a:spcBef>
+            <a:spcAft>
+              <a:spcPct val="35000"/>
+            </a:spcAft>
+            <a:buNone/>
+            <a:defRPr cap="all"/>
+          </a:pPr>
+          <a:r>
+            <a:rPr lang="en-US" sz="1800" kern="1200" dirty="0"/>
+            <a:t>Due by Midnight </a:t>
+          </a:r>
+          <a:r>
+            <a:rPr lang="en-US" sz="1800" kern="1200" dirty="0">
+              <a:solidFill>
+                <a:srgbClr val="C00000"/>
+              </a:solidFill>
+            </a:rPr>
+            <a:t>(11:59 pm) on Monday, Nov 10, 2025</a:t>
+          </a:r>
+        </a:p>
+      </dsp:txBody>
+      <dsp:txXfrm>
+        <a:off x="281626" y="1815356"/>
+        <a:ext cx="3165930" cy="743927"/>
+      </dsp:txXfrm>
+    </dsp:sp>
+    <dsp:sp modelId="{C1C41DF5-156F-4AFD-8177-5E65296E36DA}">
+      <dsp:nvSpPr>
+        <dsp:cNvPr id="0" name=""/>
+        <dsp:cNvSpPr/>
+      </dsp:nvSpPr>
+      <dsp:spPr>
+        <a:xfrm>
+          <a:off x="4816197" y="15356"/>
+          <a:ext cx="1372500" cy="1372500"/>
+        </a:xfrm>
+        <a:prstGeom prst="round2DiagRect">
+          <a:avLst>
+            <a:gd name="adj1" fmla="val 29727"/>
+            <a:gd name="adj2" fmla="val 0"/>
+          </a:avLst>
+        </a:prstGeom>
+        <a:solidFill>
+          <a:schemeClr val="accent3">
+            <a:hueOff val="0"/>
+            <a:satOff val="0"/>
+            <a:lumOff val="0"/>
+            <a:alphaOff val="0"/>
+          </a:schemeClr>
+        </a:solidFill>
+        <a:ln>
+          <a:noFill/>
+        </a:ln>
+        <a:effectLst/>
+      </dsp:spPr>
+      <dsp:style>
+        <a:lnRef idx="0">
+          <a:scrgbClr r="0" g="0" b="0"/>
+        </a:lnRef>
+        <a:fillRef idx="1">
+          <a:scrgbClr r="0" g="0" b="0"/>
+        </a:fillRef>
+        <a:effectRef idx="0">
+          <a:scrgbClr r="0" g="0" b="0"/>
+        </a:effectRef>
+        <a:fontRef idx="minor"/>
+      </dsp:style>
+    </dsp:sp>
+    <dsp:sp modelId="{BCD05D74-D5AE-459F-A6DF-06E0D3F03A72}">
+      <dsp:nvSpPr>
+        <dsp:cNvPr id="0" name=""/>
+        <dsp:cNvSpPr/>
+      </dsp:nvSpPr>
+      <dsp:spPr>
+        <a:xfrm>
+          <a:off x="5108697" y="307856"/>
+          <a:ext cx="787500" cy="787500"/>
+        </a:xfrm>
+        <a:prstGeom prst="rect">
+          <a:avLst/>
+        </a:prstGeom>
+        <a:blipFill>
+          <a:blip xmlns:r="http://schemas.openxmlformats.org/officeDocument/2006/relationships" r:embed="rId3">
+            <a:extLst>
+              <a:ext uri="{28A0092B-C50C-407E-A947-70E740481C1C}">
+                <a14:useLocalDpi xmlns:a14="http://schemas.microsoft.com/office/drawing/2010/main" val="0"/>
+              </a:ext>
+              <a:ext uri="{96DAC541-7B7A-43D3-8B79-37D633B846F1}">
+                <asvg:svgBlip xmlns:asvg="http://schemas.microsoft.com/office/drawing/2016/SVG/main" r:embed="rId4"/>
+              </a:ext>
+            </a:extLst>
+          </a:blip>
+          <a:stretch>
+            <a:fillRect/>
+          </a:stretch>
+        </a:blipFill>
+        <a:ln w="22225" cap="rnd" cmpd="sng" algn="ctr">
+          <a:noFill/>
+          <a:prstDash val="solid"/>
+        </a:ln>
+        <a:effectLst/>
+      </dsp:spPr>
+      <dsp:style>
+        <a:lnRef idx="2">
+          <a:scrgbClr r="0" g="0" b="0"/>
+        </a:lnRef>
+        <a:fillRef idx="1">
+          <a:scrgbClr r="0" g="0" b="0"/>
+        </a:fillRef>
+        <a:effectRef idx="0">
+          <a:scrgbClr r="0" g="0" b="0"/>
+        </a:effectRef>
+        <a:fontRef idx="minor">
+          <a:schemeClr val="lt1"/>
+        </a:fontRef>
+      </dsp:style>
+    </dsp:sp>
+    <dsp:sp modelId="{A3838D15-85D1-4048-B20D-9009920800B0}">
+      <dsp:nvSpPr>
+        <dsp:cNvPr id="0" name=""/>
+        <dsp:cNvSpPr/>
+      </dsp:nvSpPr>
+      <dsp:spPr>
+        <a:xfrm>
+          <a:off x="3841306" y="1815356"/>
+          <a:ext cx="3322282" cy="743927"/>
+        </a:xfrm>
+        <a:prstGeom prst="rect">
+          <a:avLst/>
+        </a:prstGeom>
+        <a:noFill/>
+        <a:ln>
+          <a:noFill/>
+        </a:ln>
+        <a:effectLst/>
+      </dsp:spPr>
+      <dsp:style>
+        <a:lnRef idx="0">
+          <a:scrgbClr r="0" g="0" b="0"/>
+        </a:lnRef>
+        <a:fillRef idx="0">
+          <a:scrgbClr r="0" g="0" b="0"/>
+        </a:fillRef>
+        <a:effectRef idx="0">
+          <a:scrgbClr r="0" g="0" b="0"/>
+        </a:effectRef>
+        <a:fontRef idx="minor"/>
+      </dsp:style>
+      <dsp:txBody>
+        <a:bodyPr spcFirstLastPara="0" vert="horz" wrap="square" lIns="0" tIns="0" rIns="0" bIns="0" numCol="1" spcCol="1270" anchor="t" anchorCtr="0">
+          <a:noAutofit/>
+        </a:bodyPr>
+        <a:lstStyle/>
+        <a:p>
+          <a:pPr marL="0" lvl="0" indent="0" algn="ctr" defTabSz="800100">
+            <a:lnSpc>
+              <a:spcPct val="90000"/>
+            </a:lnSpc>
+            <a:spcBef>
+              <a:spcPct val="0"/>
+            </a:spcBef>
+            <a:spcAft>
+              <a:spcPct val="35000"/>
+            </a:spcAft>
+            <a:buNone/>
+            <a:defRPr cap="all"/>
+          </a:pPr>
+          <a:r>
+            <a:rPr lang="en-US" sz="1800" kern="1200" dirty="0"/>
+            <a:t>Submit a word document only include </a:t>
+          </a:r>
+          <a:r>
+            <a:rPr lang="en-US" sz="1800" kern="1200" dirty="0">
+              <a:solidFill>
+                <a:srgbClr val="C00000"/>
+              </a:solidFill>
+            </a:rPr>
+            <a:t>question and answer</a:t>
+          </a:r>
+        </a:p>
+      </dsp:txBody>
+      <dsp:txXfrm>
+        <a:off x="3841306" y="1815356"/>
+        <a:ext cx="3322282" cy="743927"/>
+      </dsp:txXfrm>
+    </dsp:sp>
+  </dsp:spTree>
+</dsp:drawing>
+</file>
+
+<file path=ppt/diagrams/layout1.xml><?xml version="1.0" encoding="utf-8"?>
+<dgm:layoutDef xmlns:dgm="http://schemas.openxmlformats.org/drawingml/2006/diagram" xmlns:a="http://schemas.openxmlformats.org/drawingml/2006/main" uniqueId="urn:microsoft.com/office/officeart/2018/5/layout/IconLeafLabelList">
+  <dgm:title val="Icon Leaf Label List"/>
+  <dgm:desc val="Use to show non-sequential or grouped chunks of information accompanied by a related visuals. Works best with icons or small pictures with short text captions."/>
+  <dgm:catLst>
+    <dgm:cat type="icon" pri="500"/>
+  </dgm:catLst>
+  <dgm:sampData useDef="1">
+    <dgm:dataModel>
+      <dgm:ptLst/>
+      <dgm:bg/>
+      <dgm:whole/>
+    </dgm:dataModel>
+  </dgm:sampData>
+  <dgm:styleData useDef="1">
+    <dgm:dataModel>
+      <dgm:ptLst/>
+      <dgm:bg/>
+      <dgm:whole/>
+    </dgm:dataModel>
+  </dgm:styleData>
+  <dgm:clrData useDef="1">
+    <dgm:dataModel>
+      <dgm:ptLst/>
+      <dgm:bg/>
+      <dgm:whole/>
+    </dgm:dataModel>
+  </dgm:clrData>
+  <dgm:layoutNode name="root">
+    <dgm:varLst>
+      <dgm:dir/>
+      <dgm:resizeHandles val="exact"/>
+    </dgm:varLst>
+    <dgm:choose name="Name0">
+      <dgm:if name="Name1" axis="self" func="var" arg="dir" op="equ" val="norm">
+        <dgm:alg type="snake">
+          <dgm:param type="grDir" val="tL"/>
+          <dgm:param type="flowDir" val="row"/>
+          <dgm:param type="contDir" val="sameDir"/>
+          <dgm:param type="off" val="ctr"/>
+          <dgm:param type="vertAlign" val="mid"/>
+          <dgm:param type="horzAlign" val="ctr"/>
+        </dgm:alg>
+      </dgm:if>
+      <dgm:else name="Name2">
+        <dgm:alg type="snake">
+          <dgm:param type="grDir" val="tR"/>
+          <dgm:param type="flowDir" val="row"/>
+          <dgm:param type="contDir" val="sameDir"/>
+          <dgm:param type="off" val="ctr"/>
+          <dgm:param type="vertAlign" val="mid"/>
+          <dgm:param type="horzAlign" val="ctr"/>
+        </dgm:alg>
+      </dgm:else>
+    </dgm:choose>
+    <dgm:shape xmlns:r="http://schemas.openxmlformats.org/officeDocument/2006/relationships" r:blip="">
+      <dgm:adjLst/>
+    </dgm:shape>
+    <dgm:presOf/>
+    <dgm:choose name="Name3">
+      <dgm:if name="Name4" axis="ch" ptType="node" func="cnt" op="lte" val="2">
+        <dgm:constrLst>
+          <dgm:constr type="h" for="ch" forName="compNode" refType="h" fact="0.4"/>
+          <dgm:constr type="w" for="ch" forName="compNode" val="100"/>
+          <dgm:constr type="w" for="ch" forName="sibTrans" refType="w" refFor="ch" refForName="compNode" fact="0.175"/>
+          <dgm:constr type="sp" refType="w" refFor="ch" refForName="compNode" op="equ" fact="0.25"/>
+          <dgm:constr type="primFontSz" for="des" ptType="node" op="equ" val="44"/>
+          <dgm:constr type="h" for="des" forName="compNode" op="equ"/>
+          <dgm:constr type="h" for="des" forName="textRect" op="equ"/>
+        </dgm:constrLst>
+      </dgm:if>
+      <dgm:if name="Name5" axis="ch" ptType="node" func="cnt" op="lte" val="3">
+        <dgm:constrLst>
+          <dgm:constr type="h" for="ch" forName="compNode" refType="h" fact="0.4"/>
+          <dgm:constr type="w" for="ch" forName="compNode" val="100"/>
+          <dgm:constr type="w" for="ch" forName="sibTrans" refType="w" refFor="ch" refForName="compNode" fact="0.175"/>
+          <dgm:constr type="sp" refType="w" refFor="ch" refForName="compNode" op="equ" fact="0.25"/>
+          <dgm:constr type="primFontSz" for="des" ptType="node" op="equ" val="40"/>
+          <dgm:constr type="h" for="des" forName="compNode" op="equ"/>
+          <dgm:constr type="h" for="des" forName="textRect" op="equ"/>
+        </dgm:constrLst>
+      </dgm:if>
+      <dgm:if name="Name6" axis="ch" ptType="node" func="cnt" op="lte" val="4">
+        <dgm:constrLst>
+          <dgm:constr type="h" for="ch" forName="compNode" refType="h" fact="0.4"/>
+          <dgm:constr type="w" for="ch" forName="compNode" refType="w"/>
+          <dgm:constr type="w" for="ch" forName="sibTrans" refType="w" refFor="ch" refForName="compNode" fact="0.175"/>
+          <dgm:constr type="sp" refType="w" refFor="ch" refForName="compNode" op="equ" fact="0.25"/>
+          <dgm:constr type="primFontSz" for="des" ptType="node" op="equ" val="32"/>
+          <dgm:constr type="h" for="des" forName="compNode" op="equ"/>
+          <dgm:constr type="h" for="des" forName="textRect" op="equ"/>
+        </dgm:constrLst>
+      </dgm:if>
+      <dgm:else name="Name7">
+        <dgm:constrLst>
+          <dgm:constr type="h" for="ch" forName="compNode" refType="h" fact="0.4"/>
+          <dgm:constr type="w" for="ch" forName="compNode" refType="w"/>
+          <dgm:constr type="w" for="ch" forName="sibTrans" refType="w" refFor="ch" refForName="compNode" fact="0.175"/>
+          <dgm:constr type="sp" refType="w" refFor="ch" refForName="compNode" op="equ" fact="0.25"/>
+          <dgm:constr type="primFontSz" for="des" ptType="node" op="equ" val="24"/>
+          <dgm:constr type="h" for="des" forName="compNode" op="equ"/>
+          <dgm:constr type="h" for="des" forName="textRect" op="equ"/>
+        </dgm:constrLst>
+      </dgm:else>
+    </dgm:choose>
+    <dgm:ruleLst>
+      <dgm:rule type="w" for="ch" forName="compNode" val="50" fact="NaN" max="NaN"/>
+    </dgm:ruleLst>
+    <dgm:forEach name="Name8" axis="ch" ptType="node">
+      <dgm:layoutNode name="compNode">
+        <dgm:alg type="composite"/>
+        <dgm:shape xmlns:r="http://schemas.openxmlformats.org/officeDocument/2006/relationships" r:blip="">
+          <dgm:adjLst/>
+        </dgm:shape>
+        <dgm:presOf axis="self"/>
+        <dgm:constrLst>
+          <dgm:constr type="w" for="ch" forName="iconBgRect" refType="w" fact="0.61"/>
+          <dgm:constr type="h" for="ch" forName="iconBgRect" refType="w" refFor="ch" refForName="iconBgRect"/>
+          <dgm:constr type="t" for="ch" forName="iconBgRect"/>
+          <dgm:constr type="ctrX" for="ch" forName="iconBgRect" refType="w" fact="0.5"/>
+          <dgm:constr type="w" for="ch" forName="iconRect" refType="w" fact="0.35"/>
+          <dgm:constr type="h" for="ch" forName="iconRect" refType="w" refFor="ch" refForName="iconRect"/>
+          <dgm:constr type="ctrX" for="ch" forName="iconRect" refType="ctrX" refFor="ch" refForName="iconBgRect"/>
+          <dgm:constr type="ctrY" for="ch" forName="iconRect" refType="ctrY" refFor="ch" refForName="iconBgRect"/>
+          <dgm:constr type="h" for="ch" forName="spaceRect" refType="w" fact="0.19"/>
+          <dgm:constr type="w" for="ch" forName="spaceRect" refType="w"/>
+          <dgm:constr type="l" for="ch" forName="spaceRect"/>
+          <dgm:constr type="t" for="ch" forName="spaceRect" refType="b" refFor="ch" refForName="iconBgRect"/>
+          <dgm:constr type="h" for="ch" forName="textRect" val="20"/>
+          <dgm:constr type="w" for="ch" forName="textRect" refType="w"/>
+          <dgm:constr type="l" for="ch" forName="textRect"/>
+          <dgm:constr type="t" for="ch" forName="textRect" refType="b" refFor="ch" refForName="spaceRect"/>
+        </dgm:constrLst>
+        <dgm:ruleLst>
+          <dgm:rule type="h" val="INF" fact="NaN" max="NaN"/>
+        </dgm:ruleLst>
+        <dgm:layoutNode name="iconBgRect" styleLbl="bgShp">
+          <dgm:alg type="sp"/>
+          <dgm:shape xmlns:r="http://schemas.openxmlformats.org/officeDocument/2006/relationships" type="round2DiagRect" r:blip="">
+            <dgm:adjLst/>
+            <dgm:extLst>
+              <a:ext uri="{B698B0E9-8C71-41B9-8309-B3DCBF30829C}">
+                <dgm1612:spPr xmlns:dgm1612="http://schemas.microsoft.com/office/drawing/2016/12/diagram">
+                  <a:prstGeom prst="round2DiagRect">
+                    <a:avLst>
+                      <a:gd name="adj1" fmla="val 29727"/>
+                      <a:gd name="adj2" fmla="val 0"/>
+                    </a:avLst>
+                  </a:prstGeom>
+                </dgm1612:spPr>
+              </a:ext>
+            </dgm:extLst>
+          </dgm:shape>
+          <dgm:presOf/>
+          <dgm:constrLst/>
+          <dgm:ruleLst/>
+        </dgm:layoutNode>
+        <dgm:layoutNode name="iconRect" styleLbl="node1">
+          <dgm:alg type="sp"/>
+          <dgm:shape xmlns:r="http://schemas.openxmlformats.org/officeDocument/2006/relationships" type="rect" r:blip="" blipPhldr="1">
+            <dgm:adjLst/>
+          </dgm:shape>
+          <dgm:presOf/>
+          <dgm:constrLst/>
+          <dgm:ruleLst/>
+        </dgm:layoutNode>
+        <dgm:layoutNode name="spaceRect">
+          <dgm:alg type="sp"/>
+          <dgm:shape xmlns:r="http://schemas.openxmlformats.org/officeDocument/2006/relationships" r:blip="">
+            <dgm:adjLst/>
+          </dgm:shape>
+          <dgm:presOf/>
+          <dgm:constrLst/>
+          <dgm:ruleLst/>
+        </dgm:layoutNode>
+        <dgm:layoutNode name="textRect" styleLbl="revTx">
+          <dgm:varLst>
+            <dgm:chMax val="1"/>
+            <dgm:chPref val="1"/>
+          </dgm:varLst>
+          <dgm:alg type="tx">
+            <dgm:param type="txAnchorVert" val="t"/>
+          </dgm:alg>
+          <dgm:shape xmlns:r="http://schemas.openxmlformats.org/officeDocument/2006/relationships" type="rect" r:blip="">
+            <dgm:adjLst/>
+          </dgm:shape>
+          <dgm:presOf axis="self" ptType="node"/>
+          <dgm:constrLst>
+            <dgm:constr type="lMarg"/>
+            <dgm:constr type="rMarg"/>
+            <dgm:constr type="tMarg"/>
+            <dgm:constr type="bMarg"/>
+          </dgm:constrLst>
+          <dgm:ruleLst>
+            <dgm:rule type="primFontSz" val="11" fact="NaN" max="NaN"/>
+            <dgm:rule type="h" val="INF" fact="NaN" max="NaN"/>
+          </dgm:ruleLst>
+        </dgm:layoutNode>
+      </dgm:layoutNode>
+      <dgm:forEach name="Name9" axis="followSib" ptType="sibTrans" cnt="1">
+        <dgm:layoutNode name="sibTrans">
+          <dgm:alg type="sp"/>
+          <dgm:shape xmlns:r="http://schemas.openxmlformats.org/officeDocument/2006/relationships" r:blip="">
+            <dgm:adjLst/>
+          </dgm:shape>
+          <dgm:presOf axis="self"/>
+          <dgm:constrLst/>
+          <dgm:ruleLst/>
+        </dgm:layoutNode>
+      </dgm:forEach>
+    </dgm:forEach>
+  </dgm:layoutNode>
+  <dgm:extLst>
+    <a:ext uri="{68A01E43-0DF5-4B5B-8FA6-DAF915123BFB}">
+      <dgm1612:lstStyle xmlns:dgm1612="http://schemas.microsoft.com/office/drawing/2016/12/diagram">
+        <a:lvl1pPr>
+          <a:lnSpc>
+            <a:spcPct val="100000"/>
+          </a:lnSpc>
+          <a:defRPr cap="all"/>
+        </a:lvl1pPr>
+      </dgm1612:lstStyle>
+    </a:ext>
+  </dgm:extLst>
+</dgm:layoutDef>
+</file>
+
+<file path=ppt/diagrams/quickStyle1.xml><?xml version="1.0" encoding="utf-8"?>
+<dgm:styleDef xmlns:dgm="http://schemas.openxmlformats.org/drawingml/2006/diagram" xmlns:a="http://schemas.openxmlformats.org/drawingml/2006/main" uniqueId="urn:microsoft.com/office/officeart/2005/8/quickstyle/simple1">
+  <dgm:title val=""/>
+  <dgm:desc val=""/>
+  <dgm:catLst>
+    <dgm:cat type="simple" pri="10100"/>
+  </dgm:catLst>
+  <dgm:scene3d>
+    <a:camera prst="orthographicFront"/>
+    <a:lightRig rig="threePt" dir="t"/>
+  </dgm:scene3d>
+  <dgm:styleLbl name="node0">
+    <dgm:scene3d>
+      <a:camera prst="orthographicFront"/>
+      <a:lightRig rig="threePt" dir="t"/>
+    </dgm:scene3d>
+    <dgm:sp3d/>
+    <dgm:txPr/>
+    <dgm:style>
+      <a:lnRef idx="2">
+        <a:scrgbClr r="0" g="0" b="0"/>
+      </a:lnRef>
+      <a:fillRef idx="1">
+        <a:scrgbClr r="0" g="0" b="0"/>
+      </a:fillRef>
+      <a:effectRef idx="0">
+        <a:scrgbClr r="0" g="0" b="0"/>
+      </a:effectRef>
+      <a:fontRef idx="minor">
+        <a:schemeClr val="lt1"/>
+      </a:fontRef>
+    </dgm:style>
+  </dgm:styleLbl>
+  <dgm:styleLbl name="lnNode1">
+    <dgm:scene3d>
+      <a:camera prst="orthographicFront"/>
+      <a:lightRig rig="threePt" dir="t"/>
+    </dgm:scene3d>
+    <dgm:sp3d/>
+    <dgm:txPr/>
+    <dgm:style>
+      <a:lnRef idx="2">
+        <a:scrgbClr r="0" g="0" b="0"/>
+      </a:lnRef>
+      <a:fillRef idx="1">
+        <a:scrgbClr r="0" g="0" b="0"/>
+      </a:fillRef>
+      <a:effectRef idx="0">
+        <a:scrgbClr r="0" g="0" b="0"/>
+      </a:effectRef>
+      <a:fontRef idx="minor">
+        <a:schemeClr val="lt1"/>
+      </a:fontRef>
+    </dgm:style>
+  </dgm:styleLbl>
+  <dgm:styleLbl name="vennNode1">
+    <dgm:scene3d>
+      <a:camera prst="orthographicFront"/>
+      <a:lightRig rig="threePt" dir="t"/>
+    </dgm:scene3d>
+    <dgm:sp3d/>
+    <dgm:txPr/>
+    <dgm:style>
+      <a:lnRef idx="2">
+        <a:scrgbClr r="0" g="0" b="0"/>
+      </a:lnRef>
+      <a:fillRef idx="1">
+        <a:scrgbClr r="0" g="0" b="0"/>
+      </a:fillRef>
+      <a:effectRef idx="0">
+        <a:scrgbClr r="0" g="0" b="0"/>
+      </a:effectRef>
+      <a:fontRef idx="minor">
+        <a:schemeClr val="tx1"/>
+      </a:fontRef>
+    </dgm:style>
+  </dgm:styleLbl>
+  <dgm:styleLbl name="alignNode1">
+    <dgm:scene3d>
+      <a:camera prst="orthographicFront"/>
+      <a:lightRig rig="threePt" dir="t"/>
+    </dgm:scene3d>
+    <dgm:sp3d/>
+    <dgm:txPr/>
+    <dgm:style>
+      <a:lnRef idx="2">
+        <a:scrgbClr r="0" g="0" b="0"/>
+      </a:lnRef>
+      <a:fillRef idx="1">
+        <a:scrgbClr r="0" g="0" b="0"/>
+      </a:fillRef>
+      <a:effectRef idx="0">
+        <a:scrgbClr r="0" g="0" b="0"/>
+      </a:effectRef>
+      <a:fontRef idx="minor">
+        <a:schemeClr val="lt1"/>
+      </a:fontRef>
+    </dgm:style>
+  </dgm:styleLbl>
+  <dgm:styleLbl name="node1">
+    <dgm:scene3d>
+      <a:camera prst="orthographicFront"/>
+      <a:lightRig rig="threePt" dir="t"/>
+    </dgm:scene3d>
+    <dgm:sp3d/>
+    <dgm:txPr/>
+    <dgm:style>
+      <a:lnRef idx="2">
+        <a:scrgbClr r="0" g="0" b="0"/>
+      </a:lnRef>
+      <a:fillRef idx="1">
+        <a:scrgbClr r="0" g="0" b="0"/>
+      </a:fillRef>
+      <a:effectRef idx="0">
+        <a:scrgbClr r="0" g="0" b="0"/>
+      </a:effectRef>
+      <a:fontRef idx="minor">
+        <a:schemeClr val="lt1"/>
+      </a:fontRef>
+    </dgm:style>
+  </dgm:styleLbl>
+  <dgm:styleLbl name="node2">
+    <dgm:scene3d>
+      <a:camera prst="orthographicFront"/>
+      <a:lightRig rig="threePt" dir="t"/>
+    </dgm:scene3d>
+    <dgm:sp3d/>
+    <dgm:txPr/>
+    <dgm:style>
+      <a:lnRef idx="2">
+        <a:scrgbClr r="0" g="0" b="0"/>
+      </a:lnRef>
+      <a:fillRef idx="1">
+        <a:scrgbClr r="0" g="0" b="0"/>
+      </a:fillRef>
+      <a:effectRef idx="0">
+        <a:scrgbClr r="0" g="0" b="0"/>
+      </a:effectRef>
+      <a:fontRef idx="minor">
+        <a:schemeClr val="lt1"/>
+      </a:fontRef>
+    </dgm:style>
+  </dgm:styleLbl>
+  <dgm:styleLbl name="node3">
+    <dgm:scene3d>
+      <a:camera prst="orthographicFront"/>
+      <a:lightRig rig="threePt" dir="t"/>
+    </dgm:scene3d>
+    <dgm:sp3d/>
+    <dgm:txPr/>
+    <dgm:style>
+      <a:lnRef idx="2">
+        <a:scrgbClr r="0" g="0" b="0"/>
+      </a:lnRef>
+      <a:fillRef idx="1">
+        <a:scrgbClr r="0" g="0" b="0"/>
+      </a:fillRef>
+      <a:effectRef idx="0">
+        <a:scrgbClr r="0" g="0" b="0"/>
+      </a:effectRef>
+      <a:fontRef idx="minor">
+        <a:schemeClr val="lt1"/>
+      </a:fontRef>
+    </dgm:style>
+  </dgm:styleLbl>
+  <dgm:styleLbl name="node4">
+    <dgm:scene3d>
+      <a:camera prst="orthographicFront"/>
+      <a:lightRig rig="threePt" dir="t"/>
+    </dgm:scene3d>
+    <dgm:sp3d/>
+    <dgm:txPr/>
+    <dgm:style>
+      <a:lnRef idx="2">
+        <a:scrgbClr r="0" g="0" b="0"/>
+      </a:lnRef>
+      <a:fillRef idx="1">
+        <a:scrgbClr r="0" g="0" b="0"/>
+      </a:fillRef>
+      <a:effectRef idx="0">
+        <a:scrgbClr r="0" g="0" b="0"/>
+      </a:effectRef>
+      <a:fontRef idx="minor">
+        <a:schemeClr val="lt1"/>
+      </a:fontRef>
+    </dgm:style>
+  </dgm:styleLbl>
+  <dgm:styleLbl name="fgImgPlace1">
+    <dgm:scene3d>
+      <a:camera prst="orthographicFront"/>
+      <a:lightRig rig="threePt" dir="t"/>
+    </dgm:scene3d>
+    <dgm:sp3d/>
+    <dgm:txPr/>
+    <dgm:style>
+      <a:lnRef idx="2">
+        <a:scrgbClr r="0" g="0" b="0"/>
+      </a:lnRef>
+      <a:fillRef idx="1">
+        <a:scrgbClr r="0" g="0" b="0"/>
+      </a:fillRef>
+      <a:effectRef idx="0">
+        <a:scrgbClr r="0" g="0" b="0"/>
+      </a:effectRef>
+      <a:fontRef idx="minor"/>
+    </dgm:style>
+  </dgm:styleLbl>
+  <dgm:styleLbl name="alignImgPlace1">
+    <dgm:scene3d>
+      <a:camera prst="orthographicFront"/>
+      <a:lightRig rig="threePt" dir="t"/>
+    </dgm:scene3d>
+    <dgm:sp3d/>
+    <dgm:txPr/>
+    <dgm:style>
+      <a:lnRef idx="2">
+        <a:scrgbClr r="0" g="0" b="0"/>
+      </a:lnRef>
+      <a:fillRef idx="1">
+        <a:scrgbClr r="0" g="0" b="0"/>
+      </a:fillRef>
+      <a:effectRef idx="0">
+        <a:scrgbClr r="0" g="0" b="0"/>
+      </a:effectRef>
+      <a:fontRef idx="minor"/>
+    </dgm:style>
+  </dgm:styleLbl>
+  <dgm:styleLbl name="bgImgPlace1">
+    <dgm:scene3d>
+      <a:camera prst="orthographicFront"/>
+      <a:lightRig rig="threePt" dir="t"/>
+    </dgm:scene3d>
+    <dgm:sp3d/>
+    <dgm:txPr/>
+    <dgm:style>
+      <a:lnRef idx="2">
+        <a:scrgbClr r="0" g="0" b="0"/>
+      </a:lnRef>
+      <a:fillRef idx="1">
+        <a:scrgbClr r="0" g="0" b="0"/>
+      </a:fillRef>
+      <a:effectRef idx="0">
+        <a:scrgbClr r="0" g="0" b="0"/>
+      </a:effectRef>
+      <a:fontRef idx="minor"/>
+    </dgm:style>
+  </dgm:styleLbl>
+  <dgm:styleLbl name="sibTrans2D1">
+    <dgm:scene3d>
+      <a:camera prst="orthographicFront"/>
+      <a:lightRig rig="threePt" dir="t"/>
+    </dgm:scene3d>
+    <dgm:sp3d/>
+    <dgm:txPr/>
+    <dgm:style>
+      <a:lnRef idx="0">
+        <a:scrgbClr r="0" g="0" b="0"/>
+      </a:lnRef>
+      <a:fillRef idx="1">
+        <a:scrgbClr r="0" g="0" b="0"/>
+      </a:fillRef>
+      <a:effectRef idx="0">
+        <a:scrgbClr r="0" g="0" b="0"/>
+      </a:effectRef>
+      <a:fontRef idx="minor">
+        <a:schemeClr val="lt1"/>
+      </a:fontRef>
+    </dgm:style>
+  </dgm:styleLbl>
+  <dgm:styleLbl name="fgSibTrans2D1">
+    <dgm:scene3d>
+      <a:camera prst="orthographicFront"/>
+      <a:lightRig rig="threePt" dir="t"/>
+    </dgm:scene3d>
+    <dgm:sp3d/>
+    <dgm:txPr/>
+    <dgm:style>
+      <a:lnRef idx="0">
+        <a:scrgbClr r="0" g="0" b="0"/>
+      </a:lnRef>
+      <a:fillRef idx="1">
+        <a:scrgbClr r="0" g="0" b="0"/>
+      </a:fillRef>
+      <a:effectRef idx="0">
+        <a:scrgbClr r="0" g="0" b="0"/>
+      </a:effectRef>
+      <a:fontRef idx="minor">
+        <a:schemeClr val="lt1"/>
+      </a:fontRef>
+    </dgm:style>
+  </dgm:styleLbl>
+  <dgm:styleLbl name="bgSibTrans2D1">
+    <dgm:scene3d>
+      <a:camera prst="orthographicFront"/>
+      <a:lightRig rig="threePt" dir="t"/>
+    </dgm:scene3d>
+    <dgm:sp3d/>
+    <dgm:txPr/>
+    <dgm:style>
+      <a:lnRef idx="0">
+        <a:scrgbClr r="0" g="0" b="0"/>
+      </a:lnRef>
+      <a:fillRef idx="1">
+        <a:scrgbClr r="0" g="0" b="0"/>
+      </a:fillRef>
+      <a:effectRef idx="0">
+        <a:scrgbClr r="0" g="0" b="0"/>
+      </a:effectRef>
+      <a:fontRef idx="minor">
+        <a:schemeClr val="lt1"/>
+      </a:fontRef>
+    </dgm:style>
+  </dgm:styleLbl>
+  <dgm:styleLbl name="sibTrans1D1">
+    <dgm:scene3d>
+      <a:camera prst="orthographicFront"/>
+      <a:lightRig rig="threePt" dir="t"/>
+    </dgm:scene3d>
+    <dgm:sp3d/>
+    <dgm:txPr/>
+    <dgm:style>
+      <a:lnRef idx="1">
+        <a:scrgbClr r="0" g="0" b="0"/>
+      </a:lnRef>
+      <a:fillRef idx="0">
+        <a:scrgbClr r="0" g="0" b="0"/>
+      </a:fillRef>
+      <a:effectRef idx="0">
+        <a:scrgbClr r="0" g="0" b="0"/>
+      </a:effectRef>
+      <a:fontRef idx="minor"/>
+    </dgm:style>
+  </dgm:styleLbl>
+  <dgm:styleLbl name="callout">
+    <dgm:scene3d>
+      <a:camera prst="orthographicFront"/>
+      <a:lightRig rig="threePt" dir="t"/>
+    </dgm:scene3d>
+    <dgm:sp3d/>
+    <dgm:txPr/>
+    <dgm:style>
+      <a:lnRef idx="2">
+        <a:scrgbClr r="0" g="0" b="0"/>
+      </a:lnRef>
+      <a:fillRef idx="1">
+        <a:scrgbClr r="0" g="0" b="0"/>
+      </a:fillRef>
+      <a:effectRef idx="0">
+        <a:scrgbClr r="0" g="0" b="0"/>
+      </a:effectRef>
+      <a:fontRef idx="minor"/>
+    </dgm:style>
+  </dgm:styleLbl>
+  <dgm:styleLbl name="asst0">
+    <dgm:scene3d>
+      <a:camera prst="orthographicFront"/>
+      <a:lightRig rig="threePt" dir="t"/>
+    </dgm:scene3d>
+    <dgm:sp3d/>
+    <dgm:txPr/>
+    <dgm:style>
+      <a:lnRef idx="2">
+        <a:scrgbClr r="0" g="0" b="0"/>
+      </a:lnRef>
+      <a:fillRef idx="1">
+        <a:scrgbClr r="0" g="0" b="0"/>
+      </a:fillRef>
+      <a:effectRef idx="0">
+        <a:scrgbClr r="0" g="0" b="0"/>
+      </a:effectRef>
+      <a:fontRef idx="minor">
+        <a:schemeClr val="lt1"/>
+      </a:fontRef>
+    </dgm:style>
+  </dgm:styleLbl>
+  <dgm:styleLbl name="asst1">
+    <dgm:scene3d>
+      <a:camera prst="orthographicFront"/>
+      <a:lightRig rig="threePt" dir="t"/>
+    </dgm:scene3d>
+    <dgm:sp3d/>
+    <dgm:txPr/>
+    <dgm:style>
+      <a:lnRef idx="2">
+        <a:scrgbClr r="0" g="0" b="0"/>
+      </a:lnRef>
+      <a:fillRef idx="1">
+        <a:scrgbClr r="0" g="0" b="0"/>
+      </a:fillRef>
+      <a:effectRef idx="0">
+        <a:scrgbClr r="0" g="0" b="0"/>
+      </a:effectRef>
+      <a:fontRef idx="minor">
+        <a:schemeClr val="lt1"/>
+      </a:fontRef>
+    </dgm:style>
+  </dgm:styleLbl>
+  <dgm:styleLbl name="asst2">
+    <dgm:scene3d>
+      <a:camera prst="orthographicFront"/>
+      <a:lightRig rig="threePt" dir="t"/>
+    </dgm:scene3d>
+    <dgm:sp3d/>
+    <dgm:txPr/>
+    <dgm:style>
+      <a:lnRef idx="2">
+        <a:scrgbClr r="0" g="0" b="0"/>
+      </a:lnRef>
+      <a:fillRef idx="1">
+        <a:scrgbClr r="0" g="0" b="0"/>
+      </a:fillRef>
+      <a:effectRef idx="0">
+        <a:scrgbClr r="0" g="0" b="0"/>
+      </a:effectRef>
+      <a:fontRef idx="minor">
+        <a:schemeClr val="lt1"/>
+      </a:fontRef>
+    </dgm:style>
+  </dgm:styleLbl>
+  <dgm:styleLbl name="asst3">
+    <dgm:scene3d>
+      <a:camera prst="orthographicFront"/>
+      <a:lightRig rig="threePt" dir="t"/>
+    </dgm:scene3d>
+    <dgm:sp3d/>
+    <dgm:txPr/>
+    <dgm:style>
+      <a:lnRef idx="2">
+        <a:scrgbClr r="0" g="0" b="0"/>
+      </a:lnRef>
+      <a:fillRef idx="1">
+        <a:scrgbClr r="0" g="0" b="0"/>
+      </a:fillRef>
+      <a:effectRef idx="0">
+        <a:scrgbClr r="0" g="0" b="0"/>
+      </a:effectRef>
+      <a:fontRef idx="minor">
+        <a:schemeClr val="lt1"/>
+      </a:fontRef>
+    </dgm:style>
+  </dgm:styleLbl>
+  <dgm:styleLbl name="asst4">
+    <dgm:scene3d>
+      <a:camera prst="orthographicFront"/>
+      <a:lightRig rig="threePt" dir="t"/>
+    </dgm:scene3d>
+    <dgm:sp3d/>
+    <dgm:txPr/>
+    <dgm:style>
+      <a:lnRef idx="2">
+        <a:scrgbClr r="0" g="0" b="0"/>
+      </a:lnRef>
+      <a:fillRef idx="1">
+        <a:scrgbClr r="0" g="0" b="0"/>
+      </a:fillRef>
+      <a:effectRef idx="0">
+        <a:scrgbClr r="0" g="0" b="0"/>
+      </a:effectRef>
+      <a:fontRef idx="minor">
+        <a:schemeClr val="lt1"/>
+      </a:fontRef>
+    </dgm:style>
+  </dgm:styleLbl>
+  <dgm:styleLbl name="parChTrans2D1">
+    <dgm:scene3d>
+      <a:camera prst="orthographicFront"/>
+      <a:lightRig rig="threePt" dir="t"/>
+    </dgm:scene3d>
+    <dgm:sp3d/>
+    <dgm:txPr/>
+    <dgm:style>
+      <a:lnRef idx="2">
+        <a:scrgbClr r="0" g="0" b="0"/>
+      </a:lnRef>
+      <a:fillRef idx="1">
+        <a:scrgbClr r="0" g="0" b="0"/>
+      </a:fillRef>
+      <a:effectRef idx="0">
+        <a:scrgbClr r="0" g="0" b="0"/>
+      </a:effectRef>
+      <a:fontRef idx="minor">
+        <a:schemeClr val="lt1"/>
+      </a:fontRef>
+    </dgm:style>
+  </dgm:styleLbl>
+  <dgm:styleLbl name="parChTrans2D2">
+    <dgm:scene3d>
+      <a:camera prst="orthographicFront"/>
+      <a:lightRig rig="threePt" dir="t"/>
+    </dgm:scene3d>
+    <dgm:sp3d/>
+    <dgm:txPr/>
+    <dgm:style>
+      <a:lnRef idx="2">
+        <a:scrgbClr r="0" g="0" b="0"/>
+      </a:lnRef>
+      <a:fillRef idx="1">
+        <a:scrgbClr r="0" g="0" b="0"/>
+      </a:fillRef>
+      <a:effectRef idx="0">
+        <a:scrgbClr r="0" g="0" b="0"/>
+      </a:effectRef>
+      <a:fontRef idx="minor">
+        <a:schemeClr val="lt1"/>
+      </a:fontRef>
+    </dgm:style>
+  </dgm:styleLbl>
+  <dgm:styleLbl name="parChTrans2D3">
+    <dgm:scene3d>
+      <a:camera prst="orthographicFront"/>
+      <a:lightRig rig="threePt" dir="t"/>
+    </dgm:scene3d>
+    <dgm:sp3d/>
+    <dgm:txPr/>
+    <dgm:style>
+      <a:lnRef idx="2">
+        <a:scrgbClr r="0" g="0" b="0"/>
+      </a:lnRef>
+      <a:fillRef idx="1">
+        <a:scrgbClr r="0" g="0" b="0"/>
+      </a:fillRef>
+      <a:effectRef idx="0">
+        <a:scrgbClr r="0" g="0" b="0"/>
+      </a:effectRef>
+      <a:fontRef idx="minor">
+        <a:schemeClr val="lt1"/>
+      </a:fontRef>
+    </dgm:style>
+  </dgm:styleLbl>
+  <dgm:styleLbl name="parChTrans2D4">
+    <dgm:scene3d>
+      <a:camera prst="orthographicFront"/>
+      <a:lightRig rig="threePt" dir="t"/>
+    </dgm:scene3d>
+    <dgm:sp3d/>
+    <dgm:txPr/>
+    <dgm:style>
+      <a:lnRef idx="2">
+        <a:scrgbClr r="0" g="0" b="0"/>
+      </a:lnRef>
+      <a:fillRef idx="1">
+        <a:scrgbClr r="0" g="0" b="0"/>
+      </a:fillRef>
+      <a:effectRef idx="0">
+        <a:scrgbClr r="0" g="0" b="0"/>
+      </a:effectRef>
+      <a:fontRef idx="minor">
+        <a:schemeClr val="lt1"/>
+      </a:fontRef>
+    </dgm:style>
+  </dgm:styleLbl>
+  <dgm:styleLbl name="parChTrans1D1">
+    <dgm:scene3d>
+      <a:camera prst="orthographicFront"/>
+      <a:lightRig rig="threePt" dir="t"/>
+    </dgm:scene3d>
+    <dgm:sp3d/>
+    <dgm:txPr/>
+    <dgm:style>
+      <a:lnRef idx="2">
+        <a:scrgbClr r="0" g="0" b="0"/>
+      </a:lnRef>
+      <a:fillRef idx="0">
+        <a:scrgbClr r="0" g="0" b="0"/>
+      </a:fillRef>
+      <a:effectRef idx="0">
+        <a:scrgbClr r="0" g="0" b="0"/>
+      </a:effectRef>
+      <a:fontRef idx="minor"/>
+    </dgm:style>
+  </dgm:styleLbl>
+  <dgm:styleLbl name="parChTrans1D2">
+    <dgm:scene3d>
+      <a:camera prst="orthographicFront"/>
+      <a:lightRig rig="threePt" dir="t"/>
+    </dgm:scene3d>
+    <dgm:sp3d/>
+    <dgm:txPr/>
+    <dgm:style>
+      <a:lnRef idx="2">
+        <a:scrgbClr r="0" g="0" b="0"/>
+      </a:lnRef>
+      <a:fillRef idx="0">
+        <a:scrgbClr r="0" g="0" b="0"/>
+      </a:fillRef>
+      <a:effectRef idx="0">
+        <a:scrgbClr r="0" g="0" b="0"/>
+      </a:effectRef>
+      <a:fontRef idx="minor"/>
+    </dgm:style>
+  </dgm:styleLbl>
+  <dgm:styleLbl name="parChTrans1D3">
+    <dgm:scene3d>
+      <a:camera prst="orthographicFront"/>
+      <a:lightRig rig="threePt" dir="t"/>
+    </dgm:scene3d>
+    <dgm:sp3d/>
+    <dgm:txPr/>
+    <dgm:style>
+      <a:lnRef idx="2">
+        <a:scrgbClr r="0" g="0" b="0"/>
+      </a:lnRef>
+      <a:fillRef idx="0">
+        <a:scrgbClr r="0" g="0" b="0"/>
+      </a:fillRef>
+      <a:effectRef idx="0">
+        <a:scrgbClr r="0" g="0" b="0"/>
+      </a:effectRef>
+      <a:fontRef idx="minor"/>
+    </dgm:style>
+  </dgm:styleLbl>
+  <dgm:styleLbl name="parChTrans1D4">
+    <dgm:scene3d>
+      <a:camera prst="orthographicFront"/>
+      <a:lightRig rig="threePt" dir="t"/>
+    </dgm:scene3d>
+    <dgm:sp3d/>
+    <dgm:txPr/>
+    <dgm:style>
+      <a:lnRef idx="2">
+        <a:scrgbClr r="0" g="0" b="0"/>
+      </a:lnRef>
+      <a:fillRef idx="0">
+        <a:scrgbClr r="0" g="0" b="0"/>
+      </a:fillRef>
+      <a:effectRef idx="0">
+        <a:scrgbClr r="0" g="0" b="0"/>
+      </a:effectRef>
+      <a:fontRef idx="minor"/>
+    </dgm:style>
+  </dgm:styleLbl>
+  <dgm:styleLbl name="fgAcc1">
+    <dgm:scene3d>
+      <a:camera prst="orthographicFront"/>
+      <a:lightRig rig="threePt" dir="t"/>
+    </dgm:scene3d>
+    <dgm:sp3d/>
+    <dgm:txPr/>
+    <dgm:style>
+      <a:lnRef idx="2">
+        <a:scrgbClr r="0" g="0" b="0"/>
+      </a:lnRef>
+      <a:fillRef idx="1">
+        <a:scrgbClr r="0" g="0" b="0"/>
+      </a:fillRef>
+      <a:effectRef idx="0">
+        <a:scrgbClr r="0" g="0" b="0"/>
+      </a:effectRef>
+      <a:fontRef idx="minor"/>
+    </dgm:style>
+  </dgm:styleLbl>
+  <dgm:styleLbl name="conFgAcc1">
+    <dgm:scene3d>
+      <a:camera prst="orthographicFront"/>
+      <a:lightRig rig="threePt" dir="t"/>
+    </dgm:scene3d>
+    <dgm:sp3d/>
+    <dgm:txPr/>
+    <dgm:style>
+      <a:lnRef idx="2">
+        <a:scrgbClr r="0" g="0" b="0"/>
+      </a:lnRef>
+      <a:fillRef idx="1">
+        <a:scrgbClr r="0" g="0" b="0"/>
+      </a:fillRef>
+      <a:effectRef idx="0">
+        <a:scrgbClr r="0" g="0" b="0"/>
+      </a:effectRef>
+      <a:fontRef idx="minor"/>
+    </dgm:style>
+  </dgm:styleLbl>
+  <dgm:styleLbl name="alignAcc1">
+    <dgm:scene3d>
+      <a:camera prst="orthographicFront"/>
+      <a:lightRig rig="threePt" dir="t"/>
+    </dgm:scene3d>
+    <dgm:sp3d/>
+    <dgm:txPr/>
+    <dgm:style>
+      <a:lnRef idx="2">
+        <a:scrgbClr r="0" g="0" b="0"/>
+      </a:lnRef>
+      <a:fillRef idx="1">
+        <a:scrgbClr r="0" g="0" b="0"/>
+      </a:fillRef>
+      <a:effectRef idx="0">
+        <a:scrgbClr r="0" g="0" b="0"/>
+      </a:effectRef>
+      <a:fontRef idx="minor"/>
+    </dgm:style>
+  </dgm:styleLbl>
+  <dgm:styleLbl name="trAlignAcc1">
+    <dgm:scene3d>
+      <a:camera prst="orthographicFront"/>
+      <a:lightRig rig="threePt" dir="t"/>
+    </dgm:scene3d>
+    <dgm:sp3d/>
+    <dgm:txPr/>
+    <dgm:style>
+      <a:lnRef idx="1">
+        <a:scrgbClr r="0" g="0" b="0"/>
+      </a:lnRef>
+      <a:fillRef idx="1">
+        <a:scrgbClr r="0" g="0" b="0"/>
+      </a:fillRef>
+      <a:effectRef idx="0">
+        <a:scrgbClr r="0" g="0" b="0"/>
+      </a:effectRef>
+      <a:fontRef idx="minor"/>
+    </dgm:style>
+  </dgm:styleLbl>
+  <dgm:styleLbl name="bgAcc1">
+    <dgm:scene3d>
+      <a:camera prst="orthographicFront"/>
+      <a:lightRig rig="threePt" dir="t"/>
+    </dgm:scene3d>
+    <dgm:sp3d/>
+    <dgm:txPr/>
+    <dgm:style>
+      <a:lnRef idx="2">
+        <a:scrgbClr r="0" g="0" b="0"/>
+      </a:lnRef>
+      <a:fillRef idx="1">
+        <a:scrgbClr r="0" g="0" b="0"/>
+      </a:fillRef>
+      <a:effectRef idx="0">
+        <a:scrgbClr r="0" g="0" b="0"/>
+      </a:effectRef>
+      <a:fontRef idx="minor"/>
+    </dgm:style>
+  </dgm:styleLbl>
+  <dgm:styleLbl name="solidFgAcc1">
+    <dgm:scene3d>
+      <a:camera prst="orthographicFront"/>
+      <a:lightRig rig="threePt" dir="t"/>
+    </dgm:scene3d>
+    <dgm:sp3d/>
+    <dgm:txPr/>
+    <dgm:style>
+      <a:lnRef idx="2">
+        <a:scrgbClr r="0" g="0" b="0"/>
+      </a:lnRef>
+      <a:fillRef idx="1">
+        <a:scrgbClr r="0" g="0" b="0"/>
+      </a:fillRef>
+      <a:effectRef idx="0">
+        <a:scrgbClr r="0" g="0" b="0"/>
+      </a:effectRef>
+      <a:fontRef idx="minor"/>
+    </dgm:style>
+  </dgm:styleLbl>
+  <dgm:styleLbl name="solidAlignAcc1">
+    <dgm:scene3d>
+      <a:camera prst="orthographicFront"/>
+      <a:lightRig rig="threePt" dir="t"/>
+    </dgm:scene3d>
+    <dgm:sp3d/>
+    <dgm:txPr/>
+    <dgm:style>
+      <a:lnRef idx="2">
+        <a:scrgbClr r="0" g="0" b="0"/>
+      </a:lnRef>
+      <a:fillRef idx="1">
+        <a:scrgbClr r="0" g="0" b="0"/>
+      </a:fillRef>
+      <a:effectRef idx="0">
+        <a:scrgbClr r="0" g="0" b="0"/>
+      </a:effectRef>
+      <a:fontRef idx="minor"/>
+    </dgm:style>
+  </dgm:styleLbl>
+  <dgm:styleLbl name="solidBgAcc1">
+    <dgm:scene3d>
+      <a:camera prst="orthographicFront"/>
+      <a:lightRig rig="threePt" dir="t"/>
+    </dgm:scene3d>
+    <dgm:sp3d/>
+    <dgm:txPr/>
+    <dgm:style>
+      <a:lnRef idx="2">
+        <a:scrgbClr r="0" g="0" b="0"/>
+      </a:lnRef>
+      <a:fillRef idx="1">
+        <a:scrgbClr r="0" g="0" b="0"/>
+      </a:fillRef>
+      <a:effectRef idx="0">
+        <a:scrgbClr r="0" g="0" b="0"/>
+      </a:effectRef>
+      <a:fontRef idx="minor"/>
+    </dgm:style>
+  </dgm:styleLbl>
+  <dgm:styleLbl name="fgAccFollowNode1">
+    <dgm:scene3d>
+      <a:camera prst="orthographicFront"/>
+      <a:lightRig rig="threePt" dir="t"/>
+    </dgm:scene3d>
+    <dgm:sp3d/>
+    <dgm:txPr/>
+    <dgm:style>
+      <a:lnRef idx="2">
+        <a:scrgbClr r="0" g="0" b="0"/>
+      </a:lnRef>
+      <a:fillRef idx="1">
+        <a:scrgbClr r="0" g="0" b="0"/>
+      </a:fillRef>
+      <a:effectRef idx="0">
+        <a:scrgbClr r="0" g="0" b="0"/>
+      </a:effectRef>
+      <a:fontRef idx="minor"/>
+    </dgm:style>
+  </dgm:styleLbl>
+  <dgm:styleLbl name="alignAccFollowNode1">
+    <dgm:scene3d>
+      <a:camera prst="orthographicFront"/>
+      <a:lightRig rig="threePt" dir="t"/>
+    </dgm:scene3d>
+    <dgm:sp3d/>
+    <dgm:txPr/>
+    <dgm:style>
+      <a:lnRef idx="2">
+        <a:scrgbClr r="0" g="0" b="0"/>
+      </a:lnRef>
+      <a:fillRef idx="1">
+        <a:scrgbClr r="0" g="0" b="0"/>
+      </a:fillRef>
+      <a:effectRef idx="0">
+        <a:scrgbClr r="0" g="0" b="0"/>
+      </a:effectRef>
+      <a:fontRef idx="minor"/>
+    </dgm:style>
+  </dgm:styleLbl>
+  <dgm:styleLbl name="bgAccFollowNode1">
+    <dgm:scene3d>
+      <a:camera prst="orthographicFront"/>
+      <a:lightRig rig="threePt" dir="t"/>
+    </dgm:scene3d>
+    <dgm:sp3d/>
+    <dgm:txPr/>
+    <dgm:style>
+      <a:lnRef idx="2">
+        <a:scrgbClr r="0" g="0" b="0"/>
+      </a:lnRef>
+      <a:fillRef idx="1">
+        <a:scrgbClr r="0" g="0" b="0"/>
+      </a:fillRef>
+      <a:effectRef idx="0">
+        <a:scrgbClr r="0" g="0" b="0"/>
+      </a:effectRef>
+      <a:fontRef idx="minor"/>
+    </dgm:style>
+  </dgm:styleLbl>
+  <dgm:styleLbl name="fgAcc0">
+    <dgm:scene3d>
+      <a:camera prst="orthographicFront"/>
+      <a:lightRig rig="threePt" dir="t"/>
+    </dgm:scene3d>
+    <dgm:sp3d/>
+    <dgm:txPr/>
+    <dgm:style>
+      <a:lnRef idx="2">
+        <a:scrgbClr r="0" g="0" b="0"/>
+      </a:lnRef>
+      <a:fillRef idx="1">
+        <a:scrgbClr r="0" g="0" b="0"/>
+      </a:fillRef>
+      <a:effectRef idx="0">
+        <a:scrgbClr r="0" g="0" b="0"/>
+      </a:effectRef>
+      <a:fontRef idx="minor"/>
+    </dgm:style>
+  </dgm:styleLbl>
+  <dgm:styleLbl name="fgAcc2">
+    <dgm:scene3d>
+      <a:camera prst="orthographicFront"/>
+      <a:lightRig rig="threePt" dir="t"/>
+    </dgm:scene3d>
+    <dgm:sp3d/>
+    <dgm:txPr/>
+    <dgm:style>
+      <a:lnRef idx="2">
+        <a:scrgbClr r="0" g="0" b="0"/>
+      </a:lnRef>
+      <a:fillRef idx="1">
+        <a:scrgbClr r="0" g="0" b="0"/>
+      </a:fillRef>
+      <a:effectRef idx="0">
+        <a:scrgbClr r="0" g="0" b="0"/>
+      </a:effectRef>
+      <a:fontRef idx="minor"/>
+    </dgm:style>
+  </dgm:styleLbl>
+  <dgm:styleLbl name="fgAcc3">
+    <dgm:scene3d>
+      <a:camera prst="orthographicFront"/>
+      <a:lightRig rig="threePt" dir="t"/>
+    </dgm:scene3d>
+    <dgm:sp3d/>
+    <dgm:txPr/>
+    <dgm:style>
+      <a:lnRef idx="2">
+        <a:scrgbClr r="0" g="0" b="0"/>
+      </a:lnRef>
+      <a:fillRef idx="1">
+        <a:scrgbClr r="0" g="0" b="0"/>
+      </a:fillRef>
+      <a:effectRef idx="0">
+        <a:scrgbClr r="0" g="0" b="0"/>
+      </a:effectRef>
+      <a:fontRef idx="minor"/>
+    </dgm:style>
+  </dgm:styleLbl>
+  <dgm:styleLbl name="fgAcc4">
+    <dgm:scene3d>
+      <a:camera prst="orthographicFront"/>
+      <a:lightRig rig="threePt" dir="t"/>
+    </dgm:scene3d>
+    <dgm:sp3d/>
+    <dgm:txPr/>
+    <dgm:style>
+      <a:lnRef idx="2">
+        <a:scrgbClr r="0" g="0" b="0"/>
+      </a:lnRef>
+      <a:fillRef idx="1">
+        <a:scrgbClr r="0" g="0" b="0"/>
+      </a:fillRef>
+      <a:effectRef idx="0">
+        <a:scrgbClr r="0" g="0" b="0"/>
+      </a:effectRef>
+      <a:fontRef idx="minor"/>
+    </dgm:style>
+  </dgm:styleLbl>
+  <dgm:styleLbl name="bgShp">
+    <dgm:scene3d>
+      <a:camera prst="orthographicFront"/>
+      <a:lightRig rig="threePt" dir="t"/>
+    </dgm:scene3d>
+    <dgm:sp3d/>
+    <dgm:txPr/>
+    <dgm:style>
+      <a:lnRef idx="0">
+        <a:scrgbClr r="0" g="0" b="0"/>
+      </a:lnRef>
+      <a:fillRef idx="1">
+        <a:scrgbClr r="0" g="0" b="0"/>
+      </a:fillRef>
+      <a:effectRef idx="0">
+        <a:scrgbClr r="0" g="0" b="0"/>
+      </a:effectRef>
+      <a:fontRef idx="minor"/>
+    </dgm:style>
+  </dgm:styleLbl>
+  <dgm:styleLbl name="dkBgShp">
+    <dgm:scene3d>
+      <a:camera prst="orthographicFront"/>
+      <a:lightRig rig="threePt" dir="t"/>
+    </dgm:scene3d>
+    <dgm:sp3d/>
+    <dgm:txPr/>
+    <dgm:style>
+      <a:lnRef idx="0">
+        <a:scrgbClr r="0" g="0" b="0"/>
+      </a:lnRef>
+      <a:fillRef idx="1">
+        <a:scrgbClr r="0" g="0" b="0"/>
+      </a:fillRef>
+      <a:effectRef idx="0">
+        <a:scrgbClr r="0" g="0" b="0"/>
+      </a:effectRef>
+      <a:fontRef idx="minor"/>
+    </dgm:style>
+  </dgm:styleLbl>
+  <dgm:styleLbl name="trBgShp">
+    <dgm:scene3d>
+      <a:camera prst="orthographicFront"/>
+      <a:lightRig rig="threePt" dir="t"/>
+    </dgm:scene3d>
+    <dgm:sp3d/>
+    <dgm:txPr/>
+    <dgm:style>
+      <a:lnRef idx="0">
+        <a:scrgbClr r="0" g="0" b="0"/>
+      </a:lnRef>
+      <a:fillRef idx="1">
+        <a:scrgbClr r="0" g="0" b="0"/>
+      </a:fillRef>
+      <a:effectRef idx="0">
+        <a:scrgbClr r="0" g="0" b="0"/>
+      </a:effectRef>
+      <a:fontRef idx="minor"/>
+    </dgm:style>
+  </dgm:styleLbl>
+  <dgm:styleLbl name="fgShp">
+    <dgm:scene3d>
+      <a:camera prst="orthographicFront"/>
+      <a:lightRig rig="threePt" dir="t"/>
+    </dgm:scene3d>
+    <dgm:sp3d/>
+    <dgm:txPr/>
+    <dgm:style>
+      <a:lnRef idx="2">
+        <a:scrgbClr r="0" g="0" b="0"/>
+      </a:lnRef>
+      <a:fillRef idx="1">
+        <a:scrgbClr r="0" g="0" b="0"/>
+      </a:fillRef>
+      <a:effectRef idx="0">
+        <a:scrgbClr r="0" g="0" b="0"/>
+      </a:effectRef>
+      <a:fontRef idx="minor"/>
+    </dgm:style>
+  </dgm:styleLbl>
+  <dgm:styleLbl name="revTx">
+    <dgm:scene3d>
+      <a:camera prst="orthographicFront"/>
+      <a:lightRig rig="threePt" dir="t"/>
+    </dgm:scene3d>
+    <dgm:sp3d/>
+    <dgm:txPr/>
+    <dgm:style>
+      <a:lnRef idx="0">
+        <a:scrgbClr r="0" g="0" b="0"/>
+      </a:lnRef>
+      <a:fillRef idx="0">
+        <a:scrgbClr r="0" g="0" b="0"/>
+      </a:fillRef>
+      <a:effectRef idx="0">
+        <a:scrgbClr r="0" g="0" b="0"/>
+      </a:effectRef>
+      <a:fontRef idx="minor"/>
+    </dgm:style>
+  </dgm:styleLbl>
+</dgm:styleDef>
+</file>
+
 <file path=ppt/notesMasters/notesMaster1.xml><?xml version="1.0" encoding="utf-8"?>
 <p:notesMaster xmlns:a="http://schemas.openxmlformats.org/drawingml/2006/main" xmlns:r="http://schemas.openxmlformats.org/officeDocument/2006/relationships" xmlns:p="http://schemas.openxmlformats.org/presentationml/2006/main">
   <p:cSld>
@@ -243,7 +3020,7 @@
             <a:fld id="{66C520B4-85AA-9542-8CF7-3D2DDCE6041D}" type="datetimeFigureOut">
               <a:rPr lang="en-US" smtClean="0"/>
               <a:pPr/>
-              <a:t>11/5/2025</a:t>
+              <a:t>11/6/2025</a:t>
             </a:fld>
             <a:endParaRPr lang="en-US"/>
           </a:p>
@@ -2069,7 +4846,7 @@
           <a:bodyPr/>
           <a:lstStyle/>
           <a:p>
-            <a:endParaRPr lang="en-US" dirty="0"/>
+            <a:endParaRPr lang="zh-CN" altLang="en-US" dirty="0"/>
           </a:p>
         </p:txBody>
       </p:sp>
@@ -2088,19 +4865,78 @@
           <a:bodyPr/>
           <a:lstStyle/>
           <a:p>
+            <a:pPr marL="0" marR="0" lvl="0" indent="0" algn="r" defTabSz="914400" rtl="0" eaLnBrk="1" fontAlgn="auto" latinLnBrk="0" hangingPunct="1">
+              <a:lnSpc>
+                <a:spcPct val="100000"/>
+              </a:lnSpc>
+              <a:spcBef>
+                <a:spcPts val="0"/>
+              </a:spcBef>
+              <a:spcAft>
+                <a:spcPts val="0"/>
+              </a:spcAft>
+              <a:buClrTx/>
+              <a:buSzTx/>
+              <a:buFontTx/>
+              <a:buNone/>
+              <a:tabLst/>
+              <a:defRPr/>
+            </a:pPr>
             <a:fld id="{56507943-197E-CE46-82F0-5A323A24AE7A}" type="slidenum">
-              <a:rPr lang="en-US" smtClean="0"/>
-              <a:pPr/>
-              <a:t>27</a:t>
+              <a:rPr kumimoji="0" lang="en-US" sz="1200" b="0" i="0" u="none" strike="noStrike" kern="1200" cap="none" spc="0" normalizeH="0" baseline="0" noProof="0" smtClean="0">
+                <a:ln>
+                  <a:noFill/>
+                </a:ln>
+                <a:solidFill>
+                  <a:prstClr val="black"/>
+                </a:solidFill>
+                <a:effectLst/>
+                <a:uLnTx/>
+                <a:uFillTx/>
+                <a:latin typeface="Calibri"/>
+                <a:ea typeface="+mn-ea"/>
+                <a:cs typeface="+mn-cs"/>
+              </a:rPr>
+              <a:pPr marL="0" marR="0" lvl="0" indent="0" algn="r" defTabSz="914400" rtl="0" eaLnBrk="1" fontAlgn="auto" latinLnBrk="0" hangingPunct="1">
+                <a:lnSpc>
+                  <a:spcPct val="100000"/>
+                </a:lnSpc>
+                <a:spcBef>
+                  <a:spcPts val="0"/>
+                </a:spcBef>
+                <a:spcAft>
+                  <a:spcPts val="0"/>
+                </a:spcAft>
+                <a:buClrTx/>
+                <a:buSzTx/>
+                <a:buFontTx/>
+                <a:buNone/>
+                <a:tabLst/>
+                <a:defRPr/>
+              </a:pPr>
+              <a:t>28</a:t>
             </a:fld>
-            <a:endParaRPr lang="en-US"/>
+            <a:endParaRPr kumimoji="0" lang="en-US" sz="1200" b="0" i="0" u="none" strike="noStrike" kern="1200" cap="none" spc="0" normalizeH="0" baseline="0" noProof="0">
+              <a:ln>
+                <a:noFill/>
+              </a:ln>
+              <a:solidFill>
+                <a:prstClr val="black"/>
+              </a:solidFill>
+              <a:effectLst/>
+              <a:uLnTx/>
+              <a:uFillTx/>
+              <a:latin typeface="Calibri"/>
+              <a:ea typeface="+mn-ea"/>
+              <a:cs typeface="+mn-cs"/>
+            </a:endParaRPr>
           </a:p>
         </p:txBody>
       </p:sp>
     </p:spTree>
     <p:extLst>
       <p:ext uri="{BB962C8B-B14F-4D97-AF65-F5344CB8AC3E}">
-        <p14:creationId xmlns:p14="http://schemas.microsoft.com/office/powerpoint/2010/main" val="2956007665"/>
+        <p14:creationId xmlns:p14="http://schemas.microsoft.com/office/powerpoint/2010/main" val="2089123374"/>
       </p:ext>
     </p:extLst>
   </p:cSld>
@@ -2943,7 +5779,7 @@
           <a:p>
             <a:fld id="{B771416A-4FA2-4BC6-AD02-FC62E2EB537B}" type="datetime1">
               <a:rPr lang="en-US" smtClean="0"/>
-              <a:t>11/5/2025</a:t>
+              <a:t>11/6/2025</a:t>
             </a:fld>
             <a:endParaRPr lang="en-US"/>
           </a:p>
@@ -3147,7 +5983,7 @@
           <a:p>
             <a:fld id="{9EF292BF-94B3-474B-98F9-2D896A24DDFC}" type="datetime1">
               <a:rPr lang="en-US" smtClean="0"/>
-              <a:t>11/5/2025</a:t>
+              <a:t>11/6/2025</a:t>
             </a:fld>
             <a:endParaRPr lang="en-US"/>
           </a:p>
@@ -3418,7 +6254,7 @@
           <a:p>
             <a:fld id="{7E18DB4A-8810-4A10-AD5C-D5E2C667F5B3}" type="datetime1">
               <a:rPr lang="en-US" smtClean="0"/>
-              <a:t>11/5/2025</a:t>
+              <a:t>11/6/2025</a:t>
             </a:fld>
             <a:endParaRPr lang="en-US" dirty="0"/>
           </a:p>
@@ -3610,7 +6446,7 @@
           <a:p>
             <a:fld id="{2CED4963-E985-44C4-B8C4-FDD613B7C2F8}" type="datetime1">
               <a:rPr lang="en-US" smtClean="0"/>
-              <a:t>11/5/2025</a:t>
+              <a:t>11/6/2025</a:t>
             </a:fld>
             <a:endParaRPr lang="en-US" dirty="0"/>
           </a:p>
@@ -3972,7 +6808,7 @@
           <a:p>
             <a:fld id="{ED291B17-9318-49DB-B28B-6E5994AE9581}" type="datetime1">
               <a:rPr lang="en-US" smtClean="0"/>
-              <a:t>11/5/2025</a:t>
+              <a:t>11/6/2025</a:t>
             </a:fld>
             <a:endParaRPr lang="en-US" dirty="0"/>
           </a:p>
@@ -4346,7 +7182,7 @@
           <a:p>
             <a:fld id="{D91C2DFC-9303-4BEF-B96E-CC54239EDA10}" type="datetime1">
               <a:rPr lang="en-US" smtClean="0"/>
-              <a:t>11/5/2025</a:t>
+              <a:t>11/6/2025</a:t>
             </a:fld>
             <a:endParaRPr lang="en-US"/>
           </a:p>
@@ -4665,7 +7501,7 @@
           <a:p>
             <a:fld id="{B771416A-4FA2-4BC6-AD02-FC62E2EB537B}" type="datetime1">
               <a:rPr lang="en-US" smtClean="0"/>
-              <a:t>11/5/2025</a:t>
+              <a:t>11/6/2025</a:t>
             </a:fld>
             <a:endParaRPr lang="en-US"/>
           </a:p>
@@ -4864,7 +7700,7 @@
           <a:p>
             <a:fld id="{A53E52A6-65E0-4C57-A17E-B64EB7F24D27}" type="datetime1">
               <a:rPr lang="en-US" smtClean="0"/>
-              <a:t>11/5/2025</a:t>
+              <a:t>11/6/2025</a:t>
             </a:fld>
             <a:endParaRPr lang="en-US"/>
           </a:p>
@@ -5177,7 +8013,7 @@
           <a:p>
             <a:fld id="{1F2C58D2-10B7-49F3-895D-A16367B13E92}" type="datetime1">
               <a:rPr lang="en-US" smtClean="0"/>
-              <a:t>11/5/2025</a:t>
+              <a:t>11/6/2025</a:t>
             </a:fld>
             <a:endParaRPr lang="en-US"/>
           </a:p>
@@ -5431,7 +8267,7 @@
           <a:p>
             <a:fld id="{3B7CCCB0-43DA-4C40-A467-5973D43A0338}" type="datetime1">
               <a:rPr lang="en-US" smtClean="0"/>
-              <a:t>11/5/2025</a:t>
+              <a:t>11/6/2025</a:t>
             </a:fld>
             <a:endParaRPr lang="en-US"/>
           </a:p>
@@ -5854,7 +8690,7 @@
           <a:p>
             <a:fld id="{2C530106-BE81-4E5A-8C39-9A8985CECEF3}" type="datetime1">
               <a:rPr lang="en-US" smtClean="0"/>
-              <a:t>11/5/2025</a:t>
+              <a:t>11/6/2025</a:t>
             </a:fld>
             <a:endParaRPr lang="en-US"/>
           </a:p>
@@ -5978,7 +8814,7 @@
           <a:p>
             <a:fld id="{6972FD10-9497-4827-ABB9-9E3B94BED0E4}" type="datetime1">
               <a:rPr lang="en-US" smtClean="0"/>
-              <a:t>11/5/2025</a:t>
+              <a:t>11/6/2025</a:t>
             </a:fld>
             <a:endParaRPr lang="en-US"/>
           </a:p>
@@ -6074,7 +8910,7 @@
           <a:p>
             <a:fld id="{28E234C3-F188-4E3A-83B9-0CEFC6429E06}" type="datetime1">
               <a:rPr lang="en-US" smtClean="0"/>
-              <a:t>11/5/2025</a:t>
+              <a:t>11/6/2025</a:t>
             </a:fld>
             <a:endParaRPr lang="en-US"/>
           </a:p>
@@ -6452,7 +9288,7 @@
           <a:p>
             <a:fld id="{341BD1F2-20F1-4F40-8112-EC494B61E001}" type="datetime1">
               <a:rPr lang="en-US" smtClean="0"/>
-              <a:t>11/5/2025</a:t>
+              <a:t>11/6/2025</a:t>
             </a:fld>
             <a:endParaRPr lang="en-US"/>
           </a:p>
@@ -6661,7 +9497,7 @@
           <a:p>
             <a:fld id="{A53E52A6-65E0-4C57-A17E-B64EB7F24D27}" type="datetime1">
               <a:rPr lang="en-US" smtClean="0"/>
-              <a:t>11/5/2025</a:t>
+              <a:t>11/6/2025</a:t>
             </a:fld>
             <a:endParaRPr lang="en-US"/>
           </a:p>
@@ -6944,7 +9780,7 @@
           <a:p>
             <a:fld id="{EF39F1AC-95A0-41C9-932F-34509B8DC8E9}" type="datetime1">
               <a:rPr lang="en-US" smtClean="0"/>
-              <a:t>11/5/2025</a:t>
+              <a:t>11/6/2025</a:t>
             </a:fld>
             <a:endParaRPr lang="en-US"/>
           </a:p>
@@ -7136,7 +9972,7 @@
           <a:p>
             <a:fld id="{9EF292BF-94B3-474B-98F9-2D896A24DDFC}" type="datetime1">
               <a:rPr lang="en-US" smtClean="0"/>
-              <a:t>11/5/2025</a:t>
+              <a:t>11/6/2025</a:t>
             </a:fld>
             <a:endParaRPr lang="en-US"/>
           </a:p>
@@ -7499,7 +10335,7 @@
           <a:p>
             <a:fld id="{D91C2DFC-9303-4BEF-B96E-CC54239EDA10}" type="datetime1">
               <a:rPr lang="en-US" smtClean="0"/>
-              <a:t>11/5/2025</a:t>
+              <a:t>11/6/2025</a:t>
             </a:fld>
             <a:endParaRPr lang="en-US"/>
           </a:p>
@@ -7818,7 +10654,7 @@
           <a:p>
             <a:fld id="{A0B820CE-B148-45DC-B1F4-C6D7A412B18C}" type="datetime1">
               <a:rPr lang="en-US" smtClean="0"/>
-              <a:t>11/5/2025</a:t>
+              <a:t>11/6/2025</a:t>
             </a:fld>
             <a:endParaRPr lang="en-US"/>
           </a:p>
@@ -8017,7 +10853,7 @@
           <a:p>
             <a:fld id="{76217A2D-4697-45F9-B456-6F41C271EA23}" type="datetime1">
               <a:rPr lang="en-US" smtClean="0"/>
-              <a:t>11/5/2025</a:t>
+              <a:t>11/6/2025</a:t>
             </a:fld>
             <a:endParaRPr lang="en-US"/>
           </a:p>
@@ -8330,7 +11166,7 @@
           <a:p>
             <a:fld id="{B72275FA-1176-482D-89DB-1BECA8A9E900}" type="datetime1">
               <a:rPr lang="en-US" smtClean="0"/>
-              <a:t>11/5/2025</a:t>
+              <a:t>11/6/2025</a:t>
             </a:fld>
             <a:endParaRPr lang="en-US"/>
           </a:p>
@@ -8584,7 +11420,7 @@
           <a:p>
             <a:fld id="{B489F1B3-7391-4D9B-BF55-8F9F90900E0F}" type="datetime1">
               <a:rPr lang="en-US" smtClean="0"/>
-              <a:t>11/5/2025</a:t>
+              <a:t>11/6/2025</a:t>
             </a:fld>
             <a:endParaRPr lang="en-US"/>
           </a:p>
@@ -9007,7 +11843,7 @@
           <a:p>
             <a:fld id="{3193EC4F-A052-40F8-9DD4-466F1C40115C}" type="datetime1">
               <a:rPr lang="en-US" smtClean="0"/>
-              <a:t>11/5/2025</a:t>
+              <a:t>11/6/2025</a:t>
             </a:fld>
             <a:endParaRPr lang="en-US"/>
           </a:p>
@@ -9131,7 +11967,7 @@
           <a:p>
             <a:fld id="{274D10B7-D3C1-4214-BDCA-01BBB3DB90F8}" type="datetime1">
               <a:rPr lang="en-US" smtClean="0"/>
-              <a:t>11/5/2025</a:t>
+              <a:t>11/6/2025</a:t>
             </a:fld>
             <a:endParaRPr lang="en-US"/>
           </a:p>
@@ -9227,7 +12063,7 @@
           <a:p>
             <a:fld id="{AE0670BA-1561-4CCE-8764-4C8B3832F4FB}" type="datetime1">
               <a:rPr lang="en-US" smtClean="0"/>
-              <a:t>11/5/2025</a:t>
+              <a:t>11/6/2025</a:t>
             </a:fld>
             <a:endParaRPr lang="en-US"/>
           </a:p>
@@ -9528,7 +12364,7 @@
           <a:p>
             <a:fld id="{1F2C58D2-10B7-49F3-895D-A16367B13E92}" type="datetime1">
               <a:rPr lang="en-US" smtClean="0"/>
-              <a:t>11/5/2025</a:t>
+              <a:t>11/6/2025</a:t>
             </a:fld>
             <a:endParaRPr lang="en-US"/>
           </a:p>
@@ -9918,7 +12754,7 @@
           <a:p>
             <a:fld id="{A488E77D-1EBC-4F57-BD58-E22A435F61EA}" type="datetime1">
               <a:rPr lang="en-US" smtClean="0"/>
-              <a:t>11/5/2025</a:t>
+              <a:t>11/6/2025</a:t>
             </a:fld>
             <a:endParaRPr lang="en-US"/>
           </a:p>
@@ -10211,7 +13047,7 @@
           <a:p>
             <a:fld id="{B86176DD-5979-40E1-A68A-A63D9FD6A3EA}" type="datetime1">
               <a:rPr lang="en-US" smtClean="0"/>
-              <a:t>11/5/2025</a:t>
+              <a:t>11/6/2025</a:t>
             </a:fld>
             <a:endParaRPr lang="en-US"/>
           </a:p>
@@ -10403,7 +13239,7 @@
           <a:p>
             <a:fld id="{8C987901-C162-4F42-BC7D-9497877AE2BA}" type="datetime1">
               <a:rPr lang="en-US" smtClean="0"/>
-              <a:t>11/5/2025</a:t>
+              <a:t>11/6/2025</a:t>
             </a:fld>
             <a:endParaRPr lang="en-US"/>
           </a:p>
@@ -10766,7 +13602,7 @@
           <a:p>
             <a:fld id="{3AAF78D1-5DF2-46C5-87F7-8CCF7159B52F}" type="datetime1">
               <a:rPr lang="en-US" smtClean="0"/>
-              <a:t>11/5/2025</a:t>
+              <a:t>11/6/2025</a:t>
             </a:fld>
             <a:endParaRPr lang="en-US"/>
           </a:p>
@@ -11078,7 +13914,7 @@
           <a:p>
             <a:fld id="{06A0FD2F-556E-43A6-BD1A-AE05D71D5ACE}" type="datetime1">
               <a:rPr lang="en-US" smtClean="0"/>
-              <a:t>11/5/2025</a:t>
+              <a:t>11/6/2025</a:t>
             </a:fld>
             <a:endParaRPr lang="en-US"/>
           </a:p>
@@ -11277,7 +14113,7 @@
           <a:p>
             <a:fld id="{C4CA2D96-DD5E-4EE6-BA39-19B5C56AF1F2}" type="datetime1">
               <a:rPr lang="en-US" smtClean="0"/>
-              <a:t>11/5/2025</a:t>
+              <a:t>11/6/2025</a:t>
             </a:fld>
             <a:endParaRPr lang="en-US"/>
           </a:p>
@@ -11590,7 +14426,7 @@
           <a:p>
             <a:fld id="{2C2D4BC3-0B93-4E0B-AE53-3E432262C0E4}" type="datetime1">
               <a:rPr lang="en-US" smtClean="0"/>
-              <a:t>11/5/2025</a:t>
+              <a:t>11/6/2025</a:t>
             </a:fld>
             <a:endParaRPr lang="en-US"/>
           </a:p>
@@ -11844,7 +14680,7 @@
           <a:p>
             <a:fld id="{A5CEA080-6A29-4A4D-90B1-4C73660CABD5}" type="datetime1">
               <a:rPr lang="en-US" smtClean="0"/>
-              <a:t>11/5/2025</a:t>
+              <a:t>11/6/2025</a:t>
             </a:fld>
             <a:endParaRPr lang="en-US"/>
           </a:p>
@@ -12267,7 +15103,7 @@
           <a:p>
             <a:fld id="{4EFF1D62-0785-460A-9888-5F5908AD45F7}" type="datetime1">
               <a:rPr lang="en-US" smtClean="0"/>
-              <a:t>11/5/2025</a:t>
+              <a:t>11/6/2025</a:t>
             </a:fld>
             <a:endParaRPr lang="en-US"/>
           </a:p>
@@ -12391,7 +15227,7 @@
           <a:p>
             <a:fld id="{4603F5A6-4790-4338-AC59-416730A16F3C}" type="datetime1">
               <a:rPr lang="en-US" smtClean="0"/>
-              <a:t>11/5/2025</a:t>
+              <a:t>11/6/2025</a:t>
             </a:fld>
             <a:endParaRPr lang="en-US"/>
           </a:p>
@@ -12633,7 +15469,7 @@
           <a:p>
             <a:fld id="{3B7CCCB0-43DA-4C40-A467-5973D43A0338}" type="datetime1">
               <a:rPr lang="en-US" smtClean="0"/>
-              <a:t>11/5/2025</a:t>
+              <a:t>11/6/2025</a:t>
             </a:fld>
             <a:endParaRPr lang="en-US"/>
           </a:p>
@@ -12729,7 +15565,7 @@
           <a:p>
             <a:fld id="{FAF331C8-E8D8-438B-B699-9ACE625F3A09}" type="datetime1">
               <a:rPr lang="en-US" smtClean="0"/>
-              <a:t>11/5/2025</a:t>
+              <a:t>11/6/2025</a:t>
             </a:fld>
             <a:endParaRPr lang="en-US"/>
           </a:p>
@@ -13107,7 +15943,7 @@
           <a:p>
             <a:fld id="{610C12D3-F429-42CB-9467-4C3AFEEA173C}" type="datetime1">
               <a:rPr lang="en-US" smtClean="0"/>
-              <a:t>11/5/2025</a:t>
+              <a:t>11/6/2025</a:t>
             </a:fld>
             <a:endParaRPr lang="en-US"/>
           </a:p>
@@ -13400,7 +16236,7 @@
           <a:p>
             <a:fld id="{283F426E-E29E-4D2E-B32D-412D98F7FC2F}" type="datetime1">
               <a:rPr lang="en-US" smtClean="0"/>
-              <a:t>11/5/2025</a:t>
+              <a:t>11/6/2025</a:t>
             </a:fld>
             <a:endParaRPr lang="en-US"/>
           </a:p>
@@ -13592,7 +16428,7 @@
           <a:p>
             <a:fld id="{A0F15864-78C5-4237-8A12-0D1FD4E5F0BD}" type="datetime1">
               <a:rPr lang="en-US" smtClean="0"/>
-              <a:t>11/5/2025</a:t>
+              <a:t>11/6/2025</a:t>
             </a:fld>
             <a:endParaRPr lang="en-US"/>
           </a:p>
@@ -13955,7 +16791,7 @@
           <a:p>
             <a:fld id="{AB9BBA17-EAD5-43A8-9481-F99B1E8564DB}" type="datetime1">
               <a:rPr lang="en-US" smtClean="0"/>
-              <a:t>11/5/2025</a:t>
+              <a:t>11/6/2025</a:t>
             </a:fld>
             <a:endParaRPr lang="en-US"/>
           </a:p>
@@ -14267,7 +17103,7 @@
           <a:p>
             <a:fld id="{C6B0FEA4-C6CA-4262-94C7-989766AA3A47}" type="datetime1">
               <a:rPr lang="en-US" smtClean="0"/>
-              <a:t>11/5/2025</a:t>
+              <a:t>11/6/2025</a:t>
             </a:fld>
             <a:endParaRPr lang="en-US"/>
           </a:p>
@@ -14466,7 +17302,7 @@
           <a:p>
             <a:fld id="{6F65A5F7-BE7B-4360-B821-FCDB8E9197AC}" type="datetime1">
               <a:rPr lang="en-US" smtClean="0"/>
-              <a:t>11/5/2025</a:t>
+              <a:t>11/6/2025</a:t>
             </a:fld>
             <a:endParaRPr lang="en-US"/>
           </a:p>
@@ -14779,7 +17615,7 @@
           <a:p>
             <a:fld id="{6145D492-0F60-495A-BAAC-3C877C1D64A2}" type="datetime1">
               <a:rPr lang="en-US" smtClean="0"/>
-              <a:t>11/5/2025</a:t>
+              <a:t>11/6/2025</a:t>
             </a:fld>
             <a:endParaRPr lang="en-US"/>
           </a:p>
@@ -15033,7 +17869,7 @@
           <a:p>
             <a:fld id="{4A322FED-C97B-4E3C-B05B-1278829CCA0F}" type="datetime1">
               <a:rPr lang="en-US" smtClean="0"/>
-              <a:t>11/5/2025</a:t>
+              <a:t>11/6/2025</a:t>
             </a:fld>
             <a:endParaRPr lang="en-US"/>
           </a:p>
@@ -15456,7 +18292,7 @@
           <a:p>
             <a:fld id="{1BBF91E7-DD27-45EE-9FAC-A58839C2E3FB}" type="datetime1">
               <a:rPr lang="en-US" smtClean="0"/>
-              <a:t>11/5/2025</a:t>
+              <a:t>11/6/2025</a:t>
             </a:fld>
             <a:endParaRPr lang="en-US"/>
           </a:p>
@@ -15879,7 +18715,7 @@
           <a:p>
             <a:fld id="{2C530106-BE81-4E5A-8C39-9A8985CECEF3}" type="datetime1">
               <a:rPr lang="en-US" smtClean="0"/>
-              <a:t>11/5/2025</a:t>
+              <a:t>11/6/2025</a:t>
             </a:fld>
             <a:endParaRPr lang="en-US"/>
           </a:p>
@@ -16003,7 +18839,7 @@
           <a:p>
             <a:fld id="{470DB943-D34E-498D-BB5B-1BC0D01A4C3C}" type="datetime1">
               <a:rPr lang="en-US" smtClean="0"/>
-              <a:t>11/5/2025</a:t>
+              <a:t>11/6/2025</a:t>
             </a:fld>
             <a:endParaRPr lang="en-US"/>
           </a:p>
@@ -16099,7 +18935,7 @@
           <a:p>
             <a:fld id="{0EF88AC7-A362-47DE-B037-3A7E785BA73D}" type="datetime1">
               <a:rPr lang="en-US" smtClean="0"/>
-              <a:t>11/5/2025</a:t>
+              <a:t>11/6/2025</a:t>
             </a:fld>
             <a:endParaRPr lang="en-US"/>
           </a:p>
@@ -16477,7 +19313,7 @@
           <a:p>
             <a:fld id="{1E09BAED-B7FC-4220-8037-60663F890984}" type="datetime1">
               <a:rPr lang="en-US" smtClean="0"/>
-              <a:t>11/5/2025</a:t>
+              <a:t>11/6/2025</a:t>
             </a:fld>
             <a:endParaRPr lang="en-US"/>
           </a:p>
@@ -16770,7 +19606,7 @@
           <a:p>
             <a:fld id="{BB3C0B96-D43B-410F-A514-3967CACDF6C4}" type="datetime1">
               <a:rPr lang="en-US" smtClean="0"/>
-              <a:t>11/5/2025</a:t>
+              <a:t>11/6/2025</a:t>
             </a:fld>
             <a:endParaRPr lang="en-US"/>
           </a:p>
@@ -16962,7 +19798,7 @@
           <a:p>
             <a:fld id="{C63DFB46-027F-4778-8182-714012A6E051}" type="datetime1">
               <a:rPr lang="en-US" smtClean="0"/>
-              <a:t>11/5/2025</a:t>
+              <a:t>11/6/2025</a:t>
             </a:fld>
             <a:endParaRPr lang="en-US"/>
           </a:p>
@@ -17325,7 +20161,7 @@
           <a:p>
             <a:fld id="{770FD05A-9631-4BEE-9AA4-5575ADA850E9}" type="datetime1">
               <a:rPr lang="en-US" smtClean="0"/>
-              <a:t>11/5/2025</a:t>
+              <a:t>11/6/2025</a:t>
             </a:fld>
             <a:endParaRPr lang="en-US"/>
           </a:p>
@@ -17637,7 +20473,7 @@
           <a:p>
             <a:fld id="{ED291B17-9318-49DB-B28B-6E5994AE9581}" type="datetime1">
               <a:rPr lang="en-US" smtClean="0"/>
-              <a:t>11/5/2025</a:t>
+              <a:t>11/6/2025</a:t>
             </a:fld>
             <a:endParaRPr lang="en-US" dirty="0"/>
           </a:p>
@@ -17835,7 +20671,7 @@
           <a:p>
             <a:fld id="{78DD82B9-B8EE-4375-B6FF-88FA6ABB15D9}" type="datetime1">
               <a:rPr lang="en-US" smtClean="0"/>
-              <a:t>11/5/2025</a:t>
+              <a:t>11/6/2025</a:t>
             </a:fld>
             <a:endParaRPr lang="en-US" dirty="0"/>
           </a:p>
@@ -18147,7 +20983,7 @@
           <a:p>
             <a:fld id="{B2497495-0637-405E-AE64-5CC7506D51F5}" type="datetime1">
               <a:rPr lang="en-US" smtClean="0"/>
-              <a:t>11/5/2025</a:t>
+              <a:t>11/6/2025</a:t>
             </a:fld>
             <a:endParaRPr lang="en-US" dirty="0"/>
           </a:p>
@@ -18400,7 +21236,7 @@
           <a:p>
             <a:fld id="{7BFFD690-9426-415D-8B65-26881E07B2D4}" type="datetime1">
               <a:rPr lang="en-US" smtClean="0"/>
-              <a:t>11/5/2025</a:t>
+              <a:t>11/6/2025</a:t>
             </a:fld>
             <a:endParaRPr lang="en-US" dirty="0"/>
           </a:p>
@@ -18523,7 +21359,7 @@
           <a:p>
             <a:fld id="{6972FD10-9497-4827-ABB9-9E3B94BED0E4}" type="datetime1">
               <a:rPr lang="en-US" smtClean="0"/>
-              <a:t>11/5/2025</a:t>
+              <a:t>11/6/2025</a:t>
             </a:fld>
             <a:endParaRPr lang="en-US"/>
           </a:p>
@@ -18946,7 +21782,7 @@
           <a:p>
             <a:fld id="{04C4989A-474C-40DE-95B9-011C28B71673}" type="datetime1">
               <a:rPr lang="en-US" smtClean="0"/>
-              <a:t>11/5/2025</a:t>
+              <a:t>11/6/2025</a:t>
             </a:fld>
             <a:endParaRPr lang="en-US" dirty="0"/>
           </a:p>
@@ -19069,7 +21905,7 @@
           <a:p>
             <a:fld id="{5DB4ED54-5B5E-4A04-93D3-5772E3CE3818}" type="datetime1">
               <a:rPr lang="en-US" smtClean="0"/>
-              <a:t>11/5/2025</a:t>
+              <a:t>11/6/2025</a:t>
             </a:fld>
             <a:endParaRPr lang="en-US" dirty="0"/>
           </a:p>
@@ -19164,7 +22000,7 @@
           <a:p>
             <a:fld id="{4EDE50D6-574B-40AF-946F-D52A04ADE379}" type="datetime1">
               <a:rPr lang="en-US" smtClean="0"/>
-              <a:t>11/5/2025</a:t>
+              <a:t>11/6/2025</a:t>
             </a:fld>
             <a:endParaRPr lang="en-US" dirty="0"/>
           </a:p>
@@ -19541,7 +22377,7 @@
           <a:p>
             <a:fld id="{D82884F1-FFEA-405F-9602-3DCA865EDA4E}" type="datetime1">
               <a:rPr lang="en-US" smtClean="0"/>
-              <a:t>11/5/2025</a:t>
+              <a:t>11/6/2025</a:t>
             </a:fld>
             <a:endParaRPr lang="en-US" dirty="0"/>
           </a:p>
@@ -19834,7 +22670,7 @@
           <a:p>
             <a:fld id="{7E18DB4A-8810-4A10-AD5C-D5E2C667F5B3}" type="datetime1">
               <a:rPr lang="en-US" smtClean="0"/>
-              <a:t>11/5/2025</a:t>
+              <a:t>11/6/2025</a:t>
             </a:fld>
             <a:endParaRPr lang="en-US" dirty="0"/>
           </a:p>
@@ -20026,7 +22862,7 @@
           <a:p>
             <a:fld id="{2CED4963-E985-44C4-B8C4-FDD613B7C2F8}" type="datetime1">
               <a:rPr lang="en-US" smtClean="0"/>
-              <a:t>11/5/2025</a:t>
+              <a:t>11/6/2025</a:t>
             </a:fld>
             <a:endParaRPr lang="en-US" dirty="0"/>
           </a:p>
@@ -20388,7 +23224,7 @@
           <a:p>
             <a:fld id="{ED291B17-9318-49DB-B28B-6E5994AE9581}" type="datetime1">
               <a:rPr lang="en-US" smtClean="0"/>
-              <a:t>11/5/2025</a:t>
+              <a:t>11/6/2025</a:t>
             </a:fld>
             <a:endParaRPr lang="en-US" dirty="0"/>
           </a:p>
@@ -20868,7 +23704,7 @@
           <a:p>
             <a:fld id="{ED291B17-9318-49DB-B28B-6E5994AE9581}" type="datetime1">
               <a:rPr lang="en-US" smtClean="0"/>
-              <a:t>11/5/2025</a:t>
+              <a:t>11/6/2025</a:t>
             </a:fld>
             <a:endParaRPr lang="en-US" dirty="0"/>
           </a:p>
@@ -21066,7 +23902,7 @@
           <a:p>
             <a:fld id="{78DD82B9-B8EE-4375-B6FF-88FA6ABB15D9}" type="datetime1">
               <a:rPr lang="en-US" smtClean="0"/>
-              <a:t>11/5/2025</a:t>
+              <a:t>11/6/2025</a:t>
             </a:fld>
             <a:endParaRPr lang="en-US" dirty="0"/>
           </a:p>
@@ -21173,7 +24009,7 @@
           <a:p>
             <a:fld id="{28E234C3-F188-4E3A-83B9-0CEFC6429E06}" type="datetime1">
               <a:rPr lang="en-US" smtClean="0"/>
-              <a:t>11/5/2025</a:t>
+              <a:t>11/6/2025</a:t>
             </a:fld>
             <a:endParaRPr lang="en-US"/>
           </a:p>
@@ -21474,7 +24310,7 @@
           <a:p>
             <a:fld id="{B2497495-0637-405E-AE64-5CC7506D51F5}" type="datetime1">
               <a:rPr lang="en-US" smtClean="0"/>
-              <a:t>11/5/2025</a:t>
+              <a:t>11/6/2025</a:t>
             </a:fld>
             <a:endParaRPr lang="en-US" dirty="0"/>
           </a:p>
@@ -21727,7 +24563,7 @@
           <a:p>
             <a:fld id="{7BFFD690-9426-415D-8B65-26881E07B2D4}" type="datetime1">
               <a:rPr lang="en-US" smtClean="0"/>
-              <a:t>11/5/2025</a:t>
+              <a:t>11/6/2025</a:t>
             </a:fld>
             <a:endParaRPr lang="en-US" dirty="0"/>
           </a:p>
@@ -22149,7 +24985,7 @@
           <a:p>
             <a:fld id="{04C4989A-474C-40DE-95B9-011C28B71673}" type="datetime1">
               <a:rPr lang="en-US" smtClean="0"/>
-              <a:t>11/5/2025</a:t>
+              <a:t>11/6/2025</a:t>
             </a:fld>
             <a:endParaRPr lang="en-US" dirty="0"/>
           </a:p>
@@ -22272,7 +25108,7 @@
           <a:p>
             <a:fld id="{5DB4ED54-5B5E-4A04-93D3-5772E3CE3818}" type="datetime1">
               <a:rPr lang="en-US" smtClean="0"/>
-              <a:t>11/5/2025</a:t>
+              <a:t>11/6/2025</a:t>
             </a:fld>
             <a:endParaRPr lang="en-US" dirty="0"/>
           </a:p>
@@ -22367,7 +25203,7 @@
           <a:p>
             <a:fld id="{4EDE50D6-574B-40AF-946F-D52A04ADE379}" type="datetime1">
               <a:rPr lang="en-US" smtClean="0"/>
-              <a:t>11/5/2025</a:t>
+              <a:t>11/6/2025</a:t>
             </a:fld>
             <a:endParaRPr lang="en-US" dirty="0"/>
           </a:p>
@@ -22744,7 +25580,7 @@
           <a:p>
             <a:fld id="{D82884F1-FFEA-405F-9602-3DCA865EDA4E}" type="datetime1">
               <a:rPr lang="en-US" smtClean="0"/>
-              <a:t>11/5/2025</a:t>
+              <a:t>11/6/2025</a:t>
             </a:fld>
             <a:endParaRPr lang="en-US" dirty="0"/>
           </a:p>
@@ -23037,7 +25873,7 @@
           <a:p>
             <a:fld id="{7E18DB4A-8810-4A10-AD5C-D5E2C667F5B3}" type="datetime1">
               <a:rPr lang="en-US" smtClean="0"/>
-              <a:t>11/5/2025</a:t>
+              <a:t>11/6/2025</a:t>
             </a:fld>
             <a:endParaRPr lang="en-US" dirty="0"/>
           </a:p>
@@ -23229,7 +26065,7 @@
           <a:p>
             <a:fld id="{2CED4963-E985-44C4-B8C4-FDD613B7C2F8}" type="datetime1">
               <a:rPr lang="en-US" smtClean="0"/>
-              <a:t>11/5/2025</a:t>
+              <a:t>11/6/2025</a:t>
             </a:fld>
             <a:endParaRPr lang="en-US" dirty="0"/>
           </a:p>
@@ -23591,7 +26427,7 @@
           <a:p>
             <a:fld id="{ED291B17-9318-49DB-B28B-6E5994AE9581}" type="datetime1">
               <a:rPr lang="en-US" smtClean="0"/>
-              <a:t>11/5/2025</a:t>
+              <a:t>11/6/2025</a:t>
             </a:fld>
             <a:endParaRPr lang="en-US" dirty="0"/>
           </a:p>
@@ -24149,7 +26985,7 @@
           <a:p>
             <a:fld id="{341BD1F2-20F1-4F40-8112-EC494B61E001}" type="datetime1">
               <a:rPr lang="en-US" smtClean="0"/>
-              <a:t>11/5/2025</a:t>
+              <a:t>11/6/2025</a:t>
             </a:fld>
             <a:endParaRPr lang="en-US"/>
           </a:p>
@@ -24471,7 +27307,7 @@
           <a:p>
             <a:fld id="{ED291B17-9318-49DB-B28B-6E5994AE9581}" type="datetime1">
               <a:rPr lang="en-US" smtClean="0"/>
-              <a:t>11/5/2025</a:t>
+              <a:t>11/6/2025</a:t>
             </a:fld>
             <a:endParaRPr lang="en-US" dirty="0"/>
           </a:p>
@@ -24669,7 +27505,7 @@
           <a:p>
             <a:fld id="{78DD82B9-B8EE-4375-B6FF-88FA6ABB15D9}" type="datetime1">
               <a:rPr lang="en-US" smtClean="0"/>
-              <a:t>11/5/2025</a:t>
+              <a:t>11/6/2025</a:t>
             </a:fld>
             <a:endParaRPr lang="en-US" dirty="0"/>
           </a:p>
@@ -24981,7 +27817,7 @@
           <a:p>
             <a:fld id="{B2497495-0637-405E-AE64-5CC7506D51F5}" type="datetime1">
               <a:rPr lang="en-US" smtClean="0"/>
-              <a:t>11/5/2025</a:t>
+              <a:t>11/6/2025</a:t>
             </a:fld>
             <a:endParaRPr lang="en-US" dirty="0"/>
           </a:p>
@@ -25234,7 +28070,7 @@
           <a:p>
             <a:fld id="{7BFFD690-9426-415D-8B65-26881E07B2D4}" type="datetime1">
               <a:rPr lang="en-US" smtClean="0"/>
-              <a:t>11/5/2025</a:t>
+              <a:t>11/6/2025</a:t>
             </a:fld>
             <a:endParaRPr lang="en-US" dirty="0"/>
           </a:p>
@@ -25656,7 +28492,7 @@
           <a:p>
             <a:fld id="{04C4989A-474C-40DE-95B9-011C28B71673}" type="datetime1">
               <a:rPr lang="en-US" smtClean="0"/>
-              <a:t>11/5/2025</a:t>
+              <a:t>11/6/2025</a:t>
             </a:fld>
             <a:endParaRPr lang="en-US" dirty="0"/>
           </a:p>
@@ -25779,7 +28615,7 @@
           <a:p>
             <a:fld id="{5DB4ED54-5B5E-4A04-93D3-5772E3CE3818}" type="datetime1">
               <a:rPr lang="en-US" smtClean="0"/>
-              <a:t>11/5/2025</a:t>
+              <a:t>11/6/2025</a:t>
             </a:fld>
             <a:endParaRPr lang="en-US" dirty="0"/>
           </a:p>
@@ -25874,7 +28710,7 @@
           <a:p>
             <a:fld id="{4EDE50D6-574B-40AF-946F-D52A04ADE379}" type="datetime1">
               <a:rPr lang="en-US" smtClean="0"/>
-              <a:t>11/5/2025</a:t>
+              <a:t>11/6/2025</a:t>
             </a:fld>
             <a:endParaRPr lang="en-US" dirty="0"/>
           </a:p>
@@ -26251,7 +29087,7 @@
           <a:p>
             <a:fld id="{D82884F1-FFEA-405F-9602-3DCA865EDA4E}" type="datetime1">
               <a:rPr lang="en-US" smtClean="0"/>
-              <a:t>11/5/2025</a:t>
+              <a:t>11/6/2025</a:t>
             </a:fld>
             <a:endParaRPr lang="en-US" dirty="0"/>
           </a:p>
@@ -26544,7 +29380,7 @@
           <a:p>
             <a:fld id="{7E18DB4A-8810-4A10-AD5C-D5E2C667F5B3}" type="datetime1">
               <a:rPr lang="en-US" smtClean="0"/>
-              <a:t>11/5/2025</a:t>
+              <a:t>11/6/2025</a:t>
             </a:fld>
             <a:endParaRPr lang="en-US" dirty="0"/>
           </a:p>
@@ -26736,7 +29572,7 @@
           <a:p>
             <a:fld id="{2CED4963-E985-44C4-B8C4-FDD613B7C2F8}" type="datetime1">
               <a:rPr lang="en-US" smtClean="0"/>
-              <a:t>11/5/2025</a:t>
+              <a:t>11/6/2025</a:t>
             </a:fld>
             <a:endParaRPr lang="en-US" dirty="0"/>
           </a:p>
@@ -27006,7 +29842,7 @@
           <a:p>
             <a:fld id="{EF39F1AC-95A0-41C9-932F-34509B8DC8E9}" type="datetime1">
               <a:rPr lang="en-US" smtClean="0"/>
-              <a:t>11/5/2025</a:t>
+              <a:t>11/6/2025</a:t>
             </a:fld>
             <a:endParaRPr lang="en-US"/>
           </a:p>
@@ -27369,7 +30205,7 @@
           <a:p>
             <a:fld id="{ED291B17-9318-49DB-B28B-6E5994AE9581}" type="datetime1">
               <a:rPr lang="en-US" smtClean="0"/>
-              <a:t>11/5/2025</a:t>
+              <a:t>11/6/2025</a:t>
             </a:fld>
             <a:endParaRPr lang="en-US" dirty="0"/>
           </a:p>
@@ -27856,7 +30692,7 @@
           <a:p>
             <a:fld id="{ED291B17-9318-49DB-B28B-6E5994AE9581}" type="datetime1">
               <a:rPr lang="en-US" smtClean="0"/>
-              <a:t>11/5/2025</a:t>
+              <a:t>11/6/2025</a:t>
             </a:fld>
             <a:endParaRPr lang="en-US" dirty="0"/>
           </a:p>
@@ -28052,7 +30888,7 @@
           <a:p>
             <a:fld id="{78DD82B9-B8EE-4375-B6FF-88FA6ABB15D9}" type="datetime1">
               <a:rPr lang="en-US" smtClean="0"/>
-              <a:t>11/5/2025</a:t>
+              <a:t>11/6/2025</a:t>
             </a:fld>
             <a:endParaRPr lang="en-US" dirty="0"/>
           </a:p>
@@ -28363,7 +31199,7 @@
           <a:p>
             <a:fld id="{B2497495-0637-405E-AE64-5CC7506D51F5}" type="datetime1">
               <a:rPr lang="en-US" smtClean="0"/>
-              <a:t>11/5/2025</a:t>
+              <a:t>11/6/2025</a:t>
             </a:fld>
             <a:endParaRPr lang="en-US" dirty="0"/>
           </a:p>
@@ -28614,7 +31450,7 @@
           <a:p>
             <a:fld id="{7BFFD690-9426-415D-8B65-26881E07B2D4}" type="datetime1">
               <a:rPr lang="en-US" smtClean="0"/>
-              <a:t>11/5/2025</a:t>
+              <a:t>11/6/2025</a:t>
             </a:fld>
             <a:endParaRPr lang="en-US" dirty="0"/>
           </a:p>
@@ -29034,7 +31870,7 @@
           <a:p>
             <a:fld id="{04C4989A-474C-40DE-95B9-011C28B71673}" type="datetime1">
               <a:rPr lang="en-US" smtClean="0"/>
-              <a:t>11/5/2025</a:t>
+              <a:t>11/6/2025</a:t>
             </a:fld>
             <a:endParaRPr lang="en-US" dirty="0"/>
           </a:p>
@@ -29157,7 +31993,7 @@
           <a:p>
             <a:fld id="{5DB4ED54-5B5E-4A04-93D3-5772E3CE3818}" type="datetime1">
               <a:rPr lang="en-US" smtClean="0"/>
-              <a:t>11/5/2025</a:t>
+              <a:t>11/6/2025</a:t>
             </a:fld>
             <a:endParaRPr lang="en-US" dirty="0"/>
           </a:p>
@@ -29252,7 +32088,7 @@
           <a:p>
             <a:fld id="{4EDE50D6-574B-40AF-946F-D52A04ADE379}" type="datetime1">
               <a:rPr lang="en-US" smtClean="0"/>
-              <a:t>11/5/2025</a:t>
+              <a:t>11/6/2025</a:t>
             </a:fld>
             <a:endParaRPr lang="en-US" dirty="0"/>
           </a:p>
@@ -29628,7 +32464,7 @@
           <a:p>
             <a:fld id="{D82884F1-FFEA-405F-9602-3DCA865EDA4E}" type="datetime1">
               <a:rPr lang="en-US" smtClean="0"/>
-              <a:t>11/5/2025</a:t>
+              <a:t>11/6/2025</a:t>
             </a:fld>
             <a:endParaRPr lang="en-US" dirty="0"/>
           </a:p>
@@ -29865,7 +32701,7 @@
           <a:p>
             <a:fld id="{4199989E-35DE-44B7-B35E-E0E64E12EC86}" type="datetime1">
               <a:rPr lang="en-US" smtClean="0"/>
-              <a:t>11/5/2025</a:t>
+              <a:t>11/6/2025</a:t>
             </a:fld>
             <a:endParaRPr lang="en-US"/>
           </a:p>
@@ -30667,7 +33503,7 @@
           <a:p>
             <a:fld id="{4199989E-35DE-44B7-B35E-E0E64E12EC86}" type="datetime1">
               <a:rPr lang="en-US" smtClean="0"/>
-              <a:t>11/5/2025</a:t>
+              <a:t>11/6/2025</a:t>
             </a:fld>
             <a:endParaRPr lang="en-US"/>
           </a:p>
@@ -31469,7 +34305,7 @@
           <a:p>
             <a:fld id="{1E2E9440-3DFA-4FE6-8145-2E7243E55A26}" type="datetime1">
               <a:rPr lang="en-US" smtClean="0"/>
-              <a:t>11/5/2025</a:t>
+              <a:t>11/6/2025</a:t>
             </a:fld>
             <a:endParaRPr lang="en-US"/>
           </a:p>
@@ -32271,7 +35107,7 @@
           <a:p>
             <a:fld id="{3E7733A4-5D18-4D09-8F94-45F71EE3C7C2}" type="datetime1">
               <a:rPr lang="en-US" smtClean="0"/>
-              <a:t>11/5/2025</a:t>
+              <a:t>11/6/2025</a:t>
             </a:fld>
             <a:endParaRPr lang="en-US"/>
           </a:p>
@@ -33073,7 +35909,7 @@
           <a:p>
             <a:fld id="{8234BEC2-5A9D-42E1-9C16-1E9F257755B7}" type="datetime1">
               <a:rPr lang="en-US" smtClean="0"/>
-              <a:t>11/5/2025</a:t>
+              <a:t>11/6/2025</a:t>
             </a:fld>
             <a:endParaRPr lang="en-US"/>
           </a:p>
@@ -33875,7 +36711,7 @@
           <a:p>
             <a:fld id="{ED291B17-9318-49DB-B28B-6E5994AE9581}" type="datetime1">
               <a:rPr lang="en-US" smtClean="0"/>
-              <a:t>11/5/2025</a:t>
+              <a:t>11/6/2025</a:t>
             </a:fld>
             <a:endParaRPr lang="en-US" dirty="0"/>
           </a:p>
@@ -34677,7 +37513,7 @@
           <a:p>
             <a:fld id="{ED291B17-9318-49DB-B28B-6E5994AE9581}" type="datetime1">
               <a:rPr lang="en-US" smtClean="0"/>
-              <a:t>11/5/2025</a:t>
+              <a:t>11/6/2025</a:t>
             </a:fld>
             <a:endParaRPr lang="en-US" dirty="0"/>
           </a:p>
@@ -35479,7 +38315,7 @@
           <a:p>
             <a:fld id="{ED291B17-9318-49DB-B28B-6E5994AE9581}" type="datetime1">
               <a:rPr lang="en-US" smtClean="0"/>
-              <a:t>11/5/2025</a:t>
+              <a:t>11/6/2025</a:t>
             </a:fld>
             <a:endParaRPr lang="en-US" dirty="0"/>
           </a:p>
@@ -36281,7 +39117,7 @@
           <a:p>
             <a:fld id="{ED291B17-9318-49DB-B28B-6E5994AE9581}" type="datetime1">
               <a:rPr lang="en-US" smtClean="0"/>
-              <a:t>11/5/2025</a:t>
+              <a:t>11/6/2025</a:t>
             </a:fld>
             <a:endParaRPr lang="en-US" dirty="0"/>
           </a:p>
@@ -41426,58 +44262,24 @@
         </p:nvSpPr>
         <p:spPr>
           <a:xfrm>
-            <a:off x="429832" y="1421097"/>
-            <a:ext cx="7446135" cy="3822666"/>
+            <a:off x="429832" y="1179095"/>
+            <a:ext cx="7446135" cy="4064668"/>
           </a:xfrm>
         </p:spPr>
         <p:txBody>
           <a:bodyPr>
-            <a:normAutofit fontScale="77500" lnSpcReduction="20000"/>
+            <a:normAutofit fontScale="85000" lnSpcReduction="20000"/>
           </a:bodyPr>
           <a:lstStyle/>
           <a:p>
-            <a:pPr fontAlgn="auto">
+            <a:pPr marL="0" indent="0" fontAlgn="auto">
               <a:spcAft>
                 <a:spcPts val="0"/>
               </a:spcAft>
-              <a:buFont typeface="Courier New" panose="02070309020205020404" pitchFamily="49" charset="0"/>
-              <a:buChar char="o"/>
+              <a:buNone/>
               <a:defRPr/>
             </a:pPr>
-            <a:r>
-              <a:rPr lang="en-US" dirty="0"/>
-              <a:t>Variations in street names</a:t>
-            </a:r>
-          </a:p>
-          <a:p>
-            <a:pPr lvl="1">
-              <a:buFont typeface="Wingdings" panose="05000000000000000000" pitchFamily="2" charset="2"/>
-              <a:buChar char="ü"/>
-              <a:defRPr/>
-            </a:pPr>
-            <a:r>
-              <a:rPr lang="en-US" dirty="0"/>
-              <a:t>Fifth Avenue, Fifth Ave. 5</a:t>
-            </a:r>
-            <a:r>
-              <a:rPr lang="en-US" baseline="30000" dirty="0"/>
-              <a:t>th</a:t>
-            </a:r>
-            <a:r>
-              <a:rPr lang="en-US" dirty="0"/>
-              <a:t> AV</a:t>
-            </a:r>
-          </a:p>
-          <a:p>
-            <a:pPr lvl="1">
-              <a:buFont typeface="Wingdings" panose="05000000000000000000" pitchFamily="2" charset="2"/>
-              <a:buChar char="ü"/>
-              <a:defRPr/>
-            </a:pPr>
-            <a:r>
-              <a:rPr lang="en-US" dirty="0"/>
-              <a:t>Saw Mill Run, Route 51</a:t>
-            </a:r>
+            <a:endParaRPr lang="en-US" dirty="0"/>
           </a:p>
           <a:p>
             <a:pPr marL="308610" lvl="1" indent="-308610">
@@ -41803,23 +44605,9 @@
         </p:spPr>
         <p:txBody>
           <a:bodyPr>
-            <a:normAutofit fontScale="70000" lnSpcReduction="20000"/>
+            <a:normAutofit fontScale="77500" lnSpcReduction="20000"/>
           </a:bodyPr>
           <a:lstStyle/>
-          <a:p>
-            <a:pPr fontAlgn="auto">
-              <a:spcAft>
-                <a:spcPts val="0"/>
-              </a:spcAft>
-              <a:buFont typeface="Courier New" panose="02070309020205020404" pitchFamily="49" charset="0"/>
-              <a:buChar char="o"/>
-              <a:defRPr/>
-            </a:pPr>
-            <a:r>
-              <a:rPr lang="en-US" dirty="0"/>
-              <a:t>Clean your data before geocoding</a:t>
-            </a:r>
-          </a:p>
           <a:p>
             <a:pPr marL="308610" lvl="1" indent="-308610">
               <a:buFont typeface="Courier New" panose="02070309020205020404" pitchFamily="49" charset="0"/>
@@ -42910,6 +45698,14 @@
 <file path=ppt/slides/slide27.xml><?xml version="1.0" encoding="utf-8"?>
 <p:sld xmlns:a="http://schemas.openxmlformats.org/drawingml/2006/main" xmlns:r="http://schemas.openxmlformats.org/officeDocument/2006/relationships" xmlns:p="http://schemas.openxmlformats.org/presentationml/2006/main">
   <p:cSld>
+    <p:bg>
+      <p:bgPr>
+        <a:solidFill>
+          <a:schemeClr val="bg1"/>
+        </a:solidFill>
+        <a:effectLst/>
+      </p:bgPr>
+    </p:bg>
     <p:spTree>
       <p:nvGrpSpPr>
         <p:cNvPr id="1" name=""/>
@@ -42926,163 +45722,1387 @@
       </p:grpSpPr>
       <p:sp>
         <p:nvSpPr>
-          <p:cNvPr id="2" name="Rectangle 1"/>
-          <p:cNvSpPr/>
-          <p:nvPr/>
+          <p:cNvPr id="36" name="Rectangle 35">
+            <a:extLst>
+              <a:ext uri="{FF2B5EF4-FFF2-40B4-BE49-F238E27FC236}">
+                <a16:creationId xmlns:a16="http://schemas.microsoft.com/office/drawing/2014/main" id="{DCF4EB5C-ED25-4675-8255-2F5B12CFFCF0}"/>
+              </a:ext>
+              <a:ext uri="{C183D7F6-B498-43B3-948B-1728B52AA6E4}">
+                <adec:decorative xmlns:adec="http://schemas.microsoft.com/office/drawing/2017/decorative" val="1"/>
+              </a:ext>
+            </a:extLst>
+          </p:cNvPr>
+          <p:cNvSpPr>
+            <a:spLocks noGrp="1" noRot="1" noChangeAspect="1" noMove="1" noResize="1" noEditPoints="1" noAdjustHandles="1" noChangeArrowheads="1" noChangeShapeType="1" noTextEdit="1"/>
+          </p:cNvSpPr>
+          <p:nvPr>
+            <p:extLst>
+              <p:ext uri="{386F3935-93C4-4BCD-93E2-E3B085C9AB24}">
+                <p16:designElem xmlns:p16="http://schemas.microsoft.com/office/powerpoint/2015/main" val="1"/>
+              </p:ext>
+            </p:extLst>
+          </p:nvPr>
         </p:nvSpPr>
         <p:spPr>
           <a:xfrm>
-            <a:off x="2471305" y="1325254"/>
-            <a:ext cx="3286989" cy="830997"/>
+            <a:off x="301410" y="565785"/>
+            <a:ext cx="2499741" cy="64123"/>
           </a:xfrm>
           <a:prstGeom prst="rect">
             <a:avLst/>
           </a:prstGeom>
-          <a:noFill/>
+          <a:solidFill>
+            <a:srgbClr val="465359"/>
+          </a:solidFill>
+          <a:ln>
+            <a:noFill/>
+          </a:ln>
+          <a:effectLst/>
         </p:spPr>
-        <p:txBody>
-          <a:bodyPr wrap="none" lIns="82296" tIns="41148" rIns="82296" bIns="41148">
-            <a:spAutoFit/>
-          </a:bodyPr>
-          <a:lstStyle/>
-          <a:p>
-            <a:pPr algn="ctr"/>
-            <a:r>
-              <a:rPr lang="en-US" sz="4860" b="1" spc="180" dirty="0">
-                <a:ln w="29210">
-                  <a:solidFill>
-                    <a:schemeClr val="accent3">
-                      <a:tint val="10000"/>
-                    </a:schemeClr>
-                  </a:solidFill>
-                </a:ln>
-                <a:solidFill>
-                  <a:srgbClr val="008000">
-                    <a:alpha val="50000"/>
-                  </a:srgbClr>
-                </a:solidFill>
-                <a:effectLst>
-                  <a:innerShdw blurRad="50800" dist="50800" dir="8100000">
-                    <a:srgbClr val="7D7D7D">
-                      <a:alpha val="73000"/>
-                    </a:srgbClr>
-                  </a:innerShdw>
-                </a:effectLst>
-              </a:rPr>
-              <a:t>Thank you!</a:t>
-            </a:r>
-          </a:p>
-        </p:txBody>
-      </p:sp>
-      <p:sp>
-        <p:nvSpPr>
-          <p:cNvPr id="3" name="Slide Number Placeholder 2">
+        <p:style>
+          <a:lnRef idx="1">
+            <a:schemeClr val="accent1"/>
+          </a:lnRef>
+          <a:fillRef idx="3">
+            <a:schemeClr val="accent1"/>
+          </a:fillRef>
+          <a:effectRef idx="2">
+            <a:schemeClr val="accent1"/>
+          </a:effectRef>
+          <a:fontRef idx="minor">
+            <a:schemeClr val="lt1"/>
+          </a:fontRef>
+        </p:style>
+        <p:txBody>
+          <a:bodyPr/>
+          <a:lstStyle/>
+          <a:p>
+            <a:pPr marL="0" marR="0" lvl="0" indent="0" algn="l" defTabSz="308610" rtl="0" eaLnBrk="1" fontAlgn="auto" latinLnBrk="0" hangingPunct="1">
+              <a:lnSpc>
+                <a:spcPct val="100000"/>
+              </a:lnSpc>
+              <a:spcBef>
+                <a:spcPts val="0"/>
+              </a:spcBef>
+              <a:spcAft>
+                <a:spcPts val="0"/>
+              </a:spcAft>
+              <a:buClrTx/>
+              <a:buSzTx/>
+              <a:buFontTx/>
+              <a:buNone/>
+              <a:tabLst/>
+              <a:defRPr/>
+            </a:pPr>
+            <a:endParaRPr kumimoji="0" lang="en-US" sz="1215" b="0" i="0" u="none" strike="noStrike" kern="1200" cap="none" spc="0" normalizeH="0" baseline="0" noProof="0">
+              <a:ln>
+                <a:noFill/>
+              </a:ln>
+              <a:solidFill>
+                <a:srgbClr val="FFFFFF"/>
+              </a:solidFill>
+              <a:effectLst/>
+              <a:uLnTx/>
+              <a:uFillTx/>
+              <a:latin typeface="Calibri"/>
+              <a:ea typeface="+mn-ea"/>
+              <a:cs typeface="+mn-cs"/>
+            </a:endParaRPr>
+          </a:p>
+        </p:txBody>
+      </p:sp>
+      <p:sp>
+        <p:nvSpPr>
+          <p:cNvPr id="38" name="Rectangle 37">
             <a:extLst>
               <a:ext uri="{FF2B5EF4-FFF2-40B4-BE49-F238E27FC236}">
-                <a16:creationId xmlns:a16="http://schemas.microsoft.com/office/drawing/2014/main" id="{863C9EAE-E5B7-4784-94CD-D062E17813E3}"/>
+                <a16:creationId xmlns:a16="http://schemas.microsoft.com/office/drawing/2014/main" id="{9514EC6E-A557-42A2-BCDC-3ABFFC5E564D}"/>
+              </a:ext>
+              <a:ext uri="{C183D7F6-B498-43B3-948B-1728B52AA6E4}">
+                <adec:decorative xmlns:adec="http://schemas.microsoft.com/office/drawing/2017/decorative" val="1"/>
               </a:ext>
             </a:extLst>
           </p:cNvPr>
           <p:cNvSpPr>
-            <a:spLocks noGrp="1"/>
-          </p:cNvSpPr>
-          <p:nvPr>
-            <p:ph type="sldNum" sz="quarter" idx="12"/>
-          </p:nvPr>
-        </p:nvSpPr>
-        <p:spPr/>
-        <p:txBody>
-          <a:bodyPr/>
-          <a:lstStyle/>
-          <a:p>
-            <a:fld id="{127DDC20-79C9-9647-820E-6D40A3D210C3}" type="slidenum">
-              <a:rPr lang="en-US" smtClean="0"/>
-              <a:pPr/>
-              <a:t>27</a:t>
-            </a:fld>
-            <a:endParaRPr lang="en-US"/>
-          </a:p>
-        </p:txBody>
-      </p:sp>
-      <p:pic>
-        <p:nvPicPr>
-          <p:cNvPr id="6" name="Picture 5">
-            <a:extLst>
-              <a:ext uri="{FF2B5EF4-FFF2-40B4-BE49-F238E27FC236}">
-                <a16:creationId xmlns:a16="http://schemas.microsoft.com/office/drawing/2014/main" id="{32DE135F-68C6-4911-85BA-92ABB3F9F85C}"/>
-              </a:ext>
-            </a:extLst>
-          </p:cNvPr>
-          <p:cNvPicPr/>
-          <p:nvPr/>
-        </p:nvPicPr>
-        <p:blipFill>
-          <a:blip r:embed="rId3"/>
-          <a:stretch>
-            <a:fillRect/>
-          </a:stretch>
-        </p:blipFill>
+            <a:spLocks noGrp="1" noRot="1" noChangeAspect="1" noMove="1" noResize="1" noEditPoints="1" noAdjustHandles="1" noChangeArrowheads="1" noChangeShapeType="1" noTextEdit="1"/>
+          </p:cNvSpPr>
+          <p:nvPr>
+            <p:extLst>
+              <p:ext uri="{386F3935-93C4-4BCD-93E2-E3B085C9AB24}">
+                <p16:designElem xmlns:p16="http://schemas.microsoft.com/office/powerpoint/2015/main" val="1"/>
+              </p:ext>
+            </p:extLst>
+          </p:nvPr>
+        </p:nvSpPr>
         <p:spPr>
           <a:xfrm>
-            <a:off x="152400" y="4275667"/>
-            <a:ext cx="5915025" cy="758190"/>
+            <a:off x="5428449" y="563384"/>
+            <a:ext cx="2499741" cy="66524"/>
           </a:xfrm>
           <a:prstGeom prst="rect">
             <a:avLst/>
           </a:prstGeom>
-        </p:spPr>
-      </p:pic>
-      <p:cxnSp>
-        <p:nvCxnSpPr>
-          <p:cNvPr id="7" name="Straight Connector 6">
-            <a:extLst>
-              <a:ext uri="{FF2B5EF4-FFF2-40B4-BE49-F238E27FC236}">
-                <a16:creationId xmlns:a16="http://schemas.microsoft.com/office/drawing/2014/main" id="{5ADF13BC-3A5F-4415-94E6-85FAF42998C9}"/>
-              </a:ext>
-            </a:extLst>
-          </p:cNvPr>
-          <p:cNvCxnSpPr/>
-          <p:nvPr/>
-        </p:nvCxnSpPr>
-        <p:spPr>
-          <a:xfrm>
-            <a:off x="152400" y="4182575"/>
-            <a:ext cx="8001000" cy="0"/>
-          </a:xfrm>
-          <a:prstGeom prst="line">
-            <a:avLst/>
-          </a:prstGeom>
+          <a:solidFill>
+            <a:srgbClr val="969FA7"/>
+          </a:solidFill>
           <a:ln>
-            <a:solidFill>
-              <a:schemeClr val="tx1"/>
-            </a:solidFill>
+            <a:noFill/>
           </a:ln>
           <a:effectLst/>
         </p:spPr>
         <p:style>
-          <a:lnRef idx="2">
+          <a:lnRef idx="1">
             <a:schemeClr val="accent1"/>
           </a:lnRef>
-          <a:fillRef idx="0">
+          <a:fillRef idx="3">
             <a:schemeClr val="accent1"/>
           </a:fillRef>
-          <a:effectRef idx="1">
+          <a:effectRef idx="2">
             <a:schemeClr val="accent1"/>
           </a:effectRef>
           <a:fontRef idx="minor">
-            <a:schemeClr val="tx1"/>
+            <a:schemeClr val="lt1"/>
           </a:fontRef>
         </p:style>
-      </p:cxnSp>
+        <p:txBody>
+          <a:bodyPr/>
+          <a:lstStyle/>
+          <a:p>
+            <a:pPr marL="0" marR="0" lvl="0" indent="0" algn="l" defTabSz="308610" rtl="0" eaLnBrk="1" fontAlgn="auto" latinLnBrk="0" hangingPunct="1">
+              <a:lnSpc>
+                <a:spcPct val="100000"/>
+              </a:lnSpc>
+              <a:spcBef>
+                <a:spcPts val="0"/>
+              </a:spcBef>
+              <a:spcAft>
+                <a:spcPts val="0"/>
+              </a:spcAft>
+              <a:buClrTx/>
+              <a:buSzTx/>
+              <a:buFontTx/>
+              <a:buNone/>
+              <a:tabLst/>
+              <a:defRPr/>
+            </a:pPr>
+            <a:endParaRPr kumimoji="0" lang="en-US" sz="1215" b="0" i="0" u="none" strike="noStrike" kern="1200" cap="none" spc="0" normalizeH="0" baseline="0" noProof="0">
+              <a:ln>
+                <a:noFill/>
+              </a:ln>
+              <a:solidFill>
+                <a:srgbClr val="FFFFFF"/>
+              </a:solidFill>
+              <a:effectLst/>
+              <a:uLnTx/>
+              <a:uFillTx/>
+              <a:latin typeface="Calibri"/>
+              <a:ea typeface="+mn-ea"/>
+              <a:cs typeface="+mn-cs"/>
+            </a:endParaRPr>
+          </a:p>
+        </p:txBody>
+      </p:sp>
+      <p:sp>
+        <p:nvSpPr>
+          <p:cNvPr id="40" name="Rectangle 39">
+            <a:extLst>
+              <a:ext uri="{FF2B5EF4-FFF2-40B4-BE49-F238E27FC236}">
+                <a16:creationId xmlns:a16="http://schemas.microsoft.com/office/drawing/2014/main" id="{905482C9-EB42-4BFE-95BF-7FD661F07657}"/>
+              </a:ext>
+              <a:ext uri="{C183D7F6-B498-43B3-948B-1728B52AA6E4}">
+                <adec:decorative xmlns:adec="http://schemas.microsoft.com/office/drawing/2017/decorative" val="1"/>
+              </a:ext>
+            </a:extLst>
+          </p:cNvPr>
+          <p:cNvSpPr>
+            <a:spLocks noGrp="1" noRot="1" noChangeAspect="1" noMove="1" noResize="1" noEditPoints="1" noAdjustHandles="1" noChangeArrowheads="1" noChangeShapeType="1" noTextEdit="1"/>
+          </p:cNvSpPr>
+          <p:nvPr>
+            <p:extLst>
+              <p:ext uri="{386F3935-93C4-4BCD-93E2-E3B085C9AB24}">
+                <p16:designElem xmlns:p16="http://schemas.microsoft.com/office/powerpoint/2015/main" val="1"/>
+              </p:ext>
+            </p:extLst>
+          </p:nvPr>
+        </p:nvSpPr>
+        <p:spPr>
+          <a:xfrm>
+            <a:off x="2863235" y="565785"/>
+            <a:ext cx="2499741" cy="61722"/>
+          </a:xfrm>
+          <a:prstGeom prst="rect">
+            <a:avLst/>
+          </a:prstGeom>
+          <a:solidFill>
+            <a:schemeClr val="accent1"/>
+          </a:solidFill>
+          <a:ln>
+            <a:noFill/>
+          </a:ln>
+          <a:effectLst/>
+        </p:spPr>
+        <p:style>
+          <a:lnRef idx="1">
+            <a:schemeClr val="accent1"/>
+          </a:lnRef>
+          <a:fillRef idx="3">
+            <a:schemeClr val="accent1"/>
+          </a:fillRef>
+          <a:effectRef idx="2">
+            <a:schemeClr val="accent1"/>
+          </a:effectRef>
+          <a:fontRef idx="minor">
+            <a:schemeClr val="lt1"/>
+          </a:fontRef>
+        </p:style>
+        <p:txBody>
+          <a:bodyPr/>
+          <a:lstStyle/>
+          <a:p>
+            <a:pPr marL="0" marR="0" lvl="0" indent="0" algn="l" defTabSz="308610" rtl="0" eaLnBrk="1" fontAlgn="auto" latinLnBrk="0" hangingPunct="1">
+              <a:lnSpc>
+                <a:spcPct val="100000"/>
+              </a:lnSpc>
+              <a:spcBef>
+                <a:spcPts val="0"/>
+              </a:spcBef>
+              <a:spcAft>
+                <a:spcPts val="0"/>
+              </a:spcAft>
+              <a:buClrTx/>
+              <a:buSzTx/>
+              <a:buFontTx/>
+              <a:buNone/>
+              <a:tabLst/>
+              <a:defRPr/>
+            </a:pPr>
+            <a:endParaRPr kumimoji="0" lang="en-US" sz="1215" b="0" i="0" u="none" strike="noStrike" kern="1200" cap="none" spc="0" normalizeH="0" baseline="0" noProof="0">
+              <a:ln>
+                <a:noFill/>
+              </a:ln>
+              <a:solidFill>
+                <a:srgbClr val="FFFFFF"/>
+              </a:solidFill>
+              <a:effectLst/>
+              <a:uLnTx/>
+              <a:uFillTx/>
+              <a:latin typeface="Calibri"/>
+              <a:ea typeface="+mn-ea"/>
+              <a:cs typeface="+mn-cs"/>
+            </a:endParaRPr>
+          </a:p>
+        </p:txBody>
+      </p:sp>
+      <p:sp>
+        <p:nvSpPr>
+          <p:cNvPr id="42" name="Rectangle 41">
+            <a:extLst>
+              <a:ext uri="{FF2B5EF4-FFF2-40B4-BE49-F238E27FC236}">
+                <a16:creationId xmlns:a16="http://schemas.microsoft.com/office/drawing/2014/main" id="{7539E646-A625-4A26-86ED-BD90EDD329F7}"/>
+              </a:ext>
+              <a:ext uri="{C183D7F6-B498-43B3-948B-1728B52AA6E4}">
+                <adec:decorative xmlns:adec="http://schemas.microsoft.com/office/drawing/2017/decorative" val="1"/>
+              </a:ext>
+            </a:extLst>
+          </p:cNvPr>
+          <p:cNvSpPr>
+            <a:spLocks noGrp="1" noRot="1" noChangeAspect="1" noMove="1" noResize="1" noEditPoints="1" noAdjustHandles="1" noChangeArrowheads="1" noChangeShapeType="1" noTextEdit="1"/>
+          </p:cNvSpPr>
+          <p:nvPr>
+            <p:extLst>
+              <p:ext uri="{386F3935-93C4-4BCD-93E2-E3B085C9AB24}">
+                <p16:designElem xmlns:p16="http://schemas.microsoft.com/office/powerpoint/2015/main" val="1"/>
+              </p:ext>
+            </p:extLst>
+          </p:nvPr>
+        </p:nvSpPr>
+        <p:spPr>
+          <a:xfrm>
+            <a:off x="301411" y="2340066"/>
+            <a:ext cx="7626779" cy="2253251"/>
+          </a:xfrm>
+          <a:prstGeom prst="rect">
+            <a:avLst/>
+          </a:prstGeom>
+          <a:solidFill>
+            <a:srgbClr val="465359"/>
+          </a:solidFill>
+          <a:ln>
+            <a:noFill/>
+          </a:ln>
+          <a:effectLst/>
+        </p:spPr>
+        <p:style>
+          <a:lnRef idx="1">
+            <a:schemeClr val="accent1"/>
+          </a:lnRef>
+          <a:fillRef idx="3">
+            <a:schemeClr val="accent1"/>
+          </a:fillRef>
+          <a:effectRef idx="2">
+            <a:schemeClr val="accent1"/>
+          </a:effectRef>
+          <a:fontRef idx="minor">
+            <a:schemeClr val="lt1"/>
+          </a:fontRef>
+        </p:style>
+        <p:txBody>
+          <a:bodyPr/>
+          <a:lstStyle/>
+          <a:p>
+            <a:pPr marL="0" marR="0" lvl="0" indent="0" algn="l" defTabSz="308610" rtl="0" eaLnBrk="1" fontAlgn="auto" latinLnBrk="0" hangingPunct="1">
+              <a:lnSpc>
+                <a:spcPct val="100000"/>
+              </a:lnSpc>
+              <a:spcBef>
+                <a:spcPts val="0"/>
+              </a:spcBef>
+              <a:spcAft>
+                <a:spcPts val="0"/>
+              </a:spcAft>
+              <a:buClrTx/>
+              <a:buSzTx/>
+              <a:buFontTx/>
+              <a:buNone/>
+              <a:tabLst/>
+              <a:defRPr/>
+            </a:pPr>
+            <a:endParaRPr kumimoji="0" lang="en-US" sz="1215" b="0" i="0" u="none" strike="noStrike" kern="1200" cap="none" spc="0" normalizeH="0" baseline="0" noProof="0">
+              <a:ln>
+                <a:noFill/>
+              </a:ln>
+              <a:solidFill>
+                <a:srgbClr val="FFFFFF"/>
+              </a:solidFill>
+              <a:effectLst/>
+              <a:uLnTx/>
+              <a:uFillTx/>
+              <a:latin typeface="Calibri"/>
+              <a:ea typeface="+mn-ea"/>
+              <a:cs typeface="+mn-cs"/>
+            </a:endParaRPr>
+          </a:p>
+        </p:txBody>
+      </p:sp>
+      <p:sp useBgFill="1">
+        <p:nvSpPr>
+          <p:cNvPr id="44" name="Rectangle 43">
+            <a:extLst>
+              <a:ext uri="{FF2B5EF4-FFF2-40B4-BE49-F238E27FC236}">
+                <a16:creationId xmlns:a16="http://schemas.microsoft.com/office/drawing/2014/main" id="{39171204-6A50-40E1-B631-84CEDFC9396A}"/>
+              </a:ext>
+              <a:ext uri="{C183D7F6-B498-43B3-948B-1728B52AA6E4}">
+                <adec:decorative xmlns:adec="http://schemas.microsoft.com/office/drawing/2017/decorative" val="1"/>
+              </a:ext>
+            </a:extLst>
+          </p:cNvPr>
+          <p:cNvSpPr>
+            <a:spLocks noGrp="1" noRot="1" noChangeAspect="1" noMove="1" noResize="1" noEditPoints="1" noAdjustHandles="1" noChangeArrowheads="1" noChangeShapeType="1" noTextEdit="1"/>
+          </p:cNvSpPr>
+          <p:nvPr>
+            <p:extLst>
+              <p:ext uri="{386F3935-93C4-4BCD-93E2-E3B085C9AB24}">
+                <p16:designElem xmlns:p16="http://schemas.microsoft.com/office/powerpoint/2015/main" val="1"/>
+              </p:ext>
+            </p:extLst>
+          </p:nvPr>
+        </p:nvSpPr>
+        <p:spPr>
+          <a:xfrm>
+            <a:off x="0" y="257175"/>
+            <a:ext cx="8229600" cy="4629150"/>
+          </a:xfrm>
+          <a:prstGeom prst="rect">
+            <a:avLst/>
+          </a:prstGeom>
+          <a:ln>
+            <a:noFill/>
+          </a:ln>
+        </p:spPr>
+        <p:style>
+          <a:lnRef idx="2">
+            <a:schemeClr val="accent1">
+              <a:shade val="50000"/>
+            </a:schemeClr>
+          </a:lnRef>
+          <a:fillRef idx="1">
+            <a:schemeClr val="accent1"/>
+          </a:fillRef>
+          <a:effectRef idx="0">
+            <a:schemeClr val="accent1"/>
+          </a:effectRef>
+          <a:fontRef idx="minor">
+            <a:schemeClr val="lt1"/>
+          </a:fontRef>
+        </p:style>
+        <p:txBody>
+          <a:bodyPr rtlCol="0" anchor="ctr"/>
+          <a:lstStyle/>
+          <a:p>
+            <a:pPr marL="0" marR="0" lvl="0" indent="0" algn="ctr" defTabSz="308610" rtl="0" eaLnBrk="1" fontAlgn="auto" latinLnBrk="0" hangingPunct="1">
+              <a:lnSpc>
+                <a:spcPct val="100000"/>
+              </a:lnSpc>
+              <a:spcBef>
+                <a:spcPts val="0"/>
+              </a:spcBef>
+              <a:spcAft>
+                <a:spcPts val="0"/>
+              </a:spcAft>
+              <a:buClrTx/>
+              <a:buSzTx/>
+              <a:buFontTx/>
+              <a:buNone/>
+              <a:tabLst/>
+              <a:defRPr/>
+            </a:pPr>
+            <a:endParaRPr kumimoji="0" lang="en-US" sz="1215" b="0" i="0" u="none" strike="noStrike" kern="1200" cap="none" spc="0" normalizeH="0" baseline="0" noProof="0">
+              <a:ln>
+                <a:noFill/>
+              </a:ln>
+              <a:solidFill>
+                <a:srgbClr val="FFFFFF"/>
+              </a:solidFill>
+              <a:effectLst/>
+              <a:uLnTx/>
+              <a:uFillTx/>
+              <a:latin typeface="Calibri"/>
+              <a:ea typeface="+mn-ea"/>
+              <a:cs typeface="+mn-cs"/>
+            </a:endParaRPr>
+          </a:p>
+        </p:txBody>
+      </p:sp>
+      <p:sp>
+        <p:nvSpPr>
+          <p:cNvPr id="46" name="Rectangle 45">
+            <a:extLst>
+              <a:ext uri="{FF2B5EF4-FFF2-40B4-BE49-F238E27FC236}">
+                <a16:creationId xmlns:a16="http://schemas.microsoft.com/office/drawing/2014/main" id="{06C973F6-5187-412F-AACC-6E3FF8A6A12C}"/>
+              </a:ext>
+              <a:ext uri="{C183D7F6-B498-43B3-948B-1728B52AA6E4}">
+                <adec:decorative xmlns:adec="http://schemas.microsoft.com/office/drawing/2017/decorative" val="1"/>
+              </a:ext>
+            </a:extLst>
+          </p:cNvPr>
+          <p:cNvSpPr>
+            <a:spLocks noGrp="1" noRot="1" noChangeAspect="1" noMove="1" noResize="1" noEditPoints="1" noAdjustHandles="1" noChangeArrowheads="1" noChangeShapeType="1" noTextEdit="1"/>
+          </p:cNvSpPr>
+          <p:nvPr>
+            <p:extLst>
+              <p:ext uri="{386F3935-93C4-4BCD-93E2-E3B085C9AB24}">
+                <p16:designElem xmlns:p16="http://schemas.microsoft.com/office/powerpoint/2015/main" val="1"/>
+              </p:ext>
+            </p:extLst>
+          </p:nvPr>
+        </p:nvSpPr>
+        <p:spPr>
+          <a:xfrm>
+            <a:off x="343999" y="592623"/>
+            <a:ext cx="746661" cy="3955321"/>
+          </a:xfrm>
+          <a:prstGeom prst="rect">
+            <a:avLst/>
+          </a:prstGeom>
+          <a:solidFill>
+            <a:srgbClr val="465359"/>
+          </a:solidFill>
+          <a:ln>
+            <a:noFill/>
+          </a:ln>
+          <a:effectLst/>
+        </p:spPr>
+        <p:style>
+          <a:lnRef idx="1">
+            <a:schemeClr val="accent1"/>
+          </a:lnRef>
+          <a:fillRef idx="3">
+            <a:schemeClr val="accent1"/>
+          </a:fillRef>
+          <a:effectRef idx="2">
+            <a:schemeClr val="accent1"/>
+          </a:effectRef>
+          <a:fontRef idx="minor">
+            <a:schemeClr val="lt1"/>
+          </a:fontRef>
+        </p:style>
+        <p:txBody>
+          <a:bodyPr/>
+          <a:lstStyle/>
+          <a:p>
+            <a:pPr marL="0" marR="0" lvl="0" indent="0" algn="l" defTabSz="308610" rtl="0" eaLnBrk="1" fontAlgn="auto" latinLnBrk="0" hangingPunct="1">
+              <a:lnSpc>
+                <a:spcPct val="100000"/>
+              </a:lnSpc>
+              <a:spcBef>
+                <a:spcPts val="0"/>
+              </a:spcBef>
+              <a:spcAft>
+                <a:spcPts val="0"/>
+              </a:spcAft>
+              <a:buClrTx/>
+              <a:buSzTx/>
+              <a:buFontTx/>
+              <a:buNone/>
+              <a:tabLst/>
+              <a:defRPr/>
+            </a:pPr>
+            <a:endParaRPr kumimoji="0" lang="en-US" sz="1215" b="0" i="0" u="none" strike="noStrike" kern="1200" cap="none" spc="0" normalizeH="0" baseline="0" noProof="0">
+              <a:ln>
+                <a:noFill/>
+              </a:ln>
+              <a:solidFill>
+                <a:srgbClr val="FFFFFF"/>
+              </a:solidFill>
+              <a:effectLst/>
+              <a:uLnTx/>
+              <a:uFillTx/>
+              <a:latin typeface="Calibri"/>
+              <a:ea typeface="+mn-ea"/>
+              <a:cs typeface="+mn-cs"/>
+            </a:endParaRPr>
+          </a:p>
+        </p:txBody>
+      </p:sp>
+      <p:sp>
+        <p:nvSpPr>
+          <p:cNvPr id="48" name="Rectangle 47">
+            <a:extLst>
+              <a:ext uri="{FF2B5EF4-FFF2-40B4-BE49-F238E27FC236}">
+                <a16:creationId xmlns:a16="http://schemas.microsoft.com/office/drawing/2014/main" id="{D11AE14F-1B7E-41E6-B579-2F71D135036C}"/>
+              </a:ext>
+              <a:ext uri="{C183D7F6-B498-43B3-948B-1728B52AA6E4}">
+                <adec:decorative xmlns:adec="http://schemas.microsoft.com/office/drawing/2017/decorative" val="1"/>
+              </a:ext>
+            </a:extLst>
+          </p:cNvPr>
+          <p:cNvSpPr>
+            <a:spLocks noGrp="1" noRot="1" noChangeAspect="1" noMove="1" noResize="1" noEditPoints="1" noAdjustHandles="1" noChangeArrowheads="1" noChangeShapeType="1" noTextEdit="1"/>
+          </p:cNvSpPr>
+          <p:nvPr>
+            <p:extLst>
+              <p:ext uri="{386F3935-93C4-4BCD-93E2-E3B085C9AB24}">
+                <p16:designElem xmlns:p16="http://schemas.microsoft.com/office/powerpoint/2015/main" val="1"/>
+              </p:ext>
+            </p:extLst>
+          </p:nvPr>
+        </p:nvSpPr>
+        <p:spPr>
+          <a:xfrm>
+            <a:off x="1156178" y="592621"/>
+            <a:ext cx="6723707" cy="2482699"/>
+          </a:xfrm>
+          <a:prstGeom prst="rect">
+            <a:avLst/>
+          </a:prstGeom>
+          <a:solidFill>
+            <a:schemeClr val="accent1"/>
+          </a:solidFill>
+          <a:ln>
+            <a:noFill/>
+          </a:ln>
+          <a:effectLst/>
+        </p:spPr>
+        <p:style>
+          <a:lnRef idx="1">
+            <a:schemeClr val="accent1"/>
+          </a:lnRef>
+          <a:fillRef idx="3">
+            <a:schemeClr val="accent1"/>
+          </a:fillRef>
+          <a:effectRef idx="2">
+            <a:schemeClr val="accent1"/>
+          </a:effectRef>
+          <a:fontRef idx="minor">
+            <a:schemeClr val="lt1"/>
+          </a:fontRef>
+        </p:style>
+        <p:txBody>
+          <a:bodyPr/>
+          <a:lstStyle/>
+          <a:p>
+            <a:pPr marL="0" marR="0" lvl="0" indent="0" algn="l" defTabSz="308610" rtl="0" eaLnBrk="1" fontAlgn="auto" latinLnBrk="0" hangingPunct="1">
+              <a:lnSpc>
+                <a:spcPct val="100000"/>
+              </a:lnSpc>
+              <a:spcBef>
+                <a:spcPts val="0"/>
+              </a:spcBef>
+              <a:spcAft>
+                <a:spcPts val="0"/>
+              </a:spcAft>
+              <a:buClrTx/>
+              <a:buSzTx/>
+              <a:buFontTx/>
+              <a:buNone/>
+              <a:tabLst/>
+              <a:defRPr/>
+            </a:pPr>
+            <a:endParaRPr kumimoji="0" lang="en-US" sz="1215" b="0" i="0" u="none" strike="noStrike" kern="1200" cap="none" spc="0" normalizeH="0" baseline="0" noProof="0">
+              <a:ln>
+                <a:noFill/>
+              </a:ln>
+              <a:solidFill>
+                <a:srgbClr val="FFFFFF"/>
+              </a:solidFill>
+              <a:effectLst/>
+              <a:uLnTx/>
+              <a:uFillTx/>
+              <a:latin typeface="Calibri"/>
+              <a:ea typeface="+mn-ea"/>
+              <a:cs typeface="+mn-cs"/>
+            </a:endParaRPr>
+          </a:p>
+        </p:txBody>
+      </p:sp>
+      <p:sp>
+        <p:nvSpPr>
+          <p:cNvPr id="2" name="Title 1">
+            <a:extLst>
+              <a:ext uri="{FF2B5EF4-FFF2-40B4-BE49-F238E27FC236}">
+                <a16:creationId xmlns:a16="http://schemas.microsoft.com/office/drawing/2014/main" id="{3778BAB5-C1DE-8DAD-E76F-BECA6F24C1F4}"/>
+              </a:ext>
+            </a:extLst>
+          </p:cNvPr>
+          <p:cNvSpPr>
+            <a:spLocks noGrp="1"/>
+          </p:cNvSpPr>
+          <p:nvPr>
+            <p:ph type="title"/>
+          </p:nvPr>
+        </p:nvSpPr>
+        <p:spPr>
+          <a:xfrm>
+            <a:off x="1278258" y="735412"/>
+            <a:ext cx="6492542" cy="2247787"/>
+          </a:xfrm>
+        </p:spPr>
+        <p:txBody>
+          <a:bodyPr vert="horz" lIns="61722" tIns="30861" rIns="61722" bIns="30861" rtlCol="0" anchor="ctr">
+            <a:normAutofit/>
+          </a:bodyPr>
+          <a:lstStyle/>
+          <a:p>
+            <a:r>
+              <a:rPr lang="en-US" sz="4050" dirty="0">
+                <a:solidFill>
+                  <a:srgbClr val="FFFFFF"/>
+                </a:solidFill>
+              </a:rPr>
+              <a:t>12.2 </a:t>
+            </a:r>
+            <a:br>
+              <a:rPr lang="en-US" sz="4050" dirty="0">
+                <a:solidFill>
+                  <a:srgbClr val="FFFFFF"/>
+                </a:solidFill>
+              </a:rPr>
+            </a:br>
+            <a:r>
+              <a:rPr lang="en-US" sz="4050" dirty="0">
+                <a:solidFill>
+                  <a:srgbClr val="FFFFFF"/>
+                </a:solidFill>
+              </a:rPr>
+              <a:t>Lab session</a:t>
+            </a:r>
+          </a:p>
+        </p:txBody>
+      </p:sp>
+      <p:sp>
+        <p:nvSpPr>
+          <p:cNvPr id="50" name="Rectangle 49">
+            <a:extLst>
+              <a:ext uri="{FF2B5EF4-FFF2-40B4-BE49-F238E27FC236}">
+                <a16:creationId xmlns:a16="http://schemas.microsoft.com/office/drawing/2014/main" id="{752BB805-F7B7-4B80-A1C5-385D4DAF74D0}"/>
+              </a:ext>
+              <a:ext uri="{C183D7F6-B498-43B3-948B-1728B52AA6E4}">
+                <adec:decorative xmlns:adec="http://schemas.microsoft.com/office/drawing/2017/decorative" val="1"/>
+              </a:ext>
+            </a:extLst>
+          </p:cNvPr>
+          <p:cNvSpPr>
+            <a:spLocks noGrp="1" noRot="1" noChangeAspect="1" noMove="1" noResize="1" noEditPoints="1" noAdjustHandles="1" noChangeArrowheads="1" noChangeShapeType="1" noTextEdit="1"/>
+          </p:cNvSpPr>
+          <p:nvPr>
+            <p:extLst>
+              <p:ext uri="{386F3935-93C4-4BCD-93E2-E3B085C9AB24}">
+                <p16:designElem xmlns:p16="http://schemas.microsoft.com/office/powerpoint/2015/main" val="1"/>
+              </p:ext>
+            </p:extLst>
+          </p:nvPr>
+        </p:nvSpPr>
+        <p:spPr>
+          <a:xfrm>
+            <a:off x="1156133" y="3149018"/>
+            <a:ext cx="6723753" cy="1398925"/>
+          </a:xfrm>
+          <a:prstGeom prst="rect">
+            <a:avLst/>
+          </a:prstGeom>
+          <a:solidFill>
+            <a:srgbClr val="6C7781">
+              <a:alpha val="80000"/>
+            </a:srgbClr>
+          </a:solidFill>
+          <a:ln>
+            <a:noFill/>
+          </a:ln>
+          <a:effectLst/>
+        </p:spPr>
+        <p:style>
+          <a:lnRef idx="1">
+            <a:schemeClr val="accent1"/>
+          </a:lnRef>
+          <a:fillRef idx="3">
+            <a:schemeClr val="accent1"/>
+          </a:fillRef>
+          <a:effectRef idx="2">
+            <a:schemeClr val="accent1"/>
+          </a:effectRef>
+          <a:fontRef idx="minor">
+            <a:schemeClr val="lt1"/>
+          </a:fontRef>
+        </p:style>
+        <p:txBody>
+          <a:bodyPr/>
+          <a:lstStyle/>
+          <a:p>
+            <a:pPr marL="0" marR="0" lvl="0" indent="0" algn="l" defTabSz="308610" rtl="0" eaLnBrk="1" fontAlgn="auto" latinLnBrk="0" hangingPunct="1">
+              <a:lnSpc>
+                <a:spcPct val="100000"/>
+              </a:lnSpc>
+              <a:spcBef>
+                <a:spcPts val="0"/>
+              </a:spcBef>
+              <a:spcAft>
+                <a:spcPts val="0"/>
+              </a:spcAft>
+              <a:buClrTx/>
+              <a:buSzTx/>
+              <a:buFontTx/>
+              <a:buNone/>
+              <a:tabLst/>
+              <a:defRPr/>
+            </a:pPr>
+            <a:endParaRPr kumimoji="0" lang="en-US" sz="1215" b="0" i="0" u="none" strike="noStrike" kern="1200" cap="none" spc="0" normalizeH="0" baseline="0" noProof="0">
+              <a:ln>
+                <a:noFill/>
+              </a:ln>
+              <a:solidFill>
+                <a:srgbClr val="FFFFFF"/>
+              </a:solidFill>
+              <a:effectLst/>
+              <a:uLnTx/>
+              <a:uFillTx/>
+              <a:latin typeface="Calibri"/>
+              <a:ea typeface="+mn-ea"/>
+              <a:cs typeface="+mn-cs"/>
+            </a:endParaRPr>
+          </a:p>
+        </p:txBody>
+      </p:sp>
     </p:spTree>
     <p:extLst>
       <p:ext uri="{BB962C8B-B14F-4D97-AF65-F5344CB8AC3E}">
-        <p14:creationId xmlns:p14="http://schemas.microsoft.com/office/powerpoint/2010/main" val="2635223018"/>
+        <p14:creationId xmlns:p14="http://schemas.microsoft.com/office/powerpoint/2010/main" val="2268424521"/>
       </p:ext>
     </p:extLst>
   </p:cSld>
   <p:clrMapOvr>
     <a:masterClrMapping/>
+  </p:clrMapOvr>
+  <p:timing>
+    <p:tnLst>
+      <p:par>
+        <p:cTn id="1" dur="indefinite" restart="never" nodeType="tmRoot">
+          <p:childTnLst>
+            <p:seq concurrent="1" nextAc="seek">
+              <p:cTn id="2" dur="indefinite" nodeType="mainSeq">
+                <p:childTnLst>
+                  <p:par>
+                    <p:cTn id="3" fill="hold">
+                      <p:stCondLst>
+                        <p:cond delay="indefinite"/>
+                        <p:cond evt="onBegin" delay="0">
+                          <p:tn val="2"/>
+                        </p:cond>
+                      </p:stCondLst>
+                      <p:childTnLst>
+                        <p:par>
+                          <p:cTn id="4" fill="hold">
+                            <p:stCondLst>
+                              <p:cond delay="0"/>
+                            </p:stCondLst>
+                            <p:childTnLst>
+                              <p:par>
+                                <p:cTn id="5" presetID="10" presetClass="entr" presetSubtype="0" fill="hold" grpId="0" nodeType="withEffect">
+                                  <p:stCondLst>
+                                    <p:cond delay="500"/>
+                                  </p:stCondLst>
+                                  <p:iterate type="wd">
+                                    <p:tmPct val="15000"/>
+                                  </p:iterate>
+                                  <p:childTnLst>
+                                    <p:set>
+                                      <p:cBhvr>
+                                        <p:cTn id="6" dur="1" fill="hold">
+                                          <p:stCondLst>
+                                            <p:cond delay="0"/>
+                                          </p:stCondLst>
+                                        </p:cTn>
+                                        <p:tgtEl>
+                                          <p:spTgt spid="2"/>
+                                        </p:tgtEl>
+                                        <p:attrNameLst>
+                                          <p:attrName>style.visibility</p:attrName>
+                                        </p:attrNameLst>
+                                      </p:cBhvr>
+                                      <p:to>
+                                        <p:strVal val="visible"/>
+                                      </p:to>
+                                    </p:set>
+                                    <p:animEffect transition="in" filter="fade">
+                                      <p:cBhvr>
+                                        <p:cTn id="7" dur="1000"/>
+                                        <p:tgtEl>
+                                          <p:spTgt spid="2"/>
+                                        </p:tgtEl>
+                                      </p:cBhvr>
+                                    </p:animEffect>
+                                  </p:childTnLst>
+                                </p:cTn>
+                              </p:par>
+                            </p:childTnLst>
+                          </p:cTn>
+                        </p:par>
+                      </p:childTnLst>
+                    </p:cTn>
+                  </p:par>
+                </p:childTnLst>
+              </p:cTn>
+              <p:prevCondLst>
+                <p:cond evt="onPrev" delay="0">
+                  <p:tgtEl>
+                    <p:sldTgt/>
+                  </p:tgtEl>
+                </p:cond>
+              </p:prevCondLst>
+              <p:nextCondLst>
+                <p:cond evt="onNext" delay="0">
+                  <p:tgtEl>
+                    <p:sldTgt/>
+                  </p:tgtEl>
+                </p:cond>
+              </p:nextCondLst>
+            </p:seq>
+          </p:childTnLst>
+        </p:cTn>
+      </p:par>
+    </p:tnLst>
+    <p:bldLst>
+      <p:bldP spid="2" grpId="0"/>
+    </p:bldLst>
+  </p:timing>
+</p:sld>
+</file>
+
+<file path=ppt/slides/slide28.xml><?xml version="1.0" encoding="utf-8"?>
+<p:sld xmlns:a="http://schemas.openxmlformats.org/drawingml/2006/main" xmlns:r="http://schemas.openxmlformats.org/officeDocument/2006/relationships" xmlns:p="http://schemas.openxmlformats.org/presentationml/2006/main">
+  <p:cSld>
+    <p:bg>
+      <p:bgPr>
+        <a:solidFill>
+          <a:schemeClr val="bg1"/>
+        </a:solidFill>
+        <a:effectLst/>
+      </p:bgPr>
+    </p:bg>
+    <p:spTree>
+      <p:nvGrpSpPr>
+        <p:cNvPr id="1" name=""/>
+        <p:cNvGrpSpPr/>
+        <p:nvPr/>
+      </p:nvGrpSpPr>
+      <p:grpSpPr>
+        <a:xfrm>
+          <a:off x="0" y="0"/>
+          <a:ext cx="0" cy="0"/>
+          <a:chOff x="0" y="0"/>
+          <a:chExt cx="0" cy="0"/>
+        </a:xfrm>
+      </p:grpSpPr>
+      <p:sp>
+        <p:nvSpPr>
+          <p:cNvPr id="9" name="Rectangle 8">
+            <a:extLst>
+              <a:ext uri="{FF2B5EF4-FFF2-40B4-BE49-F238E27FC236}">
+                <a16:creationId xmlns:a16="http://schemas.microsoft.com/office/drawing/2014/main" id="{BFABBCE0-E08C-4BBE-9FD2-E2B253D4D5F2}"/>
+              </a:ext>
+              <a:ext uri="{C183D7F6-B498-43B3-948B-1728B52AA6E4}">
+                <adec:decorative xmlns:adec="http://schemas.microsoft.com/office/drawing/2017/decorative" val="1"/>
+              </a:ext>
+            </a:extLst>
+          </p:cNvPr>
+          <p:cNvSpPr>
+            <a:spLocks noGrp="1" noRot="1" noChangeAspect="1" noMove="1" noResize="1" noEditPoints="1" noAdjustHandles="1" noChangeArrowheads="1" noChangeShapeType="1" noTextEdit="1"/>
+          </p:cNvSpPr>
+          <p:nvPr>
+            <p:extLst>
+              <p:ext uri="{386F3935-93C4-4BCD-93E2-E3B085C9AB24}">
+                <p16:designElem xmlns:p16="http://schemas.microsoft.com/office/powerpoint/2015/main" val="1"/>
+              </p:ext>
+            </p:extLst>
+          </p:nvPr>
+        </p:nvSpPr>
+        <p:spPr>
+          <a:xfrm>
+            <a:off x="0" y="257176"/>
+            <a:ext cx="8229600" cy="4629149"/>
+          </a:xfrm>
+          <a:prstGeom prst="rect">
+            <a:avLst/>
+          </a:prstGeom>
+          <a:solidFill>
+            <a:schemeClr val="bg1">
+              <a:lumMod val="75000"/>
+              <a:lumOff val="25000"/>
+            </a:schemeClr>
+          </a:solidFill>
+          <a:ln>
+            <a:noFill/>
+          </a:ln>
+        </p:spPr>
+        <p:style>
+          <a:lnRef idx="2">
+            <a:schemeClr val="accent1">
+              <a:shade val="50000"/>
+            </a:schemeClr>
+          </a:lnRef>
+          <a:fillRef idx="1">
+            <a:schemeClr val="accent1"/>
+          </a:fillRef>
+          <a:effectRef idx="0">
+            <a:schemeClr val="accent1"/>
+          </a:effectRef>
+          <a:fontRef idx="minor">
+            <a:schemeClr val="lt1"/>
+          </a:fontRef>
+        </p:style>
+        <p:txBody>
+          <a:bodyPr rtlCol="0" anchor="ctr"/>
+          <a:lstStyle/>
+          <a:p>
+            <a:pPr marL="0" marR="0" lvl="0" indent="0" algn="ctr" defTabSz="308610" rtl="0" eaLnBrk="1" fontAlgn="auto" latinLnBrk="0" hangingPunct="1">
+              <a:lnSpc>
+                <a:spcPct val="100000"/>
+              </a:lnSpc>
+              <a:spcBef>
+                <a:spcPts val="0"/>
+              </a:spcBef>
+              <a:spcAft>
+                <a:spcPts val="0"/>
+              </a:spcAft>
+              <a:buClrTx/>
+              <a:buSzTx/>
+              <a:buFontTx/>
+              <a:buNone/>
+              <a:tabLst/>
+              <a:defRPr/>
+            </a:pPr>
+            <a:endParaRPr kumimoji="0" lang="en-US" sz="1215" b="0" i="0" u="none" strike="noStrike" kern="1200" cap="none" spc="0" normalizeH="0" baseline="0" noProof="0">
+              <a:ln>
+                <a:noFill/>
+              </a:ln>
+              <a:solidFill>
+                <a:prstClr val="white"/>
+              </a:solidFill>
+              <a:effectLst/>
+              <a:uLnTx/>
+              <a:uFillTx/>
+              <a:latin typeface="Gill Sans MT" panose="020B0502020104020203"/>
+              <a:ea typeface="+mn-ea"/>
+              <a:cs typeface="+mn-cs"/>
+            </a:endParaRPr>
+          </a:p>
+        </p:txBody>
+      </p:sp>
+      <p:sp>
+        <p:nvSpPr>
+          <p:cNvPr id="2" name="Title 1">
+            <a:extLst>
+              <a:ext uri="{FF2B5EF4-FFF2-40B4-BE49-F238E27FC236}">
+                <a16:creationId xmlns:a16="http://schemas.microsoft.com/office/drawing/2014/main" id="{500F975A-F937-77A1-413D-F51FF137F9AD}"/>
+              </a:ext>
+            </a:extLst>
+          </p:cNvPr>
+          <p:cNvSpPr>
+            <a:spLocks noGrp="1"/>
+          </p:cNvSpPr>
+          <p:nvPr>
+            <p:ph type="title"/>
+          </p:nvPr>
+        </p:nvSpPr>
+        <p:spPr>
+          <a:xfrm>
+            <a:off x="392417" y="865356"/>
+            <a:ext cx="7444991" cy="462049"/>
+          </a:xfrm>
+        </p:spPr>
+        <p:txBody>
+          <a:bodyPr>
+            <a:normAutofit/>
+          </a:bodyPr>
+          <a:lstStyle/>
+          <a:p>
+            <a:pPr algn="ctr">
+              <a:spcBef>
+                <a:spcPts val="0"/>
+              </a:spcBef>
+              <a:spcAft>
+                <a:spcPts val="398"/>
+              </a:spcAft>
+            </a:pPr>
+            <a:r>
+              <a:rPr lang="en-US" sz="2160" b="1" dirty="0">
+                <a:solidFill>
+                  <a:schemeClr val="tx1">
+                    <a:lumMod val="85000"/>
+                    <a:lumOff val="15000"/>
+                  </a:schemeClr>
+                </a:solidFill>
+                <a:latin typeface="+mn-lt"/>
+                <a:ea typeface="Calibri" panose="020F0502020204030204" pitchFamily="34" charset="0"/>
+                <a:cs typeface="Calibri" panose="020F0502020204030204" pitchFamily="34" charset="0"/>
+              </a:rPr>
+              <a:t>Lab 08: </a:t>
+            </a:r>
+            <a:r>
+              <a:rPr lang="en-US" b="1" dirty="0"/>
+              <a:t>Vector Analysis</a:t>
+            </a:r>
+            <a:endParaRPr lang="en-US" sz="2160" dirty="0">
+              <a:solidFill>
+                <a:schemeClr val="tx1">
+                  <a:lumMod val="85000"/>
+                  <a:lumOff val="15000"/>
+                </a:schemeClr>
+              </a:solidFill>
+              <a:latin typeface="+mn-lt"/>
+              <a:ea typeface="Calibri" panose="020F0502020204030204" pitchFamily="34" charset="0"/>
+              <a:cs typeface="Calibri" panose="020F0502020204030204" pitchFamily="34" charset="0"/>
+            </a:endParaRPr>
+          </a:p>
+        </p:txBody>
+      </p:sp>
+      <p:sp>
+        <p:nvSpPr>
+          <p:cNvPr id="11" name="Rectangle 10">
+            <a:extLst>
+              <a:ext uri="{FF2B5EF4-FFF2-40B4-BE49-F238E27FC236}">
+                <a16:creationId xmlns:a16="http://schemas.microsoft.com/office/drawing/2014/main" id="{FF426BAC-43D6-468E-B6FF-167034D5CE43}"/>
+              </a:ext>
+              <a:ext uri="{C183D7F6-B498-43B3-948B-1728B52AA6E4}">
+                <adec:decorative xmlns:adec="http://schemas.microsoft.com/office/drawing/2017/decorative" val="1"/>
+              </a:ext>
+            </a:extLst>
+          </p:cNvPr>
+          <p:cNvSpPr>
+            <a:spLocks noGrp="1" noRot="1" noChangeAspect="1" noMove="1" noResize="1" noEditPoints="1" noAdjustHandles="1" noChangeArrowheads="1" noChangeShapeType="1" noTextEdit="1"/>
+          </p:cNvSpPr>
+          <p:nvPr>
+            <p:extLst>
+              <p:ext uri="{386F3935-93C4-4BCD-93E2-E3B085C9AB24}">
+                <p16:designElem xmlns:p16="http://schemas.microsoft.com/office/powerpoint/2015/main" val="1"/>
+              </p:ext>
+            </p:extLst>
+          </p:nvPr>
+        </p:nvSpPr>
+        <p:spPr>
+          <a:xfrm>
+            <a:off x="301410" y="565785"/>
+            <a:ext cx="2499741" cy="64123"/>
+          </a:xfrm>
+          <a:prstGeom prst="rect">
+            <a:avLst/>
+          </a:prstGeom>
+          <a:solidFill>
+            <a:srgbClr val="60727A"/>
+          </a:solidFill>
+          <a:ln>
+            <a:noFill/>
+          </a:ln>
+          <a:effectLst/>
+        </p:spPr>
+        <p:style>
+          <a:lnRef idx="1">
+            <a:schemeClr val="accent1"/>
+          </a:lnRef>
+          <a:fillRef idx="3">
+            <a:schemeClr val="accent1"/>
+          </a:fillRef>
+          <a:effectRef idx="2">
+            <a:schemeClr val="accent1"/>
+          </a:effectRef>
+          <a:fontRef idx="minor">
+            <a:schemeClr val="lt1"/>
+          </a:fontRef>
+        </p:style>
+        <p:txBody>
+          <a:bodyPr/>
+          <a:lstStyle/>
+          <a:p>
+            <a:pPr marL="0" marR="0" lvl="0" indent="0" algn="l" defTabSz="617220" rtl="0" eaLnBrk="1" fontAlgn="auto" latinLnBrk="0" hangingPunct="1">
+              <a:lnSpc>
+                <a:spcPct val="100000"/>
+              </a:lnSpc>
+              <a:spcBef>
+                <a:spcPts val="0"/>
+              </a:spcBef>
+              <a:spcAft>
+                <a:spcPts val="0"/>
+              </a:spcAft>
+              <a:buClrTx/>
+              <a:buSzTx/>
+              <a:buFontTx/>
+              <a:buNone/>
+              <a:tabLst/>
+              <a:defRPr/>
+            </a:pPr>
+            <a:endParaRPr kumimoji="0" lang="en-US" sz="1215" b="0" i="0" u="none" strike="noStrike" kern="1200" cap="none" spc="0" normalizeH="0" baseline="0" noProof="0">
+              <a:ln>
+                <a:noFill/>
+              </a:ln>
+              <a:solidFill>
+                <a:srgbClr val="FFFFFF"/>
+              </a:solidFill>
+              <a:effectLst/>
+              <a:uLnTx/>
+              <a:uFillTx/>
+              <a:latin typeface="Calibri"/>
+              <a:ea typeface="+mn-ea"/>
+              <a:cs typeface="+mn-cs"/>
+            </a:endParaRPr>
+          </a:p>
+        </p:txBody>
+      </p:sp>
+      <p:sp>
+        <p:nvSpPr>
+          <p:cNvPr id="13" name="Rectangle 12">
+            <a:extLst>
+              <a:ext uri="{FF2B5EF4-FFF2-40B4-BE49-F238E27FC236}">
+                <a16:creationId xmlns:a16="http://schemas.microsoft.com/office/drawing/2014/main" id="{FB02D80E-5995-4C54-8387-5893C2C89473}"/>
+              </a:ext>
+              <a:ext uri="{C183D7F6-B498-43B3-948B-1728B52AA6E4}">
+                <adec:decorative xmlns:adec="http://schemas.microsoft.com/office/drawing/2017/decorative" val="1"/>
+              </a:ext>
+            </a:extLst>
+          </p:cNvPr>
+          <p:cNvSpPr>
+            <a:spLocks noGrp="1" noRot="1" noChangeAspect="1" noMove="1" noResize="1" noEditPoints="1" noAdjustHandles="1" noChangeArrowheads="1" noChangeShapeType="1" noTextEdit="1"/>
+          </p:cNvSpPr>
+          <p:nvPr>
+            <p:extLst>
+              <p:ext uri="{386F3935-93C4-4BCD-93E2-E3B085C9AB24}">
+                <p16:designElem xmlns:p16="http://schemas.microsoft.com/office/powerpoint/2015/main" val="1"/>
+              </p:ext>
+            </p:extLst>
+          </p:nvPr>
+        </p:nvSpPr>
+        <p:spPr>
+          <a:xfrm>
+            <a:off x="2863235" y="565785"/>
+            <a:ext cx="2499741" cy="61722"/>
+          </a:xfrm>
+          <a:prstGeom prst="rect">
+            <a:avLst/>
+          </a:prstGeom>
+          <a:solidFill>
+            <a:schemeClr val="accent1"/>
+          </a:solidFill>
+          <a:ln>
+            <a:noFill/>
+          </a:ln>
+          <a:effectLst/>
+        </p:spPr>
+        <p:style>
+          <a:lnRef idx="1">
+            <a:schemeClr val="accent1"/>
+          </a:lnRef>
+          <a:fillRef idx="3">
+            <a:schemeClr val="accent1"/>
+          </a:fillRef>
+          <a:effectRef idx="2">
+            <a:schemeClr val="accent1"/>
+          </a:effectRef>
+          <a:fontRef idx="minor">
+            <a:schemeClr val="lt1"/>
+          </a:fontRef>
+        </p:style>
+        <p:txBody>
+          <a:bodyPr/>
+          <a:lstStyle/>
+          <a:p>
+            <a:pPr marL="0" marR="0" lvl="0" indent="0" algn="l" defTabSz="617220" rtl="0" eaLnBrk="1" fontAlgn="auto" latinLnBrk="0" hangingPunct="1">
+              <a:lnSpc>
+                <a:spcPct val="100000"/>
+              </a:lnSpc>
+              <a:spcBef>
+                <a:spcPts val="0"/>
+              </a:spcBef>
+              <a:spcAft>
+                <a:spcPts val="0"/>
+              </a:spcAft>
+              <a:buClrTx/>
+              <a:buSzTx/>
+              <a:buFontTx/>
+              <a:buNone/>
+              <a:tabLst/>
+              <a:defRPr/>
+            </a:pPr>
+            <a:endParaRPr kumimoji="0" lang="en-US" sz="1215" b="0" i="0" u="none" strike="noStrike" kern="1200" cap="none" spc="0" normalizeH="0" baseline="0" noProof="0">
+              <a:ln>
+                <a:noFill/>
+              </a:ln>
+              <a:solidFill>
+                <a:srgbClr val="FFFFFF"/>
+              </a:solidFill>
+              <a:effectLst/>
+              <a:uLnTx/>
+              <a:uFillTx/>
+              <a:latin typeface="Calibri"/>
+              <a:ea typeface="+mn-ea"/>
+              <a:cs typeface="+mn-cs"/>
+            </a:endParaRPr>
+          </a:p>
+        </p:txBody>
+      </p:sp>
+      <p:sp>
+        <p:nvSpPr>
+          <p:cNvPr id="15" name="Rectangle 14">
+            <a:extLst>
+              <a:ext uri="{FF2B5EF4-FFF2-40B4-BE49-F238E27FC236}">
+                <a16:creationId xmlns:a16="http://schemas.microsoft.com/office/drawing/2014/main" id="{896083C8-1401-4950-AF56-E2FAFE42D656}"/>
+              </a:ext>
+              <a:ext uri="{C183D7F6-B498-43B3-948B-1728B52AA6E4}">
+                <adec:decorative xmlns:adec="http://schemas.microsoft.com/office/drawing/2017/decorative" val="1"/>
+              </a:ext>
+            </a:extLst>
+          </p:cNvPr>
+          <p:cNvSpPr>
+            <a:spLocks noGrp="1" noRot="1" noChangeAspect="1" noMove="1" noResize="1" noEditPoints="1" noAdjustHandles="1" noChangeArrowheads="1" noChangeShapeType="1" noTextEdit="1"/>
+          </p:cNvSpPr>
+          <p:nvPr>
+            <p:extLst>
+              <p:ext uri="{386F3935-93C4-4BCD-93E2-E3B085C9AB24}">
+                <p16:designElem xmlns:p16="http://schemas.microsoft.com/office/powerpoint/2015/main" val="1"/>
+              </p:ext>
+            </p:extLst>
+          </p:nvPr>
+        </p:nvSpPr>
+        <p:spPr>
+          <a:xfrm>
+            <a:off x="5428449" y="563384"/>
+            <a:ext cx="2499741" cy="66524"/>
+          </a:xfrm>
+          <a:prstGeom prst="rect">
+            <a:avLst/>
+          </a:prstGeom>
+          <a:solidFill>
+            <a:srgbClr val="969FA7"/>
+          </a:solidFill>
+          <a:ln>
+            <a:noFill/>
+          </a:ln>
+          <a:effectLst/>
+        </p:spPr>
+        <p:style>
+          <a:lnRef idx="1">
+            <a:schemeClr val="accent1"/>
+          </a:lnRef>
+          <a:fillRef idx="3">
+            <a:schemeClr val="accent1"/>
+          </a:fillRef>
+          <a:effectRef idx="2">
+            <a:schemeClr val="accent1"/>
+          </a:effectRef>
+          <a:fontRef idx="minor">
+            <a:schemeClr val="lt1"/>
+          </a:fontRef>
+        </p:style>
+        <p:txBody>
+          <a:bodyPr/>
+          <a:lstStyle/>
+          <a:p>
+            <a:pPr marL="0" marR="0" lvl="0" indent="0" algn="l" defTabSz="617220" rtl="0" eaLnBrk="1" fontAlgn="auto" latinLnBrk="0" hangingPunct="1">
+              <a:lnSpc>
+                <a:spcPct val="100000"/>
+              </a:lnSpc>
+              <a:spcBef>
+                <a:spcPts val="0"/>
+              </a:spcBef>
+              <a:spcAft>
+                <a:spcPts val="0"/>
+              </a:spcAft>
+              <a:buClrTx/>
+              <a:buSzTx/>
+              <a:buFontTx/>
+              <a:buNone/>
+              <a:tabLst/>
+              <a:defRPr/>
+            </a:pPr>
+            <a:endParaRPr kumimoji="0" lang="en-US" sz="1215" b="0" i="0" u="none" strike="noStrike" kern="1200" cap="none" spc="0" normalizeH="0" baseline="0" noProof="0">
+              <a:ln>
+                <a:noFill/>
+              </a:ln>
+              <a:solidFill>
+                <a:srgbClr val="FFFFFF"/>
+              </a:solidFill>
+              <a:effectLst/>
+              <a:uLnTx/>
+              <a:uFillTx/>
+              <a:latin typeface="Calibri"/>
+              <a:ea typeface="+mn-ea"/>
+              <a:cs typeface="+mn-cs"/>
+            </a:endParaRPr>
+          </a:p>
+        </p:txBody>
+      </p:sp>
+      <p:graphicFrame>
+        <p:nvGraphicFramePr>
+          <p:cNvPr id="5" name="Content Placeholder 2">
+            <a:extLst>
+              <a:ext uri="{FF2B5EF4-FFF2-40B4-BE49-F238E27FC236}">
+                <a16:creationId xmlns:a16="http://schemas.microsoft.com/office/drawing/2014/main" id="{F61B7E67-130C-FD82-8132-74DBD62B80A6}"/>
+              </a:ext>
+            </a:extLst>
+          </p:cNvPr>
+          <p:cNvGraphicFramePr>
+            <a:graphicFrameLocks noGrp="1"/>
+          </p:cNvGraphicFramePr>
+          <p:nvPr>
+            <p:ph idx="1"/>
+          </p:nvPr>
+        </p:nvGraphicFramePr>
+        <p:xfrm>
+          <a:off x="392192" y="1837730"/>
+          <a:ext cx="7445216" cy="2574640"/>
+        </p:xfrm>
+        <a:graphic>
+          <a:graphicData uri="http://schemas.openxmlformats.org/drawingml/2006/diagram">
+            <dgm:relIds xmlns:dgm="http://schemas.openxmlformats.org/drawingml/2006/diagram" xmlns:r="http://schemas.openxmlformats.org/officeDocument/2006/relationships" r:dm="rId3" r:lo="rId4" r:qs="rId5" r:cs="rId6"/>
+          </a:graphicData>
+        </a:graphic>
+      </p:graphicFrame>
+    </p:spTree>
+    <p:extLst>
+      <p:ext uri="{BB962C8B-B14F-4D97-AF65-F5344CB8AC3E}">
+        <p14:creationId xmlns:p14="http://schemas.microsoft.com/office/powerpoint/2010/main" val="18827850"/>
+      </p:ext>
+    </p:extLst>
+  </p:cSld>
+  <p:clrMapOvr>
+    <a:overrideClrMapping bg1="dk1" tx1="lt1" bg2="dk2" tx2="lt2" accent1="accent1" accent2="accent2" accent3="accent3" accent4="accent4" accent5="accent5" accent6="accent6" hlink="hlink" folHlink="folHlink"/>
   </p:clrMapOvr>
 </p:sld>
 </file>
